--- a/SSPS_11.12_sketch.pptx
+++ b/SSPS_11.12_sketch.pptx
@@ -1,19 +1,27 @@
 
 <file path=ppt/presentation.xml><?xml version="1.0" encoding="utf-8"?>
-<p:presentation xmlns:a="http://schemas.openxmlformats.org/drawingml/2006/main" xmlns:r="http://schemas.openxmlformats.org/officeDocument/2006/relationships" xmlns:p="http://schemas.openxmlformats.org/presentationml/2006/main" saveSubsetFonts="1" autoCompressPictures="0">
+<p:presentation xmlns:a="http://schemas.openxmlformats.org/drawingml/2006/main" xmlns:r="http://schemas.openxmlformats.org/officeDocument/2006/relationships" xmlns:p="http://schemas.openxmlformats.org/presentationml/2006/main" showSpecialPlsOnTitleSld="0" saveSubsetFonts="1" autoCompressPictures="0">
   <p:sldMasterIdLst>
     <p:sldMasterId id="2147483648" r:id="rId1"/>
   </p:sldMasterIdLst>
+  <p:notesMasterIdLst>
+    <p:notesMasterId r:id="rId16"/>
+  </p:notesMasterIdLst>
   <p:sldIdLst>
     <p:sldId id="256" r:id="rId2"/>
     <p:sldId id="257" r:id="rId3"/>
-    <p:sldId id="261" r:id="rId4"/>
-    <p:sldId id="259" r:id="rId5"/>
-    <p:sldId id="260" r:id="rId6"/>
-    <p:sldId id="265" r:id="rId7"/>
-    <p:sldId id="262" r:id="rId8"/>
-    <p:sldId id="263" r:id="rId9"/>
-    <p:sldId id="264" r:id="rId10"/>
+    <p:sldId id="266" r:id="rId4"/>
+    <p:sldId id="261" r:id="rId5"/>
+    <p:sldId id="259" r:id="rId6"/>
+    <p:sldId id="262" r:id="rId7"/>
+    <p:sldId id="268" r:id="rId8"/>
+    <p:sldId id="264" r:id="rId9"/>
+    <p:sldId id="267" r:id="rId10"/>
+    <p:sldId id="269" r:id="rId11"/>
+    <p:sldId id="270" r:id="rId12"/>
+    <p:sldId id="260" r:id="rId13"/>
+    <p:sldId id="265" r:id="rId14"/>
+    <p:sldId id="263" r:id="rId15"/>
   </p:sldIdLst>
   <p:sldSz cx="12192000" cy="6858000"/>
   <p:notesSz cx="6858000" cy="9144000"/>
@@ -112,7 +120,362 @@
       </a:defRPr>
     </a:lvl9pPr>
   </p:defaultTextStyle>
+  <p:extLst>
+    <p:ext uri="{EFAFB233-063F-42B5-8137-9DF3F51BA10A}">
+      <p15:sldGuideLst xmlns:p15="http://schemas.microsoft.com/office/powerpoint/2012/main"/>
+    </p:ext>
+  </p:extLst>
 </p:presentation>
+</file>
+
+<file path=ppt/notesMasters/notesMaster1.xml><?xml version="1.0" encoding="utf-8"?>
+<p:notesMaster xmlns:a="http://schemas.openxmlformats.org/drawingml/2006/main" xmlns:r="http://schemas.openxmlformats.org/officeDocument/2006/relationships" xmlns:p="http://schemas.openxmlformats.org/presentationml/2006/main">
+  <p:cSld>
+    <p:bg>
+      <p:bgRef idx="1001">
+        <a:schemeClr val="bg1"/>
+      </p:bgRef>
+    </p:bg>
+    <p:spTree>
+      <p:nvGrpSpPr>
+        <p:cNvPr id="1" name=""/>
+        <p:cNvGrpSpPr/>
+        <p:nvPr/>
+      </p:nvGrpSpPr>
+      <p:grpSpPr>
+        <a:xfrm>
+          <a:off x="0" y="0"/>
+          <a:ext cx="0" cy="0"/>
+          <a:chOff x="0" y="0"/>
+          <a:chExt cx="0" cy="0"/>
+        </a:xfrm>
+      </p:grpSpPr>
+      <p:sp>
+        <p:nvSpPr>
+          <p:cNvPr id="2" name="Kopfzeilenplatzhalter 1"/>
+          <p:cNvSpPr>
+            <a:spLocks noGrp="1"/>
+          </p:cNvSpPr>
+          <p:nvPr>
+            <p:ph type="hdr" sz="quarter"/>
+          </p:nvPr>
+        </p:nvSpPr>
+        <p:spPr>
+          <a:xfrm>
+            <a:off x="0" y="0"/>
+            <a:ext cx="2971800" cy="458788"/>
+          </a:xfrm>
+          <a:prstGeom prst="rect">
+            <a:avLst/>
+          </a:prstGeom>
+        </p:spPr>
+        <p:txBody>
+          <a:bodyPr vert="horz" lIns="91440" tIns="45720" rIns="91440" bIns="45720" rtlCol="0"/>
+          <a:lstStyle>
+            <a:lvl1pPr algn="l">
+              <a:defRPr sz="1200"/>
+            </a:lvl1pPr>
+          </a:lstStyle>
+          <a:p>
+            <a:endParaRPr lang="en-US"/>
+          </a:p>
+        </p:txBody>
+      </p:sp>
+      <p:sp>
+        <p:nvSpPr>
+          <p:cNvPr id="3" name="Datumsplatzhalter 2"/>
+          <p:cNvSpPr>
+            <a:spLocks noGrp="1"/>
+          </p:cNvSpPr>
+          <p:nvPr>
+            <p:ph type="dt" idx="1"/>
+          </p:nvPr>
+        </p:nvSpPr>
+        <p:spPr>
+          <a:xfrm>
+            <a:off x="3884613" y="0"/>
+            <a:ext cx="2971800" cy="458788"/>
+          </a:xfrm>
+          <a:prstGeom prst="rect">
+            <a:avLst/>
+          </a:prstGeom>
+        </p:spPr>
+        <p:txBody>
+          <a:bodyPr vert="horz" lIns="91440" tIns="45720" rIns="91440" bIns="45720" rtlCol="0"/>
+          <a:lstStyle>
+            <a:lvl1pPr algn="r">
+              <a:defRPr sz="1200"/>
+            </a:lvl1pPr>
+          </a:lstStyle>
+          <a:p>
+            <a:fld id="{1BD3FA11-E74D-424F-9AF9-4FB3E3C76A33}" type="datetimeFigureOut">
+              <a:rPr lang="en-US" smtClean="0"/>
+              <a:t>12/10/2024</a:t>
+            </a:fld>
+            <a:endParaRPr lang="en-US"/>
+          </a:p>
+        </p:txBody>
+      </p:sp>
+      <p:sp>
+        <p:nvSpPr>
+          <p:cNvPr id="4" name="Folienbildplatzhalter 3"/>
+          <p:cNvSpPr>
+            <a:spLocks noGrp="1" noRot="1" noChangeAspect="1"/>
+          </p:cNvSpPr>
+          <p:nvPr>
+            <p:ph type="sldImg" idx="2"/>
+          </p:nvPr>
+        </p:nvSpPr>
+        <p:spPr>
+          <a:xfrm>
+            <a:off x="685800" y="1143000"/>
+            <a:ext cx="5486400" cy="3086100"/>
+          </a:xfrm>
+          <a:prstGeom prst="rect">
+            <a:avLst/>
+          </a:prstGeom>
+          <a:noFill/>
+          <a:ln w="12700">
+            <a:solidFill>
+              <a:prstClr val="black"/>
+            </a:solidFill>
+          </a:ln>
+        </p:spPr>
+        <p:txBody>
+          <a:bodyPr vert="horz" lIns="91440" tIns="45720" rIns="91440" bIns="45720" rtlCol="0" anchor="ctr"/>
+          <a:lstStyle/>
+          <a:p>
+            <a:endParaRPr lang="en-US"/>
+          </a:p>
+        </p:txBody>
+      </p:sp>
+      <p:sp>
+        <p:nvSpPr>
+          <p:cNvPr id="5" name="Notizenplatzhalter 4"/>
+          <p:cNvSpPr>
+            <a:spLocks noGrp="1"/>
+          </p:cNvSpPr>
+          <p:nvPr>
+            <p:ph type="body" sz="quarter" idx="3"/>
+          </p:nvPr>
+        </p:nvSpPr>
+        <p:spPr>
+          <a:xfrm>
+            <a:off x="685800" y="4400550"/>
+            <a:ext cx="5486400" cy="3600450"/>
+          </a:xfrm>
+          <a:prstGeom prst="rect">
+            <a:avLst/>
+          </a:prstGeom>
+        </p:spPr>
+        <p:txBody>
+          <a:bodyPr vert="horz" lIns="91440" tIns="45720" rIns="91440" bIns="45720" rtlCol="0"/>
+          <a:lstStyle/>
+          <a:p>
+            <a:pPr lvl="0"/>
+            <a:r>
+              <a:rPr lang="de-DE"/>
+              <a:t>Mastertextformat bearbeiten</a:t>
+            </a:r>
+          </a:p>
+          <a:p>
+            <a:pPr lvl="1"/>
+            <a:r>
+              <a:rPr lang="de-DE"/>
+              <a:t>Zweite Ebene</a:t>
+            </a:r>
+          </a:p>
+          <a:p>
+            <a:pPr lvl="2"/>
+            <a:r>
+              <a:rPr lang="de-DE"/>
+              <a:t>Dritte Ebene</a:t>
+            </a:r>
+          </a:p>
+          <a:p>
+            <a:pPr lvl="3"/>
+            <a:r>
+              <a:rPr lang="de-DE"/>
+              <a:t>Vierte Ebene</a:t>
+            </a:r>
+          </a:p>
+          <a:p>
+            <a:pPr lvl="4"/>
+            <a:r>
+              <a:rPr lang="de-DE"/>
+              <a:t>Fünfte Ebene</a:t>
+            </a:r>
+            <a:endParaRPr lang="en-US"/>
+          </a:p>
+        </p:txBody>
+      </p:sp>
+      <p:sp>
+        <p:nvSpPr>
+          <p:cNvPr id="6" name="Fußzeilenplatzhalter 5"/>
+          <p:cNvSpPr>
+            <a:spLocks noGrp="1"/>
+          </p:cNvSpPr>
+          <p:nvPr>
+            <p:ph type="ftr" sz="quarter" idx="4"/>
+          </p:nvPr>
+        </p:nvSpPr>
+        <p:spPr>
+          <a:xfrm>
+            <a:off x="0" y="8685213"/>
+            <a:ext cx="2971800" cy="458787"/>
+          </a:xfrm>
+          <a:prstGeom prst="rect">
+            <a:avLst/>
+          </a:prstGeom>
+        </p:spPr>
+        <p:txBody>
+          <a:bodyPr vert="horz" lIns="91440" tIns="45720" rIns="91440" bIns="45720" rtlCol="0" anchor="b"/>
+          <a:lstStyle>
+            <a:lvl1pPr algn="l">
+              <a:defRPr sz="1200"/>
+            </a:lvl1pPr>
+          </a:lstStyle>
+          <a:p>
+            <a:endParaRPr lang="en-US"/>
+          </a:p>
+        </p:txBody>
+      </p:sp>
+      <p:sp>
+        <p:nvSpPr>
+          <p:cNvPr id="7" name="Foliennummernplatzhalter 6"/>
+          <p:cNvSpPr>
+            <a:spLocks noGrp="1"/>
+          </p:cNvSpPr>
+          <p:nvPr>
+            <p:ph type="sldNum" sz="quarter" idx="5"/>
+          </p:nvPr>
+        </p:nvSpPr>
+        <p:spPr>
+          <a:xfrm>
+            <a:off x="3884613" y="8685213"/>
+            <a:ext cx="2971800" cy="458787"/>
+          </a:xfrm>
+          <a:prstGeom prst="rect">
+            <a:avLst/>
+          </a:prstGeom>
+        </p:spPr>
+        <p:txBody>
+          <a:bodyPr vert="horz" lIns="91440" tIns="45720" rIns="91440" bIns="45720" rtlCol="0" anchor="b"/>
+          <a:lstStyle>
+            <a:lvl1pPr algn="r">
+              <a:defRPr sz="1200"/>
+            </a:lvl1pPr>
+          </a:lstStyle>
+          <a:p>
+            <a:fld id="{0E3443F0-A579-49C6-846A-7BC15CD230D5}" type="slidenum">
+              <a:rPr lang="en-US" smtClean="0"/>
+              <a:t>‹Nr.›</a:t>
+            </a:fld>
+            <a:endParaRPr lang="en-US"/>
+          </a:p>
+        </p:txBody>
+      </p:sp>
+    </p:spTree>
+    <p:extLst>
+      <p:ext uri="{BB962C8B-B14F-4D97-AF65-F5344CB8AC3E}">
+        <p14:creationId xmlns:p14="http://schemas.microsoft.com/office/powerpoint/2010/main" val="3243398418"/>
+      </p:ext>
+    </p:extLst>
+  </p:cSld>
+  <p:clrMap bg1="lt1" tx1="dk1" bg2="lt2" tx2="dk2" accent1="accent1" accent2="accent2" accent3="accent3" accent4="accent4" accent5="accent5" accent6="accent6" hlink="hlink" folHlink="folHlink"/>
+  <p:notesStyle>
+    <a:lvl1pPr marL="0" algn="l" defTabSz="914400" rtl="0" eaLnBrk="1" latinLnBrk="0" hangingPunct="1">
+      <a:defRPr sz="1200" kern="1200">
+        <a:solidFill>
+          <a:schemeClr val="tx1"/>
+        </a:solidFill>
+        <a:latin typeface="+mn-lt"/>
+        <a:ea typeface="+mn-ea"/>
+        <a:cs typeface="+mn-cs"/>
+      </a:defRPr>
+    </a:lvl1pPr>
+    <a:lvl2pPr marL="457200" algn="l" defTabSz="914400" rtl="0" eaLnBrk="1" latinLnBrk="0" hangingPunct="1">
+      <a:defRPr sz="1200" kern="1200">
+        <a:solidFill>
+          <a:schemeClr val="tx1"/>
+        </a:solidFill>
+        <a:latin typeface="+mn-lt"/>
+        <a:ea typeface="+mn-ea"/>
+        <a:cs typeface="+mn-cs"/>
+      </a:defRPr>
+    </a:lvl2pPr>
+    <a:lvl3pPr marL="914400" algn="l" defTabSz="914400" rtl="0" eaLnBrk="1" latinLnBrk="0" hangingPunct="1">
+      <a:defRPr sz="1200" kern="1200">
+        <a:solidFill>
+          <a:schemeClr val="tx1"/>
+        </a:solidFill>
+        <a:latin typeface="+mn-lt"/>
+        <a:ea typeface="+mn-ea"/>
+        <a:cs typeface="+mn-cs"/>
+      </a:defRPr>
+    </a:lvl3pPr>
+    <a:lvl4pPr marL="1371600" algn="l" defTabSz="914400" rtl="0" eaLnBrk="1" latinLnBrk="0" hangingPunct="1">
+      <a:defRPr sz="1200" kern="1200">
+        <a:solidFill>
+          <a:schemeClr val="tx1"/>
+        </a:solidFill>
+        <a:latin typeface="+mn-lt"/>
+        <a:ea typeface="+mn-ea"/>
+        <a:cs typeface="+mn-cs"/>
+      </a:defRPr>
+    </a:lvl4pPr>
+    <a:lvl5pPr marL="1828800" algn="l" defTabSz="914400" rtl="0" eaLnBrk="1" latinLnBrk="0" hangingPunct="1">
+      <a:defRPr sz="1200" kern="1200">
+        <a:solidFill>
+          <a:schemeClr val="tx1"/>
+        </a:solidFill>
+        <a:latin typeface="+mn-lt"/>
+        <a:ea typeface="+mn-ea"/>
+        <a:cs typeface="+mn-cs"/>
+      </a:defRPr>
+    </a:lvl5pPr>
+    <a:lvl6pPr marL="2286000" algn="l" defTabSz="914400" rtl="0" eaLnBrk="1" latinLnBrk="0" hangingPunct="1">
+      <a:defRPr sz="1200" kern="1200">
+        <a:solidFill>
+          <a:schemeClr val="tx1"/>
+        </a:solidFill>
+        <a:latin typeface="+mn-lt"/>
+        <a:ea typeface="+mn-ea"/>
+        <a:cs typeface="+mn-cs"/>
+      </a:defRPr>
+    </a:lvl6pPr>
+    <a:lvl7pPr marL="2743200" algn="l" defTabSz="914400" rtl="0" eaLnBrk="1" latinLnBrk="0" hangingPunct="1">
+      <a:defRPr sz="1200" kern="1200">
+        <a:solidFill>
+          <a:schemeClr val="tx1"/>
+        </a:solidFill>
+        <a:latin typeface="+mn-lt"/>
+        <a:ea typeface="+mn-ea"/>
+        <a:cs typeface="+mn-cs"/>
+      </a:defRPr>
+    </a:lvl7pPr>
+    <a:lvl8pPr marL="3200400" algn="l" defTabSz="914400" rtl="0" eaLnBrk="1" latinLnBrk="0" hangingPunct="1">
+      <a:defRPr sz="1200" kern="1200">
+        <a:solidFill>
+          <a:schemeClr val="tx1"/>
+        </a:solidFill>
+        <a:latin typeface="+mn-lt"/>
+        <a:ea typeface="+mn-ea"/>
+        <a:cs typeface="+mn-cs"/>
+      </a:defRPr>
+    </a:lvl8pPr>
+    <a:lvl9pPr marL="3657600" algn="l" defTabSz="914400" rtl="0" eaLnBrk="1" latinLnBrk="0" hangingPunct="1">
+      <a:defRPr sz="1200" kern="1200">
+        <a:solidFill>
+          <a:schemeClr val="tx1"/>
+        </a:solidFill>
+        <a:latin typeface="+mn-lt"/>
+        <a:ea typeface="+mn-ea"/>
+        <a:cs typeface="+mn-cs"/>
+      </a:defRPr>
+    </a:lvl9pPr>
+  </p:notesStyle>
+</p:notesMaster>
 </file>
 
 <file path=ppt/slideLayouts/slideLayout1.xml><?xml version="1.0" encoding="utf-8"?>
@@ -260,9 +623,9 @@
           <a:bodyPr/>
           <a:lstStyle/>
           <a:p>
-            <a:fld id="{695C8E20-6763-0547-8A90-95DFA630E427}" type="datetimeFigureOut">
+            <a:fld id="{9D6937DF-4E0C-4BDE-8A0A-EA2E03F3CD75}" type="datetime1">
               <a:rPr lang="de-DE" smtClean="0"/>
-              <a:t>09.12.24</a:t>
+              <a:t>10.12.2024</a:t>
             </a:fld>
             <a:endParaRPr lang="de-DE"/>
           </a:p>
@@ -458,9 +821,9 @@
           <a:bodyPr/>
           <a:lstStyle/>
           <a:p>
-            <a:fld id="{695C8E20-6763-0547-8A90-95DFA630E427}" type="datetimeFigureOut">
+            <a:fld id="{EB80D259-FD4B-4365-9AA3-F6CED0046B76}" type="datetime1">
               <a:rPr lang="de-DE" smtClean="0"/>
-              <a:t>09.12.24</a:t>
+              <a:t>10.12.2024</a:t>
             </a:fld>
             <a:endParaRPr lang="de-DE"/>
           </a:p>
@@ -666,9 +1029,9 @@
           <a:bodyPr/>
           <a:lstStyle/>
           <a:p>
-            <a:fld id="{695C8E20-6763-0547-8A90-95DFA630E427}" type="datetimeFigureOut">
+            <a:fld id="{5DC2BD21-A82E-44BA-95E6-C97C344CDF55}" type="datetime1">
               <a:rPr lang="de-DE" smtClean="0"/>
-              <a:t>09.12.24</a:t>
+              <a:t>10.12.2024</a:t>
             </a:fld>
             <a:endParaRPr lang="de-DE"/>
           </a:p>
@@ -864,9 +1227,9 @@
           <a:bodyPr/>
           <a:lstStyle/>
           <a:p>
-            <a:fld id="{695C8E20-6763-0547-8A90-95DFA630E427}" type="datetimeFigureOut">
+            <a:fld id="{F93171F1-3AC1-4821-9122-C904B048FE43}" type="datetime1">
               <a:rPr lang="de-DE" smtClean="0"/>
-              <a:t>09.12.24</a:t>
+              <a:t>10.12.2024</a:t>
             </a:fld>
             <a:endParaRPr lang="de-DE"/>
           </a:p>
@@ -1139,9 +1502,9 @@
           <a:bodyPr/>
           <a:lstStyle/>
           <a:p>
-            <a:fld id="{695C8E20-6763-0547-8A90-95DFA630E427}" type="datetimeFigureOut">
+            <a:fld id="{6A36EF52-4910-4C2D-8CF3-4DB6C99B4BD5}" type="datetime1">
               <a:rPr lang="de-DE" smtClean="0"/>
-              <a:t>09.12.24</a:t>
+              <a:t>10.12.2024</a:t>
             </a:fld>
             <a:endParaRPr lang="de-DE"/>
           </a:p>
@@ -1404,9 +1767,9 @@
           <a:bodyPr/>
           <a:lstStyle/>
           <a:p>
-            <a:fld id="{695C8E20-6763-0547-8A90-95DFA630E427}" type="datetimeFigureOut">
+            <a:fld id="{185202DE-F5EC-4844-90C4-75EB9E59292C}" type="datetime1">
               <a:rPr lang="de-DE" smtClean="0"/>
-              <a:t>09.12.24</a:t>
+              <a:t>10.12.2024</a:t>
             </a:fld>
             <a:endParaRPr lang="de-DE"/>
           </a:p>
@@ -1816,9 +2179,9 @@
           <a:bodyPr/>
           <a:lstStyle/>
           <a:p>
-            <a:fld id="{695C8E20-6763-0547-8A90-95DFA630E427}" type="datetimeFigureOut">
+            <a:fld id="{93226BE8-CE1A-44BA-B043-BB8219D521B8}" type="datetime1">
               <a:rPr lang="de-DE" smtClean="0"/>
-              <a:t>09.12.24</a:t>
+              <a:t>10.12.2024</a:t>
             </a:fld>
             <a:endParaRPr lang="de-DE"/>
           </a:p>
@@ -1957,9 +2320,9 @@
           <a:bodyPr/>
           <a:lstStyle/>
           <a:p>
-            <a:fld id="{695C8E20-6763-0547-8A90-95DFA630E427}" type="datetimeFigureOut">
+            <a:fld id="{77536EA2-277B-4F32-BBD7-E718D7F3C975}" type="datetime1">
               <a:rPr lang="de-DE" smtClean="0"/>
-              <a:t>09.12.24</a:t>
+              <a:t>10.12.2024</a:t>
             </a:fld>
             <a:endParaRPr lang="de-DE"/>
           </a:p>
@@ -2070,9 +2433,9 @@
           <a:bodyPr/>
           <a:lstStyle/>
           <a:p>
-            <a:fld id="{695C8E20-6763-0547-8A90-95DFA630E427}" type="datetimeFigureOut">
+            <a:fld id="{28A080B9-28ED-42A6-9FFE-BC3E1F17444A}" type="datetime1">
               <a:rPr lang="de-DE" smtClean="0"/>
-              <a:t>09.12.24</a:t>
+              <a:t>10.12.2024</a:t>
             </a:fld>
             <a:endParaRPr lang="de-DE"/>
           </a:p>
@@ -2381,9 +2744,9 @@
           <a:bodyPr/>
           <a:lstStyle/>
           <a:p>
-            <a:fld id="{695C8E20-6763-0547-8A90-95DFA630E427}" type="datetimeFigureOut">
+            <a:fld id="{585322BD-A736-420C-8D41-F3A667DCA06D}" type="datetime1">
               <a:rPr lang="de-DE" smtClean="0"/>
-              <a:t>09.12.24</a:t>
+              <a:t>10.12.2024</a:t>
             </a:fld>
             <a:endParaRPr lang="de-DE"/>
           </a:p>
@@ -2669,9 +3032,9 @@
           <a:bodyPr/>
           <a:lstStyle/>
           <a:p>
-            <a:fld id="{695C8E20-6763-0547-8A90-95DFA630E427}" type="datetimeFigureOut">
+            <a:fld id="{56F37B7C-2BE5-47E3-9028-2102B2B00543}" type="datetime1">
               <a:rPr lang="de-DE" smtClean="0"/>
-              <a:t>09.12.24</a:t>
+              <a:t>10.12.2024</a:t>
             </a:fld>
             <a:endParaRPr lang="de-DE"/>
           </a:p>
@@ -2910,9 +3273,9 @@
             </a:lvl1pPr>
           </a:lstStyle>
           <a:p>
-            <a:fld id="{695C8E20-6763-0547-8A90-95DFA630E427}" type="datetimeFigureOut">
+            <a:fld id="{8EBB7E99-C74A-49F1-8D09-92A944F1D2C7}" type="datetime1">
               <a:rPr lang="de-DE" smtClean="0"/>
-              <a:t>09.12.24</a:t>
+              <a:t>10.12.2024</a:t>
             </a:fld>
             <a:endParaRPr lang="de-DE"/>
           </a:p>
@@ -3029,6 +3392,7 @@
     <p:sldLayoutId id="2147483658" r:id="rId10"/>
     <p:sldLayoutId id="2147483659" r:id="rId11"/>
   </p:sldLayoutIdLst>
+  <p:hf hdr="0" ftr="0"/>
   <p:txStyles>
     <p:titleStyle>
       <a:lvl1pPr algn="l" defTabSz="914400" rtl="0" eaLnBrk="1" latinLnBrk="0" hangingPunct="1">
@@ -3411,6 +3775,2218 @@
 </p:sld>
 </file>
 
+<file path=ppt/slides/slide10.xml><?xml version="1.0" encoding="utf-8"?>
+<p:sld xmlns:a="http://schemas.openxmlformats.org/drawingml/2006/main" xmlns:r="http://schemas.openxmlformats.org/officeDocument/2006/relationships" xmlns:p="http://schemas.openxmlformats.org/presentationml/2006/main">
+  <p:cSld>
+    <p:spTree>
+      <p:nvGrpSpPr>
+        <p:cNvPr id="1" name=""/>
+        <p:cNvGrpSpPr/>
+        <p:nvPr/>
+      </p:nvGrpSpPr>
+      <p:grpSpPr>
+        <a:xfrm>
+          <a:off x="0" y="0"/>
+          <a:ext cx="0" cy="0"/>
+          <a:chOff x="0" y="0"/>
+          <a:chExt cx="0" cy="0"/>
+        </a:xfrm>
+      </p:grpSpPr>
+      <p:sp>
+        <p:nvSpPr>
+          <p:cNvPr id="2" name="Titel 1">
+            <a:extLst>
+              <a:ext uri="{FF2B5EF4-FFF2-40B4-BE49-F238E27FC236}">
+                <a16:creationId xmlns:a16="http://schemas.microsoft.com/office/drawing/2014/main" id="{50BC08CD-9E65-F8D0-5C48-9E7B4955551B}"/>
+              </a:ext>
+            </a:extLst>
+          </p:cNvPr>
+          <p:cNvSpPr>
+            <a:spLocks noGrp="1"/>
+          </p:cNvSpPr>
+          <p:nvPr>
+            <p:ph type="title"/>
+          </p:nvPr>
+        </p:nvSpPr>
+        <p:spPr/>
+        <p:txBody>
+          <a:bodyPr/>
+          <a:lstStyle/>
+          <a:p>
+            <a:r>
+              <a:rPr lang="de-DE" dirty="0"/>
+              <a:t>Zentraler elastischer Stoß</a:t>
+            </a:r>
+            <a:endParaRPr lang="en-US" dirty="0"/>
+          </a:p>
+        </p:txBody>
+      </p:sp>
+      <mc:AlternateContent xmlns:mc="http://schemas.openxmlformats.org/markup-compatibility/2006">
+        <mc:Choice xmlns:a14="http://schemas.microsoft.com/office/drawing/2010/main" Requires="a14">
+          <p:sp>
+            <p:nvSpPr>
+              <p:cNvPr id="3" name="Inhaltsplatzhalter 2">
+                <a:extLst>
+                  <a:ext uri="{FF2B5EF4-FFF2-40B4-BE49-F238E27FC236}">
+                    <a16:creationId xmlns:a16="http://schemas.microsoft.com/office/drawing/2014/main" id="{96973208-7161-6E51-C544-1BAF4F5EC4F6}"/>
+                  </a:ext>
+                </a:extLst>
+              </p:cNvPr>
+              <p:cNvSpPr>
+                <a:spLocks noGrp="1"/>
+              </p:cNvSpPr>
+              <p:nvPr>
+                <p:ph idx="1"/>
+              </p:nvPr>
+            </p:nvSpPr>
+            <p:spPr/>
+            <p:txBody>
+              <a:bodyPr>
+                <a:normAutofit/>
+              </a:bodyPr>
+              <a:lstStyle/>
+              <a:p>
+                <a:r>
+                  <a:rPr lang="en-US" dirty="0" err="1"/>
+                  <a:t>Einheitsvektor</a:t>
+                </a:r>
+                <a:r>
+                  <a:rPr lang="en-US" dirty="0"/>
+                  <a:t> </a:t>
+                </a:r>
+                <a:r>
+                  <a:rPr lang="en-US" dirty="0" err="1"/>
+                  <a:t>wird</a:t>
+                </a:r>
+                <a:r>
+                  <a:rPr lang="en-US" dirty="0"/>
+                  <a:t> </a:t>
+                </a:r>
+                <a:r>
+                  <a:rPr lang="en-US" dirty="0" err="1"/>
+                  <a:t>bestimmt</a:t>
+                </a:r>
+                <a:r>
+                  <a:rPr lang="en-US" dirty="0"/>
+                  <a:t> </a:t>
+                </a:r>
+                <a:r>
+                  <a:rPr lang="en-US" dirty="0" err="1"/>
+                  <a:t>durch</a:t>
+                </a:r>
+                <a:r>
+                  <a:rPr lang="en-US" dirty="0"/>
+                  <a:t>:</a:t>
+                </a:r>
+                <a:endParaRPr lang="de-DE" i="1" dirty="0">
+                  <a:latin typeface="Cambria Math" panose="02040503050406030204" pitchFamily="18" charset="0"/>
+                </a:endParaRPr>
+              </a:p>
+              <a:p>
+                <a:pPr marL="0" indent="0" algn="ctr">
+                  <a:buNone/>
+                </a:pPr>
+                <a14:m>
+                  <m:oMath xmlns:m="http://schemas.openxmlformats.org/officeDocument/2006/math">
+                    <m:acc>
+                      <m:accPr>
+                        <m:chr m:val="̂"/>
+                        <m:ctrlPr>
+                          <a:rPr lang="en-US" i="1" dirty="0" smtClean="0">
+                            <a:latin typeface="Cambria Math" panose="02040503050406030204" pitchFamily="18" charset="0"/>
+                          </a:rPr>
+                        </m:ctrlPr>
+                      </m:accPr>
+                      <m:e>
+                        <m:r>
+                          <a:rPr lang="de-DE" i="1" dirty="0" smtClean="0">
+                            <a:latin typeface="Cambria Math" panose="02040503050406030204" pitchFamily="18" charset="0"/>
+                          </a:rPr>
+                          <m:t>𝑢</m:t>
+                        </m:r>
+                      </m:e>
+                    </m:acc>
+                  </m:oMath>
+                </a14:m>
+                <a:r>
+                  <a:rPr lang="de-DE" dirty="0"/>
+                  <a:t> </a:t>
+                </a:r>
+                <a14:m>
+                  <m:oMath xmlns:m="http://schemas.openxmlformats.org/officeDocument/2006/math">
+                    <m:r>
+                      <a:rPr lang="de-DE" b="0" i="1" smtClean="0">
+                        <a:latin typeface="Cambria Math" panose="02040503050406030204" pitchFamily="18" charset="0"/>
+                      </a:rPr>
+                      <m:t>=</m:t>
+                    </m:r>
+                    <m:f>
+                      <m:fPr>
+                        <m:ctrlPr>
+                          <a:rPr lang="de-DE" b="0" i="1" smtClean="0">
+                            <a:latin typeface="Cambria Math" panose="02040503050406030204" pitchFamily="18" charset="0"/>
+                          </a:rPr>
+                        </m:ctrlPr>
+                      </m:fPr>
+                      <m:num>
+                        <m:r>
+                          <a:rPr lang="de-DE" b="0" i="1" smtClean="0">
+                            <a:latin typeface="Cambria Math" panose="02040503050406030204" pitchFamily="18" charset="0"/>
+                          </a:rPr>
+                          <m:t>𝑢</m:t>
+                        </m:r>
+                      </m:num>
+                      <m:den>
+                        <m:d>
+                          <m:dPr>
+                            <m:begChr m:val="|"/>
+                            <m:endChr m:val="|"/>
+                            <m:ctrlPr>
+                              <a:rPr lang="de-DE" b="0" i="1" smtClean="0">
+                                <a:latin typeface="Cambria Math" panose="02040503050406030204" pitchFamily="18" charset="0"/>
+                              </a:rPr>
+                            </m:ctrlPr>
+                          </m:dPr>
+                          <m:e>
+                            <m:r>
+                              <a:rPr lang="de-DE" b="0" i="1" smtClean="0">
+                                <a:latin typeface="Cambria Math" panose="02040503050406030204" pitchFamily="18" charset="0"/>
+                              </a:rPr>
+                              <m:t>𝑢</m:t>
+                            </m:r>
+                          </m:e>
+                        </m:d>
+                      </m:den>
+                    </m:f>
+                  </m:oMath>
+                </a14:m>
+                <a:endParaRPr lang="de-DE" dirty="0"/>
+              </a:p>
+              <a:p>
+                <a:pPr marL="514350" indent="-514350">
+                  <a:buFont typeface="+mj-lt"/>
+                  <a:buAutoNum type="arabicPeriod"/>
+                </a:pPr>
+                <a:r>
+                  <a:rPr lang="de-DE" dirty="0"/>
+                  <a:t>Der Einheitsvektor </a:t>
+                </a:r>
+                <a14:m>
+                  <m:oMath xmlns:m="http://schemas.openxmlformats.org/officeDocument/2006/math">
+                    <m:acc>
+                      <m:accPr>
+                        <m:chr m:val="̂"/>
+                        <m:ctrlPr>
+                          <a:rPr lang="en-US" i="1" dirty="0" smtClean="0">
+                            <a:latin typeface="Cambria Math" panose="02040503050406030204" pitchFamily="18" charset="0"/>
+                          </a:rPr>
+                        </m:ctrlPr>
+                      </m:accPr>
+                      <m:e>
+                        <m:r>
+                          <a:rPr lang="de-DE" i="1" dirty="0">
+                            <a:latin typeface="Cambria Math" panose="02040503050406030204" pitchFamily="18" charset="0"/>
+                          </a:rPr>
+                          <m:t>𝑢</m:t>
+                        </m:r>
+                      </m:e>
+                    </m:acc>
+                  </m:oMath>
+                </a14:m>
+                <a:r>
+                  <a:rPr lang="de-DE" dirty="0"/>
+                  <a:t> zeigt die Stoßrichtung an</a:t>
+                </a:r>
+              </a:p>
+              <a:p>
+                <a:pPr marL="514350" indent="-514350">
+                  <a:buFont typeface="+mj-lt"/>
+                  <a:buAutoNum type="arabicPeriod"/>
+                </a:pPr>
+                <a:r>
+                  <a:rPr lang="de-DE" dirty="0"/>
+                  <a:t>Vektor</a:t>
+                </a:r>
+                <a14:m>
+                  <m:oMath xmlns:m="http://schemas.openxmlformats.org/officeDocument/2006/math">
+                    <m:r>
+                      <a:rPr lang="de-DE" b="0" i="0" smtClean="0">
+                        <a:latin typeface="Cambria Math" panose="02040503050406030204" pitchFamily="18" charset="0"/>
+                      </a:rPr>
+                      <m:t> </m:t>
+                    </m:r>
+                    <m:r>
+                      <a:rPr lang="de-DE" i="1">
+                        <a:latin typeface="Cambria Math" panose="02040503050406030204" pitchFamily="18" charset="0"/>
+                      </a:rPr>
+                      <m:t>𝑢</m:t>
+                    </m:r>
+                  </m:oMath>
+                </a14:m>
+                <a:endParaRPr lang="de-DE" dirty="0"/>
+              </a:p>
+              <a:p>
+                <a:pPr marL="514350" indent="-514350">
+                  <a:buFont typeface="+mj-lt"/>
+                  <a:buAutoNum type="arabicPeriod"/>
+                </a:pPr>
+                <a:r>
+                  <a:rPr lang="de-DE" dirty="0"/>
+                  <a:t>|u| die Distanz des Vektors</a:t>
+                </a:r>
+              </a:p>
+              <a:p>
+                <a:pPr marL="514350" indent="-514350">
+                  <a:buFont typeface="+mj-lt"/>
+                  <a:buAutoNum type="arabicPeriod"/>
+                </a:pPr>
+                <a:endParaRPr lang="de-DE" dirty="0"/>
+              </a:p>
+              <a:p>
+                <a:r>
+                  <a:rPr lang="en-US" dirty="0"/>
+                  <a:t>Die relative </a:t>
+                </a:r>
+                <a:r>
+                  <a:rPr lang="en-US" dirty="0" err="1"/>
+                  <a:t>Geschwindigkeit</a:t>
+                </a:r>
+                <a:r>
+                  <a:rPr lang="en-US" dirty="0"/>
+                  <a:t> </a:t>
+                </a:r>
+                <a:r>
+                  <a:rPr lang="en-US" dirty="0" err="1"/>
+                  <a:t>ergibt</a:t>
+                </a:r>
+                <a:r>
+                  <a:rPr lang="en-US" dirty="0"/>
+                  <a:t> </a:t>
+                </a:r>
+                <a:r>
+                  <a:rPr lang="en-US" dirty="0" err="1"/>
+                  <a:t>sich</a:t>
+                </a:r>
+                <a:r>
+                  <a:rPr lang="en-US" dirty="0"/>
+                  <a:t> </a:t>
+                </a:r>
+                <a:r>
+                  <a:rPr lang="en-US" dirty="0" err="1"/>
+                  <a:t>aus</a:t>
+                </a:r>
+                <a:r>
+                  <a:rPr lang="en-US" dirty="0"/>
+                  <a:t> der </a:t>
+                </a:r>
+                <a:r>
+                  <a:rPr lang="de-DE" dirty="0"/>
+                  <a:t>der Differenz der Geschwindigkeiten der beiden Objekte</a:t>
+                </a:r>
+                <a:endParaRPr lang="en-US" dirty="0"/>
+              </a:p>
+              <a:p>
+                <a:endParaRPr lang="en-US" dirty="0"/>
+              </a:p>
+              <a:p>
+                <a:endParaRPr lang="en-US" dirty="0"/>
+              </a:p>
+            </p:txBody>
+          </p:sp>
+        </mc:Choice>
+        <mc:Fallback>
+          <p:sp>
+            <p:nvSpPr>
+              <p:cNvPr id="3" name="Inhaltsplatzhalter 2">
+                <a:extLst>
+                  <a:ext uri="{FF2B5EF4-FFF2-40B4-BE49-F238E27FC236}">
+                    <a16:creationId xmlns:a16="http://schemas.microsoft.com/office/drawing/2014/main" id="{96973208-7161-6E51-C544-1BAF4F5EC4F6}"/>
+                  </a:ext>
+                </a:extLst>
+              </p:cNvPr>
+              <p:cNvSpPr>
+                <a:spLocks noGrp="1" noRot="1" noChangeAspect="1" noMove="1" noResize="1" noEditPoints="1" noAdjustHandles="1" noChangeArrowheads="1" noChangeShapeType="1" noTextEdit="1"/>
+              </p:cNvSpPr>
+              <p:nvPr>
+                <p:ph idx="1"/>
+              </p:nvPr>
+            </p:nvSpPr>
+            <p:spPr>
+              <a:blipFill>
+                <a:blip r:embed="rId3"/>
+                <a:stretch>
+                  <a:fillRect l="-1217" t="-2381"/>
+                </a:stretch>
+              </a:blipFill>
+            </p:spPr>
+            <p:txBody>
+              <a:bodyPr/>
+              <a:lstStyle/>
+              <a:p>
+                <a:r>
+                  <a:rPr lang="en-US">
+                    <a:noFill/>
+                  </a:rPr>
+                  <a:t> </a:t>
+                </a:r>
+              </a:p>
+            </p:txBody>
+          </p:sp>
+        </mc:Fallback>
+      </mc:AlternateContent>
+      <p:sp>
+        <p:nvSpPr>
+          <p:cNvPr id="4" name="Datumsplatzhalter 3">
+            <a:extLst>
+              <a:ext uri="{FF2B5EF4-FFF2-40B4-BE49-F238E27FC236}">
+                <a16:creationId xmlns:a16="http://schemas.microsoft.com/office/drawing/2014/main" id="{376B5014-E783-44D8-2E20-65605380F81C}"/>
+              </a:ext>
+            </a:extLst>
+          </p:cNvPr>
+          <p:cNvSpPr>
+            <a:spLocks noGrp="1"/>
+          </p:cNvSpPr>
+          <p:nvPr>
+            <p:ph type="dt" sz="half" idx="10"/>
+          </p:nvPr>
+        </p:nvSpPr>
+        <p:spPr/>
+        <p:txBody>
+          <a:bodyPr/>
+          <a:lstStyle/>
+          <a:p>
+            <a:fld id="{F93171F1-3AC1-4821-9122-C904B048FE43}" type="datetime1">
+              <a:rPr lang="de-DE" smtClean="0"/>
+              <a:t>10.12.2024</a:t>
+            </a:fld>
+            <a:endParaRPr lang="de-DE"/>
+          </a:p>
+        </p:txBody>
+      </p:sp>
+      <p:sp>
+        <p:nvSpPr>
+          <p:cNvPr id="5" name="Foliennummernplatzhalter 4">
+            <a:extLst>
+              <a:ext uri="{FF2B5EF4-FFF2-40B4-BE49-F238E27FC236}">
+                <a16:creationId xmlns:a16="http://schemas.microsoft.com/office/drawing/2014/main" id="{C21545FC-7487-9EB3-E616-2BA3B0593307}"/>
+              </a:ext>
+            </a:extLst>
+          </p:cNvPr>
+          <p:cNvSpPr>
+            <a:spLocks noGrp="1"/>
+          </p:cNvSpPr>
+          <p:nvPr>
+            <p:ph type="sldNum" sz="quarter" idx="12"/>
+          </p:nvPr>
+        </p:nvSpPr>
+        <p:spPr/>
+        <p:txBody>
+          <a:bodyPr/>
+          <a:lstStyle/>
+          <a:p>
+            <a:fld id="{2F2A0DB8-2729-3A4D-A362-07849BE8AC54}" type="slidenum">
+              <a:rPr lang="de-DE" smtClean="0"/>
+              <a:t>10</a:t>
+            </a:fld>
+            <a:endParaRPr lang="de-DE"/>
+          </a:p>
+        </p:txBody>
+      </p:sp>
+    </p:spTree>
+    <p:extLst>
+      <p:ext uri="{BB962C8B-B14F-4D97-AF65-F5344CB8AC3E}">
+        <p14:creationId xmlns:p14="http://schemas.microsoft.com/office/powerpoint/2010/main" val="471033806"/>
+      </p:ext>
+    </p:extLst>
+  </p:cSld>
+  <p:clrMapOvr>
+    <a:masterClrMapping/>
+  </p:clrMapOvr>
+</p:sld>
+</file>
+
+<file path=ppt/slides/slide11.xml><?xml version="1.0" encoding="utf-8"?>
+<p:sld xmlns:a="http://schemas.openxmlformats.org/drawingml/2006/main" xmlns:r="http://schemas.openxmlformats.org/officeDocument/2006/relationships" xmlns:p="http://schemas.openxmlformats.org/presentationml/2006/main">
+  <p:cSld>
+    <p:spTree>
+      <p:nvGrpSpPr>
+        <p:cNvPr id="1" name=""/>
+        <p:cNvGrpSpPr/>
+        <p:nvPr/>
+      </p:nvGrpSpPr>
+      <p:grpSpPr>
+        <a:xfrm>
+          <a:off x="0" y="0"/>
+          <a:ext cx="0" cy="0"/>
+          <a:chOff x="0" y="0"/>
+          <a:chExt cx="0" cy="0"/>
+        </a:xfrm>
+      </p:grpSpPr>
+      <p:sp>
+        <p:nvSpPr>
+          <p:cNvPr id="2" name="Titel 1">
+            <a:extLst>
+              <a:ext uri="{FF2B5EF4-FFF2-40B4-BE49-F238E27FC236}">
+                <a16:creationId xmlns:a16="http://schemas.microsoft.com/office/drawing/2014/main" id="{E95712B6-D0CE-D608-0F0E-E92D40D24C82}"/>
+              </a:ext>
+            </a:extLst>
+          </p:cNvPr>
+          <p:cNvSpPr>
+            <a:spLocks noGrp="1"/>
+          </p:cNvSpPr>
+          <p:nvPr>
+            <p:ph type="title"/>
+          </p:nvPr>
+        </p:nvSpPr>
+        <p:spPr/>
+        <p:txBody>
+          <a:bodyPr/>
+          <a:lstStyle/>
+          <a:p>
+            <a:r>
+              <a:rPr lang="de-DE" dirty="0"/>
+              <a:t>Zentraler elastischer Stoß</a:t>
+            </a:r>
+            <a:endParaRPr lang="en-US" dirty="0"/>
+          </a:p>
+        </p:txBody>
+      </p:sp>
+      <mc:AlternateContent xmlns:mc="http://schemas.openxmlformats.org/markup-compatibility/2006">
+        <mc:Choice xmlns:a14="http://schemas.microsoft.com/office/drawing/2010/main" Requires="a14">
+          <p:sp>
+            <p:nvSpPr>
+              <p:cNvPr id="3" name="Inhaltsplatzhalter 2">
+                <a:extLst>
+                  <a:ext uri="{FF2B5EF4-FFF2-40B4-BE49-F238E27FC236}">
+                    <a16:creationId xmlns:a16="http://schemas.microsoft.com/office/drawing/2014/main" id="{20FEDD32-744B-8A39-77DD-D0361648896D}"/>
+                  </a:ext>
+                </a:extLst>
+              </p:cNvPr>
+              <p:cNvSpPr>
+                <a:spLocks noGrp="1"/>
+              </p:cNvSpPr>
+              <p:nvPr>
+                <p:ph idx="1"/>
+              </p:nvPr>
+            </p:nvSpPr>
+            <p:spPr/>
+            <p:txBody>
+              <a:bodyPr>
+                <a:normAutofit lnSpcReduction="10000"/>
+              </a:bodyPr>
+              <a:lstStyle/>
+              <a:p>
+                <a:r>
+                  <a:rPr lang="en-US" dirty="0"/>
+                  <a:t>Das </a:t>
+                </a:r>
+                <a:r>
+                  <a:rPr lang="en-US" dirty="0" err="1"/>
+                  <a:t>Skalarprodukt</a:t>
+                </a:r>
+                <a:r>
+                  <a:rPr lang="en-US" dirty="0"/>
+                  <a:t> </a:t>
+                </a:r>
+                <a:r>
+                  <a:rPr lang="en-US" dirty="0" err="1"/>
+                  <a:t>zweier</a:t>
+                </a:r>
+                <a:r>
+                  <a:rPr lang="en-US" dirty="0"/>
+                  <a:t> </a:t>
+                </a:r>
+                <a:r>
+                  <a:rPr lang="en-US" dirty="0" err="1"/>
+                  <a:t>Vektoren</a:t>
+                </a:r>
+                <a:r>
+                  <a:rPr lang="en-US" dirty="0"/>
+                  <a:t> </a:t>
+                </a:r>
+                <a:r>
+                  <a:rPr lang="en-US" dirty="0" err="1"/>
+                  <a:t>lautet</a:t>
+                </a:r>
+                <a:r>
+                  <a:rPr lang="en-US" dirty="0"/>
+                  <a:t>:</a:t>
+                </a:r>
+                <a:endParaRPr lang="de-DE" b="0" i="1" dirty="0">
+                  <a:latin typeface="Cambria Math" panose="02040503050406030204" pitchFamily="18" charset="0"/>
+                </a:endParaRPr>
+              </a:p>
+              <a:p>
+                <a:pPr marL="0" indent="0">
+                  <a:buNone/>
+                </a:pPr>
+                <a14:m>
+                  <m:oMathPara xmlns:m="http://schemas.openxmlformats.org/officeDocument/2006/math">
+                    <m:oMathParaPr>
+                      <m:jc m:val="centerGroup"/>
+                    </m:oMathParaPr>
+                    <m:oMath xmlns:m="http://schemas.openxmlformats.org/officeDocument/2006/math">
+                      <m:sSub>
+                        <m:sSubPr>
+                          <m:ctrlPr>
+                            <a:rPr lang="en-US" b="0" i="1" smtClean="0">
+                              <a:latin typeface="Cambria Math" panose="02040503050406030204" pitchFamily="18" charset="0"/>
+                            </a:rPr>
+                          </m:ctrlPr>
+                        </m:sSubPr>
+                        <m:e>
+                          <m:r>
+                            <a:rPr lang="de-DE" b="0" i="1" smtClean="0">
+                              <a:latin typeface="Cambria Math" panose="02040503050406030204" pitchFamily="18" charset="0"/>
+                            </a:rPr>
+                            <m:t>𝑎</m:t>
+                          </m:r>
+                        </m:e>
+                        <m:sub>
+                          <m:r>
+                            <a:rPr lang="en-US">
+                              <a:latin typeface="Cambria Math" panose="02040503050406030204" pitchFamily="18" charset="0"/>
+                            </a:rPr>
+                            <m:t>1</m:t>
+                          </m:r>
+                        </m:sub>
+                      </m:sSub>
+                      <m:sSub>
+                        <m:sSubPr>
+                          <m:ctrlPr>
+                            <a:rPr lang="en-US" b="0" i="1">
+                              <a:latin typeface="Cambria Math" panose="02040503050406030204" pitchFamily="18" charset="0"/>
+                            </a:rPr>
+                          </m:ctrlPr>
+                        </m:sSubPr>
+                        <m:e>
+                          <m:r>
+                            <a:rPr lang="de-DE" b="0" i="1" smtClean="0">
+                              <a:latin typeface="Cambria Math" panose="02040503050406030204" pitchFamily="18" charset="0"/>
+                            </a:rPr>
+                            <m:t>𝑏</m:t>
+                          </m:r>
+                        </m:e>
+                        <m:sub>
+                          <m:r>
+                            <a:rPr lang="en-US">
+                              <a:latin typeface="Cambria Math" panose="02040503050406030204" pitchFamily="18" charset="0"/>
+                            </a:rPr>
+                            <m:t>1</m:t>
+                          </m:r>
+                        </m:sub>
+                      </m:sSub>
+                      <m:r>
+                        <a:rPr lang="de-DE" b="0" i="1" smtClean="0">
+                          <a:latin typeface="Cambria Math" panose="02040503050406030204" pitchFamily="18" charset="0"/>
+                        </a:rPr>
+                        <m:t>+</m:t>
+                      </m:r>
+                      <m:sSub>
+                        <m:sSubPr>
+                          <m:ctrlPr>
+                            <a:rPr lang="en-US" b="0" i="1">
+                              <a:latin typeface="Cambria Math" panose="02040503050406030204" pitchFamily="18" charset="0"/>
+                            </a:rPr>
+                          </m:ctrlPr>
+                        </m:sSubPr>
+                        <m:e>
+                          <m:r>
+                            <a:rPr lang="de-DE" b="0" i="1" smtClean="0">
+                              <a:latin typeface="Cambria Math" panose="02040503050406030204" pitchFamily="18" charset="0"/>
+                            </a:rPr>
+                            <m:t>𝑎</m:t>
+                          </m:r>
+                        </m:e>
+                        <m:sub>
+                          <m:r>
+                            <a:rPr lang="de-DE" b="0" i="0" smtClean="0">
+                              <a:latin typeface="Cambria Math" panose="02040503050406030204" pitchFamily="18" charset="0"/>
+                            </a:rPr>
+                            <m:t>2</m:t>
+                          </m:r>
+                        </m:sub>
+                      </m:sSub>
+                      <m:sSub>
+                        <m:sSubPr>
+                          <m:ctrlPr>
+                            <a:rPr lang="en-US" b="0" i="1" smtClean="0">
+                              <a:latin typeface="Cambria Math" panose="02040503050406030204" pitchFamily="18" charset="0"/>
+                            </a:rPr>
+                          </m:ctrlPr>
+                        </m:sSubPr>
+                        <m:e>
+                          <m:r>
+                            <a:rPr lang="de-DE" b="0" i="1" smtClean="0">
+                              <a:latin typeface="Cambria Math" panose="02040503050406030204" pitchFamily="18" charset="0"/>
+                            </a:rPr>
+                            <m:t>𝑏</m:t>
+                          </m:r>
+                        </m:e>
+                        <m:sub>
+                          <m:r>
+                            <a:rPr lang="de-DE" b="0" i="0" smtClean="0">
+                              <a:latin typeface="Cambria Math" panose="02040503050406030204" pitchFamily="18" charset="0"/>
+                            </a:rPr>
+                            <m:t>2</m:t>
+                          </m:r>
+                        </m:sub>
+                      </m:sSub>
+                    </m:oMath>
+                  </m:oMathPara>
+                </a14:m>
+                <a:endParaRPr lang="de-DE" b="0" i="1" dirty="0">
+                  <a:latin typeface="Cambria Math" panose="02040503050406030204" pitchFamily="18" charset="0"/>
+                </a:endParaRPr>
+              </a:p>
+              <a:p>
+                <a14:m>
+                  <m:oMath xmlns:m="http://schemas.openxmlformats.org/officeDocument/2006/math">
+                    <m:r>
+                      <a:rPr lang="de-DE" b="0" i="1" smtClean="0">
+                        <a:latin typeface="Cambria Math" panose="02040503050406030204" pitchFamily="18" charset="0"/>
+                      </a:rPr>
+                      <m:t>𝑎</m:t>
+                    </m:r>
+                  </m:oMath>
+                </a14:m>
+                <a:r>
+                  <a:rPr lang="en-US" dirty="0"/>
+                  <a:t> </a:t>
+                </a:r>
+                <a:r>
+                  <a:rPr lang="de-DE" dirty="0"/>
+                  <a:t>ist der Vektor der relativen Geschwindigkeit</a:t>
+                </a:r>
+              </a:p>
+              <a:p>
+                <a14:m>
+                  <m:oMath xmlns:m="http://schemas.openxmlformats.org/officeDocument/2006/math">
+                    <m:r>
+                      <a:rPr lang="de-DE" b="0" i="1" smtClean="0">
+                        <a:latin typeface="Cambria Math" panose="02040503050406030204" pitchFamily="18" charset="0"/>
+                      </a:rPr>
+                      <m:t>𝑏</m:t>
+                    </m:r>
+                    <m:r>
+                      <a:rPr lang="de-DE" b="0" i="1" smtClean="0">
+                        <a:latin typeface="Cambria Math" panose="02040503050406030204" pitchFamily="18" charset="0"/>
+                      </a:rPr>
+                      <m:t> </m:t>
+                    </m:r>
+                  </m:oMath>
+                </a14:m>
+                <a:r>
+                  <a:rPr lang="de-DE" dirty="0"/>
+                  <a:t>ist der Einheitsvektor </a:t>
+                </a:r>
+                <a14:m>
+                  <m:oMath xmlns:m="http://schemas.openxmlformats.org/officeDocument/2006/math">
+                    <m:acc>
+                      <m:accPr>
+                        <m:chr m:val="̂"/>
+                        <m:ctrlPr>
+                          <a:rPr lang="en-US" i="1" dirty="0">
+                            <a:latin typeface="Cambria Math" panose="02040503050406030204" pitchFamily="18" charset="0"/>
+                          </a:rPr>
+                        </m:ctrlPr>
+                      </m:accPr>
+                      <m:e>
+                        <m:r>
+                          <a:rPr lang="de-DE" i="1" dirty="0">
+                            <a:latin typeface="Cambria Math" panose="02040503050406030204" pitchFamily="18" charset="0"/>
+                          </a:rPr>
+                          <m:t>𝑢</m:t>
+                        </m:r>
+                      </m:e>
+                    </m:acc>
+                  </m:oMath>
+                </a14:m>
+                <a:endParaRPr lang="en-US" dirty="0"/>
+              </a:p>
+              <a:p>
+                <a:r>
+                  <a:rPr lang="en-US" dirty="0" err="1"/>
+                  <a:t>Somit</a:t>
+                </a:r>
+                <a:r>
+                  <a:rPr lang="en-US" dirty="0"/>
+                  <a:t> </a:t>
+                </a:r>
+                <a:r>
+                  <a:rPr lang="en-US" dirty="0" err="1"/>
+                  <a:t>entsteht</a:t>
+                </a:r>
+                <a:r>
+                  <a:rPr lang="en-US" dirty="0"/>
+                  <a:t> </a:t>
+                </a:r>
+                <a:r>
+                  <a:rPr lang="en-US" dirty="0" err="1"/>
+                  <a:t>ein</a:t>
+                </a:r>
+                <a:r>
+                  <a:rPr lang="en-US" dirty="0"/>
+                  <a:t> </a:t>
+                </a:r>
+                <a:r>
+                  <a:rPr lang="en-US" dirty="0" err="1"/>
+                  <a:t>neuer</a:t>
+                </a:r>
+                <a:r>
+                  <a:rPr lang="en-US" dirty="0"/>
+                  <a:t> </a:t>
+                </a:r>
+                <a:r>
+                  <a:rPr lang="en-US" dirty="0" err="1"/>
+                  <a:t>Vektor</a:t>
+                </a:r>
+                <a:r>
+                  <a:rPr lang="en-US" dirty="0"/>
+                  <a:t>, der die </a:t>
+                </a:r>
+                <a:r>
+                  <a:rPr lang="en-US" dirty="0" err="1"/>
+                  <a:t>Projektion</a:t>
+                </a:r>
+                <a:r>
+                  <a:rPr lang="en-US" dirty="0"/>
+                  <a:t> auf die </a:t>
+                </a:r>
+                <a:r>
+                  <a:rPr lang="en-US" dirty="0" err="1"/>
+                  <a:t>Stoßrichtung</a:t>
+                </a:r>
+                <a:r>
+                  <a:rPr lang="en-US" dirty="0"/>
+                  <a:t> und </a:t>
+                </a:r>
+                <a:r>
+                  <a:rPr lang="en-US" dirty="0" err="1"/>
+                  <a:t>dessen</a:t>
+                </a:r>
+                <a:r>
+                  <a:rPr lang="en-US" dirty="0"/>
+                  <a:t> </a:t>
+                </a:r>
+                <a:r>
+                  <a:rPr lang="en-US" dirty="0" err="1"/>
+                  <a:t>Länge</a:t>
+                </a:r>
+                <a:r>
+                  <a:rPr lang="en-US" dirty="0"/>
+                  <a:t> </a:t>
+                </a:r>
+                <a:r>
+                  <a:rPr lang="en-US" dirty="0" err="1"/>
+                  <a:t>angibt</a:t>
+                </a:r>
+                <a:endParaRPr lang="en-US" dirty="0"/>
+              </a:p>
+              <a:p>
+                <a:r>
+                  <a:rPr lang="en-US" dirty="0" err="1"/>
+                  <a:t>Impulsberechnung</a:t>
+                </a:r>
+                <a:r>
+                  <a:rPr lang="en-US" dirty="0"/>
+                  <a:t> :</a:t>
+                </a:r>
+              </a:p>
+              <a:p>
+                <a:endParaRPr lang="en-US" dirty="0"/>
+              </a:p>
+              <a:p>
+                <a:pPr marL="0" indent="0">
+                  <a:buNone/>
+                </a:pPr>
+                <a14:m>
+                  <m:oMathPara xmlns:m="http://schemas.openxmlformats.org/officeDocument/2006/math">
+                    <m:oMathParaPr>
+                      <m:jc m:val="center"/>
+                    </m:oMathParaPr>
+                    <m:oMath xmlns:m="http://schemas.openxmlformats.org/officeDocument/2006/math">
+                      <m:r>
+                        <a:rPr lang="de-DE" b="0" i="1" smtClean="0">
+                          <a:latin typeface="Cambria Math" panose="02040503050406030204" pitchFamily="18" charset="0"/>
+                        </a:rPr>
+                        <m:t>𝑖𝑚𝑝𝑢𝑙𝑠</m:t>
+                      </m:r>
+                      <m:r>
+                        <a:rPr lang="de-DE" b="0" i="1" smtClean="0">
+                          <a:latin typeface="Cambria Math" panose="02040503050406030204" pitchFamily="18" charset="0"/>
+                        </a:rPr>
+                        <m:t>=</m:t>
+                      </m:r>
+                      <m:f>
+                        <m:fPr>
+                          <m:ctrlPr>
+                            <a:rPr lang="de-DE" b="0" i="1" smtClean="0">
+                              <a:latin typeface="Cambria Math" panose="02040503050406030204" pitchFamily="18" charset="0"/>
+                            </a:rPr>
+                          </m:ctrlPr>
+                        </m:fPr>
+                        <m:num>
+                          <m:r>
+                            <a:rPr lang="de-DE" i="1">
+                              <a:latin typeface="Cambria Math" panose="02040503050406030204" pitchFamily="18" charset="0"/>
+                            </a:rPr>
+                            <m:t>2∗</m:t>
+                          </m:r>
+                          <m:r>
+                            <a:rPr lang="de-DE" b="0" i="1" smtClean="0">
+                              <a:latin typeface="Cambria Math" panose="02040503050406030204" pitchFamily="18" charset="0"/>
+                            </a:rPr>
+                            <m:t>𝑠𝑘𝑎𝑙𝑎𝑟𝑝𝑟𝑜𝑑𝑢𝑘𝑡</m:t>
+                          </m:r>
+                        </m:num>
+                        <m:den>
+                          <m:r>
+                            <a:rPr lang="de-DE" b="0" i="1" smtClean="0">
+                              <a:latin typeface="Cambria Math" panose="02040503050406030204" pitchFamily="18" charset="0"/>
+                            </a:rPr>
+                            <m:t>𝑀𝑎𝑠𝑠𝑒</m:t>
+                          </m:r>
+                          <m:r>
+                            <a:rPr lang="de-DE" b="0" i="1" smtClean="0">
+                              <a:latin typeface="Cambria Math" panose="02040503050406030204" pitchFamily="18" charset="0"/>
+                            </a:rPr>
+                            <m:t>1+</m:t>
+                          </m:r>
+                          <m:r>
+                            <a:rPr lang="de-DE" i="1">
+                              <a:latin typeface="Cambria Math" panose="02040503050406030204" pitchFamily="18" charset="0"/>
+                            </a:rPr>
+                            <m:t>𝑀𝑎𝑠𝑠𝑒</m:t>
+                          </m:r>
+                          <m:r>
+                            <a:rPr lang="de-DE" i="1">
+                              <a:latin typeface="Cambria Math" panose="02040503050406030204" pitchFamily="18" charset="0"/>
+                            </a:rPr>
+                            <m:t>2</m:t>
+                          </m:r>
+                          <m:r>
+                            <m:rPr>
+                              <m:nor/>
+                            </m:rPr>
+                            <a:rPr lang="de-DE" dirty="0"/>
+                            <m:t> </m:t>
+                          </m:r>
+                        </m:den>
+                      </m:f>
+                    </m:oMath>
+                  </m:oMathPara>
+                </a14:m>
+                <a:endParaRPr lang="en-US" dirty="0"/>
+              </a:p>
+            </p:txBody>
+          </p:sp>
+        </mc:Choice>
+        <mc:Fallback>
+          <p:sp>
+            <p:nvSpPr>
+              <p:cNvPr id="3" name="Inhaltsplatzhalter 2">
+                <a:extLst>
+                  <a:ext uri="{FF2B5EF4-FFF2-40B4-BE49-F238E27FC236}">
+                    <a16:creationId xmlns:a16="http://schemas.microsoft.com/office/drawing/2014/main" id="{20FEDD32-744B-8A39-77DD-D0361648896D}"/>
+                  </a:ext>
+                </a:extLst>
+              </p:cNvPr>
+              <p:cNvSpPr>
+                <a:spLocks noGrp="1" noRot="1" noChangeAspect="1" noMove="1" noResize="1" noEditPoints="1" noAdjustHandles="1" noChangeArrowheads="1" noChangeShapeType="1" noTextEdit="1"/>
+              </p:cNvSpPr>
+              <p:nvPr>
+                <p:ph idx="1"/>
+              </p:nvPr>
+            </p:nvSpPr>
+            <p:spPr>
+              <a:blipFill>
+                <a:blip r:embed="rId2"/>
+                <a:stretch>
+                  <a:fillRect l="-1043" t="-3081"/>
+                </a:stretch>
+              </a:blipFill>
+            </p:spPr>
+            <p:txBody>
+              <a:bodyPr/>
+              <a:lstStyle/>
+              <a:p>
+                <a:r>
+                  <a:rPr lang="en-US">
+                    <a:noFill/>
+                  </a:rPr>
+                  <a:t> </a:t>
+                </a:r>
+              </a:p>
+            </p:txBody>
+          </p:sp>
+        </mc:Fallback>
+      </mc:AlternateContent>
+      <p:sp>
+        <p:nvSpPr>
+          <p:cNvPr id="4" name="Datumsplatzhalter 3">
+            <a:extLst>
+              <a:ext uri="{FF2B5EF4-FFF2-40B4-BE49-F238E27FC236}">
+                <a16:creationId xmlns:a16="http://schemas.microsoft.com/office/drawing/2014/main" id="{D140B51C-F5BF-3FC0-A2CB-756E792C66A1}"/>
+              </a:ext>
+            </a:extLst>
+          </p:cNvPr>
+          <p:cNvSpPr>
+            <a:spLocks noGrp="1"/>
+          </p:cNvSpPr>
+          <p:nvPr>
+            <p:ph type="dt" sz="half" idx="10"/>
+          </p:nvPr>
+        </p:nvSpPr>
+        <p:spPr/>
+        <p:txBody>
+          <a:bodyPr/>
+          <a:lstStyle/>
+          <a:p>
+            <a:fld id="{F93171F1-3AC1-4821-9122-C904B048FE43}" type="datetime1">
+              <a:rPr lang="de-DE" smtClean="0"/>
+              <a:t>10.12.2024</a:t>
+            </a:fld>
+            <a:endParaRPr lang="de-DE"/>
+          </a:p>
+        </p:txBody>
+      </p:sp>
+      <p:sp>
+        <p:nvSpPr>
+          <p:cNvPr id="5" name="Foliennummernplatzhalter 4">
+            <a:extLst>
+              <a:ext uri="{FF2B5EF4-FFF2-40B4-BE49-F238E27FC236}">
+                <a16:creationId xmlns:a16="http://schemas.microsoft.com/office/drawing/2014/main" id="{D1655D85-CA13-015B-C9EE-7B22BA931C33}"/>
+              </a:ext>
+            </a:extLst>
+          </p:cNvPr>
+          <p:cNvSpPr>
+            <a:spLocks noGrp="1"/>
+          </p:cNvSpPr>
+          <p:nvPr>
+            <p:ph type="sldNum" sz="quarter" idx="12"/>
+          </p:nvPr>
+        </p:nvSpPr>
+        <p:spPr/>
+        <p:txBody>
+          <a:bodyPr/>
+          <a:lstStyle/>
+          <a:p>
+            <a:fld id="{2F2A0DB8-2729-3A4D-A362-07849BE8AC54}" type="slidenum">
+              <a:rPr lang="de-DE" smtClean="0"/>
+              <a:t>11</a:t>
+            </a:fld>
+            <a:endParaRPr lang="de-DE"/>
+          </a:p>
+        </p:txBody>
+      </p:sp>
+    </p:spTree>
+    <p:extLst>
+      <p:ext uri="{BB962C8B-B14F-4D97-AF65-F5344CB8AC3E}">
+        <p14:creationId xmlns:p14="http://schemas.microsoft.com/office/powerpoint/2010/main" val="1399293667"/>
+      </p:ext>
+    </p:extLst>
+  </p:cSld>
+  <p:clrMapOvr>
+    <a:masterClrMapping/>
+  </p:clrMapOvr>
+</p:sld>
+</file>
+
+<file path=ppt/slides/slide12.xml><?xml version="1.0" encoding="utf-8"?>
+<p:sld xmlns:a="http://schemas.openxmlformats.org/drawingml/2006/main" xmlns:r="http://schemas.openxmlformats.org/officeDocument/2006/relationships" xmlns:p="http://schemas.openxmlformats.org/presentationml/2006/main">
+  <p:cSld>
+    <p:spTree>
+      <p:nvGrpSpPr>
+        <p:cNvPr id="1" name=""/>
+        <p:cNvGrpSpPr/>
+        <p:nvPr/>
+      </p:nvGrpSpPr>
+      <p:grpSpPr>
+        <a:xfrm>
+          <a:off x="0" y="0"/>
+          <a:ext cx="0" cy="0"/>
+          <a:chOff x="0" y="0"/>
+          <a:chExt cx="0" cy="0"/>
+        </a:xfrm>
+      </p:grpSpPr>
+      <p:sp>
+        <p:nvSpPr>
+          <p:cNvPr id="2" name="Titel 1">
+            <a:extLst>
+              <a:ext uri="{FF2B5EF4-FFF2-40B4-BE49-F238E27FC236}">
+                <a16:creationId xmlns:a16="http://schemas.microsoft.com/office/drawing/2014/main" id="{1FA392BF-8B33-5DD4-5B04-59A257277373}"/>
+              </a:ext>
+            </a:extLst>
+          </p:cNvPr>
+          <p:cNvSpPr>
+            <a:spLocks noGrp="1"/>
+          </p:cNvSpPr>
+          <p:nvPr>
+            <p:ph type="title"/>
+          </p:nvPr>
+        </p:nvSpPr>
+        <p:spPr/>
+        <p:txBody>
+          <a:bodyPr/>
+          <a:lstStyle/>
+          <a:p>
+            <a:r>
+              <a:rPr lang="de-DE" dirty="0"/>
+              <a:t>Probleme bei Kollisionsdetektion</a:t>
+            </a:r>
+          </a:p>
+        </p:txBody>
+      </p:sp>
+      <p:sp>
+        <p:nvSpPr>
+          <p:cNvPr id="3" name="Inhaltsplatzhalter 2">
+            <a:extLst>
+              <a:ext uri="{FF2B5EF4-FFF2-40B4-BE49-F238E27FC236}">
+                <a16:creationId xmlns:a16="http://schemas.microsoft.com/office/drawing/2014/main" id="{D4A8ABC2-8CF8-1451-93E1-345F358D810B}"/>
+              </a:ext>
+            </a:extLst>
+          </p:cNvPr>
+          <p:cNvSpPr>
+            <a:spLocks noGrp="1"/>
+          </p:cNvSpPr>
+          <p:nvPr>
+            <p:ph idx="1"/>
+          </p:nvPr>
+        </p:nvSpPr>
+        <p:spPr/>
+        <p:txBody>
+          <a:bodyPr/>
+          <a:lstStyle/>
+          <a:p>
+            <a:r>
+              <a:rPr lang="de-DE" dirty="0"/>
+              <a:t>Tunneling</a:t>
+            </a:r>
+          </a:p>
+          <a:p>
+            <a:pPr lvl="1"/>
+            <a:r>
+              <a:rPr lang="de-DE" dirty="0"/>
+              <a:t>Ein Objekt bewegt sich so schnell, dass es beim nächsten Frame über die Grenze hinausschießt ohne das eine Kollision erkannt wird.</a:t>
+            </a:r>
+          </a:p>
+        </p:txBody>
+      </p:sp>
+      <p:pic>
+        <p:nvPicPr>
+          <p:cNvPr id="5" name="Grafik 4" descr="Ein Bild, das Screenshot enthält.&#10;&#10;Automatisch generierte Beschreibung">
+            <a:extLst>
+              <a:ext uri="{FF2B5EF4-FFF2-40B4-BE49-F238E27FC236}">
+                <a16:creationId xmlns:a16="http://schemas.microsoft.com/office/drawing/2014/main" id="{65380651-F298-4633-8407-CAFA91448012}"/>
+              </a:ext>
+            </a:extLst>
+          </p:cNvPr>
+          <p:cNvPicPr>
+            <a:picLocks noChangeAspect="1"/>
+          </p:cNvPicPr>
+          <p:nvPr/>
+        </p:nvPicPr>
+        <p:blipFill>
+          <a:blip r:embed="rId2"/>
+          <a:stretch>
+            <a:fillRect/>
+          </a:stretch>
+        </p:blipFill>
+        <p:spPr>
+          <a:xfrm>
+            <a:off x="838199" y="3429000"/>
+            <a:ext cx="4830289" cy="2882900"/>
+          </a:xfrm>
+          <a:prstGeom prst="rect">
+            <a:avLst/>
+          </a:prstGeom>
+        </p:spPr>
+      </p:pic>
+      <p:pic>
+        <p:nvPicPr>
+          <p:cNvPr id="7" name="Grafik 6" descr="Ein Bild, das Screenshot enthält.&#10;&#10;Automatisch generierte Beschreibung">
+            <a:extLst>
+              <a:ext uri="{FF2B5EF4-FFF2-40B4-BE49-F238E27FC236}">
+                <a16:creationId xmlns:a16="http://schemas.microsoft.com/office/drawing/2014/main" id="{0AB7111A-B9EB-BE7D-967A-B88375A296A8}"/>
+              </a:ext>
+            </a:extLst>
+          </p:cNvPr>
+          <p:cNvPicPr>
+            <a:picLocks noChangeAspect="1"/>
+          </p:cNvPicPr>
+          <p:nvPr/>
+        </p:nvPicPr>
+        <p:blipFill>
+          <a:blip r:embed="rId3"/>
+          <a:stretch>
+            <a:fillRect/>
+          </a:stretch>
+        </p:blipFill>
+        <p:spPr>
+          <a:xfrm>
+            <a:off x="6523514" y="3429000"/>
+            <a:ext cx="4830289" cy="2882900"/>
+          </a:xfrm>
+          <a:prstGeom prst="rect">
+            <a:avLst/>
+          </a:prstGeom>
+        </p:spPr>
+      </p:pic>
+      <p:sp>
+        <p:nvSpPr>
+          <p:cNvPr id="4" name="Datumsplatzhalter 3">
+            <a:extLst>
+              <a:ext uri="{FF2B5EF4-FFF2-40B4-BE49-F238E27FC236}">
+                <a16:creationId xmlns:a16="http://schemas.microsoft.com/office/drawing/2014/main" id="{635CA2F6-E20B-DEF9-7883-64945C6660EF}"/>
+              </a:ext>
+            </a:extLst>
+          </p:cNvPr>
+          <p:cNvSpPr>
+            <a:spLocks noGrp="1"/>
+          </p:cNvSpPr>
+          <p:nvPr>
+            <p:ph type="dt" sz="half" idx="10"/>
+          </p:nvPr>
+        </p:nvSpPr>
+        <p:spPr/>
+        <p:txBody>
+          <a:bodyPr/>
+          <a:lstStyle/>
+          <a:p>
+            <a:fld id="{BD24458A-0043-4E4F-8027-3992B36F2154}" type="datetime1">
+              <a:rPr lang="de-DE" smtClean="0"/>
+              <a:t>10.12.2024</a:t>
+            </a:fld>
+            <a:endParaRPr lang="de-DE"/>
+          </a:p>
+        </p:txBody>
+      </p:sp>
+      <p:sp>
+        <p:nvSpPr>
+          <p:cNvPr id="8" name="Foliennummernplatzhalter 7">
+            <a:extLst>
+              <a:ext uri="{FF2B5EF4-FFF2-40B4-BE49-F238E27FC236}">
+                <a16:creationId xmlns:a16="http://schemas.microsoft.com/office/drawing/2014/main" id="{B63EF494-99B3-0D68-4766-11B982823A69}"/>
+              </a:ext>
+            </a:extLst>
+          </p:cNvPr>
+          <p:cNvSpPr>
+            <a:spLocks noGrp="1"/>
+          </p:cNvSpPr>
+          <p:nvPr>
+            <p:ph type="sldNum" sz="quarter" idx="12"/>
+          </p:nvPr>
+        </p:nvSpPr>
+        <p:spPr/>
+        <p:txBody>
+          <a:bodyPr/>
+          <a:lstStyle/>
+          <a:p>
+            <a:fld id="{2F2A0DB8-2729-3A4D-A362-07849BE8AC54}" type="slidenum">
+              <a:rPr lang="de-DE" smtClean="0"/>
+              <a:t>12</a:t>
+            </a:fld>
+            <a:endParaRPr lang="de-DE"/>
+          </a:p>
+        </p:txBody>
+      </p:sp>
+    </p:spTree>
+    <p:extLst>
+      <p:ext uri="{BB962C8B-B14F-4D97-AF65-F5344CB8AC3E}">
+        <p14:creationId xmlns:p14="http://schemas.microsoft.com/office/powerpoint/2010/main" val="1606194002"/>
+      </p:ext>
+    </p:extLst>
+  </p:cSld>
+  <p:clrMapOvr>
+    <a:masterClrMapping/>
+  </p:clrMapOvr>
+</p:sld>
+</file>
+
+<file path=ppt/slides/slide13.xml><?xml version="1.0" encoding="utf-8"?>
+<p:sld xmlns:a="http://schemas.openxmlformats.org/drawingml/2006/main" xmlns:r="http://schemas.openxmlformats.org/officeDocument/2006/relationships" xmlns:p="http://schemas.openxmlformats.org/presentationml/2006/main">
+  <p:cSld>
+    <p:spTree>
+      <p:nvGrpSpPr>
+        <p:cNvPr id="1" name=""/>
+        <p:cNvGrpSpPr/>
+        <p:nvPr/>
+      </p:nvGrpSpPr>
+      <p:grpSpPr>
+        <a:xfrm>
+          <a:off x="0" y="0"/>
+          <a:ext cx="0" cy="0"/>
+          <a:chOff x="0" y="0"/>
+          <a:chExt cx="0" cy="0"/>
+        </a:xfrm>
+      </p:grpSpPr>
+      <p:sp>
+        <p:nvSpPr>
+          <p:cNvPr id="2" name="Titel 1">
+            <a:extLst>
+              <a:ext uri="{FF2B5EF4-FFF2-40B4-BE49-F238E27FC236}">
+                <a16:creationId xmlns:a16="http://schemas.microsoft.com/office/drawing/2014/main" id="{CFB01F99-2DD5-29A1-DF48-1FB7B8111427}"/>
+              </a:ext>
+            </a:extLst>
+          </p:cNvPr>
+          <p:cNvSpPr>
+            <a:spLocks noGrp="1"/>
+          </p:cNvSpPr>
+          <p:nvPr>
+            <p:ph type="title"/>
+          </p:nvPr>
+        </p:nvSpPr>
+        <p:spPr/>
+        <p:txBody>
+          <a:bodyPr/>
+          <a:lstStyle/>
+          <a:p>
+            <a:r>
+              <a:rPr lang="de-DE" dirty="0"/>
+              <a:t>Probleme bei </a:t>
+            </a:r>
+            <a:r>
+              <a:rPr lang="de-DE" dirty="0" err="1"/>
+              <a:t>Kollisiondetektion</a:t>
+            </a:r>
+            <a:endParaRPr lang="de-DE" dirty="0"/>
+          </a:p>
+        </p:txBody>
+      </p:sp>
+      <p:sp>
+        <p:nvSpPr>
+          <p:cNvPr id="3" name="Inhaltsplatzhalter 2">
+            <a:extLst>
+              <a:ext uri="{FF2B5EF4-FFF2-40B4-BE49-F238E27FC236}">
+                <a16:creationId xmlns:a16="http://schemas.microsoft.com/office/drawing/2014/main" id="{4FA6169A-3945-B86E-8BD7-BD64DB940806}"/>
+              </a:ext>
+            </a:extLst>
+          </p:cNvPr>
+          <p:cNvSpPr>
+            <a:spLocks noGrp="1"/>
+          </p:cNvSpPr>
+          <p:nvPr>
+            <p:ph idx="1"/>
+          </p:nvPr>
+        </p:nvSpPr>
+        <p:spPr/>
+        <p:txBody>
+          <a:bodyPr/>
+          <a:lstStyle/>
+          <a:p>
+            <a:r>
+              <a:rPr lang="de-DE" dirty="0"/>
+              <a:t>Performance</a:t>
+            </a:r>
+          </a:p>
+          <a:p>
+            <a:r>
+              <a:rPr lang="de-DE" dirty="0"/>
+              <a:t>Komplexe Formen (</a:t>
+            </a:r>
+            <a:r>
+              <a:rPr lang="de-DE" dirty="0" err="1"/>
+              <a:t>Bounding</a:t>
+            </a:r>
+            <a:r>
+              <a:rPr lang="de-DE" dirty="0"/>
+              <a:t> Boxes müssen </a:t>
+            </a:r>
+            <a:r>
+              <a:rPr lang="de-DE" dirty="0" err="1"/>
+              <a:t>evtl</a:t>
+            </a:r>
+            <a:r>
+              <a:rPr lang="de-DE" dirty="0"/>
+              <a:t> angewendet werden was ein Verlust der Genauigkeit hervorbringen könnte)</a:t>
+            </a:r>
+          </a:p>
+        </p:txBody>
+      </p:sp>
+      <p:sp>
+        <p:nvSpPr>
+          <p:cNvPr id="4" name="Datumsplatzhalter 3">
+            <a:extLst>
+              <a:ext uri="{FF2B5EF4-FFF2-40B4-BE49-F238E27FC236}">
+                <a16:creationId xmlns:a16="http://schemas.microsoft.com/office/drawing/2014/main" id="{D7BDC464-4F6F-BF47-FF60-FAFAE69BBFDC}"/>
+              </a:ext>
+            </a:extLst>
+          </p:cNvPr>
+          <p:cNvSpPr>
+            <a:spLocks noGrp="1"/>
+          </p:cNvSpPr>
+          <p:nvPr>
+            <p:ph type="dt" sz="half" idx="10"/>
+          </p:nvPr>
+        </p:nvSpPr>
+        <p:spPr/>
+        <p:txBody>
+          <a:bodyPr/>
+          <a:lstStyle/>
+          <a:p>
+            <a:fld id="{5DF3E358-6AEA-4C2D-970A-3E87B577A52D}" type="datetime1">
+              <a:rPr lang="de-DE" smtClean="0"/>
+              <a:t>10.12.2024</a:t>
+            </a:fld>
+            <a:endParaRPr lang="de-DE"/>
+          </a:p>
+        </p:txBody>
+      </p:sp>
+      <p:sp>
+        <p:nvSpPr>
+          <p:cNvPr id="6" name="Foliennummernplatzhalter 5">
+            <a:extLst>
+              <a:ext uri="{FF2B5EF4-FFF2-40B4-BE49-F238E27FC236}">
+                <a16:creationId xmlns:a16="http://schemas.microsoft.com/office/drawing/2014/main" id="{3BE56770-F0F6-C6BE-1260-54AE40A557ED}"/>
+              </a:ext>
+            </a:extLst>
+          </p:cNvPr>
+          <p:cNvSpPr>
+            <a:spLocks noGrp="1"/>
+          </p:cNvSpPr>
+          <p:nvPr>
+            <p:ph type="sldNum" sz="quarter" idx="12"/>
+          </p:nvPr>
+        </p:nvSpPr>
+        <p:spPr/>
+        <p:txBody>
+          <a:bodyPr/>
+          <a:lstStyle/>
+          <a:p>
+            <a:fld id="{2F2A0DB8-2729-3A4D-A362-07849BE8AC54}" type="slidenum">
+              <a:rPr lang="de-DE" smtClean="0"/>
+              <a:t>13</a:t>
+            </a:fld>
+            <a:endParaRPr lang="de-DE" dirty="0"/>
+          </a:p>
+        </p:txBody>
+      </p:sp>
+    </p:spTree>
+    <p:extLst>
+      <p:ext uri="{BB962C8B-B14F-4D97-AF65-F5344CB8AC3E}">
+        <p14:creationId xmlns:p14="http://schemas.microsoft.com/office/powerpoint/2010/main" val="1253975808"/>
+      </p:ext>
+    </p:extLst>
+  </p:cSld>
+  <p:clrMapOvr>
+    <a:masterClrMapping/>
+  </p:clrMapOvr>
+</p:sld>
+</file>
+
+<file path=ppt/slides/slide14.xml><?xml version="1.0" encoding="utf-8"?>
+<p:sld xmlns:a="http://schemas.openxmlformats.org/drawingml/2006/main" xmlns:r="http://schemas.openxmlformats.org/officeDocument/2006/relationships" xmlns:p="http://schemas.openxmlformats.org/presentationml/2006/main">
+  <p:cSld>
+    <p:bg>
+      <p:bgPr>
+        <a:solidFill>
+          <a:schemeClr val="bg1">
+            <a:alpha val="5000"/>
+          </a:schemeClr>
+        </a:solidFill>
+        <a:effectLst/>
+      </p:bgPr>
+    </p:bg>
+    <p:spTree>
+      <p:nvGrpSpPr>
+        <p:cNvPr id="1" name=""/>
+        <p:cNvGrpSpPr/>
+        <p:nvPr/>
+      </p:nvGrpSpPr>
+      <p:grpSpPr>
+        <a:xfrm>
+          <a:off x="0" y="0"/>
+          <a:ext cx="0" cy="0"/>
+          <a:chOff x="0" y="0"/>
+          <a:chExt cx="0" cy="0"/>
+        </a:xfrm>
+      </p:grpSpPr>
+      <p:sp>
+        <p:nvSpPr>
+          <p:cNvPr id="2" name="Titel 1">
+            <a:extLst>
+              <a:ext uri="{FF2B5EF4-FFF2-40B4-BE49-F238E27FC236}">
+                <a16:creationId xmlns:a16="http://schemas.microsoft.com/office/drawing/2014/main" id="{5125205F-0E93-A22A-FA1E-63BE0FBEF5FF}"/>
+              </a:ext>
+            </a:extLst>
+          </p:cNvPr>
+          <p:cNvSpPr>
+            <a:spLocks noGrp="1"/>
+          </p:cNvSpPr>
+          <p:nvPr>
+            <p:ph type="title"/>
+          </p:nvPr>
+        </p:nvSpPr>
+        <p:spPr/>
+        <p:txBody>
+          <a:bodyPr/>
+          <a:lstStyle/>
+          <a:p>
+            <a:r>
+              <a:rPr lang="de-DE" dirty="0"/>
+              <a:t>Skalierung mit mehreren Objekten</a:t>
+            </a:r>
+          </a:p>
+        </p:txBody>
+      </p:sp>
+      <mc:AlternateContent xmlns:mc="http://schemas.openxmlformats.org/markup-compatibility/2006">
+        <mc:Choice xmlns:a14="http://schemas.microsoft.com/office/drawing/2010/main" Requires="a14">
+          <p:sp>
+            <p:nvSpPr>
+              <p:cNvPr id="7" name="Inhaltsplatzhalter 6">
+                <a:extLst>
+                  <a:ext uri="{FF2B5EF4-FFF2-40B4-BE49-F238E27FC236}">
+                    <a16:creationId xmlns:a16="http://schemas.microsoft.com/office/drawing/2014/main" id="{F136CDAD-67B8-7251-C865-8F3C3708C3C4}"/>
+                  </a:ext>
+                </a:extLst>
+              </p:cNvPr>
+              <p:cNvSpPr>
+                <a:spLocks noGrp="1"/>
+              </p:cNvSpPr>
+              <p:nvPr>
+                <p:ph idx="1"/>
+              </p:nvPr>
+            </p:nvSpPr>
+            <p:spPr/>
+            <p:txBody>
+              <a:bodyPr/>
+              <a:lstStyle/>
+              <a:p>
+                <a14:m>
+                  <m:oMath xmlns:m="http://schemas.openxmlformats.org/officeDocument/2006/math">
+                    <m:r>
+                      <m:rPr>
+                        <m:sty m:val="p"/>
+                      </m:rPr>
+                      <a:rPr lang="de-DE" b="0" i="0" dirty="0" smtClean="0">
+                        <a:solidFill>
+                          <a:schemeClr val="tx1"/>
+                        </a:solidFill>
+                        <a:latin typeface="Cambria Math" panose="02040503050406030204" pitchFamily="18" charset="0"/>
+                      </a:rPr>
+                      <m:t>n</m:t>
+                    </m:r>
+                    <m:r>
+                      <a:rPr lang="de-DE" b="0" i="0" dirty="0" smtClean="0">
+                        <a:solidFill>
+                          <a:schemeClr val="tx1"/>
+                        </a:solidFill>
+                        <a:latin typeface="Cambria Math" panose="02040503050406030204" pitchFamily="18" charset="0"/>
+                      </a:rPr>
+                      <m:t>=</m:t>
+                    </m:r>
+                    <m:r>
+                      <m:rPr>
+                        <m:sty m:val="p"/>
+                      </m:rPr>
+                      <a:rPr lang="de-DE" b="0" i="0" dirty="0" smtClean="0">
+                        <a:solidFill>
+                          <a:schemeClr val="tx1"/>
+                        </a:solidFill>
+                        <a:latin typeface="Cambria Math" panose="02040503050406030204" pitchFamily="18" charset="0"/>
+                      </a:rPr>
+                      <m:t>Anzahl</m:t>
+                    </m:r>
+                    <m:r>
+                      <a:rPr lang="de-DE" b="0" i="0" dirty="0" smtClean="0">
+                        <a:solidFill>
+                          <a:schemeClr val="tx1"/>
+                        </a:solidFill>
+                        <a:latin typeface="Cambria Math" panose="02040503050406030204" pitchFamily="18" charset="0"/>
+                      </a:rPr>
+                      <m:t> </m:t>
+                    </m:r>
+                    <m:r>
+                      <m:rPr>
+                        <m:sty m:val="p"/>
+                      </m:rPr>
+                      <a:rPr lang="de-DE" b="0" i="0" dirty="0" smtClean="0">
+                        <a:solidFill>
+                          <a:schemeClr val="tx1"/>
+                        </a:solidFill>
+                        <a:latin typeface="Cambria Math" panose="02040503050406030204" pitchFamily="18" charset="0"/>
+                      </a:rPr>
+                      <m:t>der</m:t>
+                    </m:r>
+                    <m:r>
+                      <a:rPr lang="de-DE" b="0" i="0" dirty="0" smtClean="0">
+                        <a:solidFill>
+                          <a:schemeClr val="tx1"/>
+                        </a:solidFill>
+                        <a:latin typeface="Cambria Math" panose="02040503050406030204" pitchFamily="18" charset="0"/>
+                      </a:rPr>
+                      <m:t> </m:t>
+                    </m:r>
+                    <m:r>
+                      <m:rPr>
+                        <m:sty m:val="p"/>
+                      </m:rPr>
+                      <a:rPr lang="de-DE" b="0" i="0" dirty="0" smtClean="0">
+                        <a:solidFill>
+                          <a:schemeClr val="tx1"/>
+                        </a:solidFill>
+                        <a:latin typeface="Cambria Math" panose="02040503050406030204" pitchFamily="18" charset="0"/>
+                      </a:rPr>
+                      <m:t>B</m:t>
+                    </m:r>
+                    <m:r>
+                      <a:rPr lang="de-DE" b="0" i="0" dirty="0" smtClean="0">
+                        <a:solidFill>
+                          <a:schemeClr val="tx1"/>
+                        </a:solidFill>
+                        <a:latin typeface="Cambria Math" panose="02040503050406030204" pitchFamily="18" charset="0"/>
+                      </a:rPr>
+                      <m:t>ä</m:t>
+                    </m:r>
+                    <m:r>
+                      <m:rPr>
+                        <m:sty m:val="p"/>
+                      </m:rPr>
+                      <a:rPr lang="de-DE" b="0" i="0" dirty="0" smtClean="0">
+                        <a:solidFill>
+                          <a:schemeClr val="tx1"/>
+                        </a:solidFill>
+                        <a:latin typeface="Cambria Math" panose="02040503050406030204" pitchFamily="18" charset="0"/>
+                      </a:rPr>
+                      <m:t>lle</m:t>
+                    </m:r>
+                  </m:oMath>
+                </a14:m>
+                <a:endParaRPr lang="de-DE" b="0" i="0" dirty="0">
+                  <a:solidFill>
+                    <a:schemeClr val="tx1"/>
+                  </a:solidFill>
+                </a:endParaRPr>
+              </a:p>
+              <a:p>
+                <a14:m>
+                  <m:oMath xmlns:m="http://schemas.openxmlformats.org/officeDocument/2006/math">
+                    <m:r>
+                      <m:rPr>
+                        <m:sty m:val="p"/>
+                      </m:rPr>
+                      <a:rPr lang="de-DE" b="0" i="0" smtClean="0">
+                        <a:solidFill>
+                          <a:schemeClr val="tx1"/>
+                        </a:solidFill>
+                      </a:rPr>
+                      <m:t>Anzahl</m:t>
+                    </m:r>
+                    <m:r>
+                      <a:rPr lang="de-DE" b="0" i="0" smtClean="0">
+                        <a:solidFill>
+                          <a:schemeClr val="tx1"/>
+                        </a:solidFill>
+                      </a:rPr>
+                      <m:t> </m:t>
+                    </m:r>
+                    <m:r>
+                      <m:rPr>
+                        <m:sty m:val="p"/>
+                      </m:rPr>
+                      <a:rPr lang="de-DE" b="0" i="0" smtClean="0">
+                        <a:solidFill>
+                          <a:schemeClr val="tx1"/>
+                        </a:solidFill>
+                      </a:rPr>
+                      <m:t>der</m:t>
+                    </m:r>
+                    <m:r>
+                      <a:rPr lang="de-DE" b="0" i="0" smtClean="0">
+                        <a:solidFill>
+                          <a:schemeClr val="tx1"/>
+                        </a:solidFill>
+                      </a:rPr>
+                      <m:t> </m:t>
+                    </m:r>
+                    <m:r>
+                      <m:rPr>
+                        <m:sty m:val="p"/>
+                      </m:rPr>
+                      <a:rPr lang="de-DE" b="0" i="0" smtClean="0">
+                        <a:solidFill>
+                          <a:schemeClr val="tx1"/>
+                        </a:solidFill>
+                      </a:rPr>
+                      <m:t>Kollisione</m:t>
+                    </m:r>
+                    <m:r>
+                      <a:rPr lang="de-DE" b="0" i="1" smtClean="0">
+                        <a:solidFill>
+                          <a:schemeClr val="tx1"/>
+                        </a:solidFill>
+                        <a:latin typeface="Cambria Math" panose="02040503050406030204" pitchFamily="18" charset="0"/>
+                      </a:rPr>
+                      <m:t>𝑛</m:t>
+                    </m:r>
+                    <m:r>
+                      <a:rPr lang="de-DE" b="0" i="1" smtClean="0">
+                        <a:solidFill>
+                          <a:schemeClr val="tx1"/>
+                        </a:solidFill>
+                        <a:latin typeface="Cambria Math" panose="02040503050406030204" pitchFamily="18" charset="0"/>
+                      </a:rPr>
+                      <m:t>:</m:t>
+                    </m:r>
+                    <m:f>
+                      <m:fPr>
+                        <m:ctrlPr>
+                          <a:rPr lang="en-US" i="1" dirty="0" smtClean="0">
+                            <a:solidFill>
+                              <a:schemeClr val="tx1"/>
+                            </a:solidFill>
+                          </a:rPr>
+                        </m:ctrlPr>
+                      </m:fPr>
+                      <m:num>
+                        <m:r>
+                          <a:rPr lang="de-DE" b="0" i="1" dirty="0" smtClean="0">
+                            <a:solidFill>
+                              <a:schemeClr val="tx1"/>
+                            </a:solidFill>
+                          </a:rPr>
+                          <m:t>𝑛</m:t>
+                        </m:r>
+                        <m:r>
+                          <a:rPr lang="de-DE" b="0" i="1" dirty="0" smtClean="0">
+                            <a:solidFill>
+                              <a:schemeClr val="tx1"/>
+                            </a:solidFill>
+                          </a:rPr>
+                          <m:t>(</m:t>
+                        </m:r>
+                        <m:r>
+                          <a:rPr lang="de-DE" b="0" i="1" dirty="0" smtClean="0">
+                            <a:solidFill>
+                              <a:schemeClr val="tx1"/>
+                            </a:solidFill>
+                          </a:rPr>
+                          <m:t>𝑛</m:t>
+                        </m:r>
+                        <m:r>
+                          <a:rPr lang="de-DE" b="0" i="1" dirty="0" smtClean="0">
+                            <a:solidFill>
+                              <a:schemeClr val="tx1"/>
+                            </a:solidFill>
+                          </a:rPr>
+                          <m:t>−1)</m:t>
+                        </m:r>
+                      </m:num>
+                      <m:den>
+                        <m:r>
+                          <a:rPr lang="en-US" i="1" dirty="0" smtClean="0">
+                            <a:solidFill>
+                              <a:schemeClr val="tx1"/>
+                            </a:solidFill>
+                          </a:rPr>
+                          <m:t>2</m:t>
+                        </m:r>
+                      </m:den>
+                    </m:f>
+                    <m:r>
+                      <a:rPr lang="de-DE" b="0" i="1" dirty="0" smtClean="0">
+                        <a:solidFill>
+                          <a:schemeClr val="tx1"/>
+                        </a:solidFill>
+                        <a:latin typeface="Cambria Math" panose="02040503050406030204" pitchFamily="18" charset="0"/>
+                      </a:rPr>
+                      <m:t>  </m:t>
+                    </m:r>
+                  </m:oMath>
+                </a14:m>
+                <a:endParaRPr lang="de-DE" dirty="0">
+                  <a:solidFill>
+                    <a:schemeClr val="tx1"/>
+                  </a:solidFill>
+                  <a:cs typeface="Arabic Typesetting" panose="020F0502020204030204" pitchFamily="66" charset="-78"/>
+                </a:endParaRPr>
+              </a:p>
+              <a:p>
+                <a:r>
+                  <a:rPr lang="de-DE" dirty="0">
+                    <a:solidFill>
+                      <a:schemeClr val="tx1"/>
+                    </a:solidFill>
+                    <a:cs typeface="Arabic Typesetting" panose="020F0502020204030204" pitchFamily="66" charset="-78"/>
+                  </a:rPr>
+                  <a:t>Ergibt einer Laufzeit von: O(</a:t>
+                </a:r>
+                <a14:m>
+                  <m:oMath xmlns:m="http://schemas.openxmlformats.org/officeDocument/2006/math">
+                    <m:sSup>
+                      <m:sSupPr>
+                        <m:ctrlPr>
+                          <a:rPr lang="pt-BR" i="1">
+                            <a:solidFill>
+                              <a:schemeClr val="tx1"/>
+                            </a:solidFill>
+                            <a:latin typeface="Cambria Math" panose="02040503050406030204" pitchFamily="18" charset="0"/>
+                          </a:rPr>
+                        </m:ctrlPr>
+                      </m:sSupPr>
+                      <m:e>
+                        <m:r>
+                          <m:rPr>
+                            <m:sty m:val="p"/>
+                          </m:rPr>
+                          <a:rPr lang="de-DE" i="0">
+                            <a:solidFill>
+                              <a:schemeClr val="tx1"/>
+                            </a:solidFill>
+                            <a:latin typeface="Cambria Math" panose="02040503050406030204" pitchFamily="18" charset="0"/>
+                          </a:rPr>
+                          <m:t>n</m:t>
+                        </m:r>
+                      </m:e>
+                      <m:sup>
+                        <m:r>
+                          <a:rPr lang="pt-BR" i="0">
+                            <a:solidFill>
+                              <a:schemeClr val="tx1"/>
+                            </a:solidFill>
+                            <a:latin typeface="Cambria Math" panose="02040503050406030204" pitchFamily="18" charset="0"/>
+                          </a:rPr>
+                          <m:t>2</m:t>
+                        </m:r>
+                      </m:sup>
+                    </m:sSup>
+                  </m:oMath>
+                </a14:m>
+                <a:r>
+                  <a:rPr lang="en-US" dirty="0">
+                    <a:solidFill>
+                      <a:schemeClr val="tx1"/>
+                    </a:solidFill>
+                    <a:cs typeface="Arabic Typesetting" panose="020F0502020204030204" pitchFamily="66" charset="-78"/>
+                  </a:rPr>
+                  <a:t>)</a:t>
+                </a:r>
+              </a:p>
+              <a:p>
+                <a:endParaRPr lang="de-DE" dirty="0">
+                  <a:solidFill>
+                    <a:schemeClr val="tx1"/>
+                  </a:solidFill>
+                  <a:cs typeface="Arabic Typesetting" panose="020F0502020204030204" pitchFamily="66" charset="-78"/>
+                </a:endParaRPr>
+              </a:p>
+              <a:p>
+                <a:endParaRPr lang="en-US" dirty="0">
+                  <a:solidFill>
+                    <a:schemeClr val="tx1"/>
+                  </a:solidFill>
+                  <a:cs typeface="Arabic Typesetting" panose="020F0502020204030204" pitchFamily="66" charset="-78"/>
+                </a:endParaRPr>
+              </a:p>
+              <a:p>
+                <a:endParaRPr lang="en-US" dirty="0">
+                  <a:solidFill>
+                    <a:schemeClr val="tx1"/>
+                  </a:solidFill>
+                  <a:cs typeface="Arabic Typesetting" panose="020F0502020204030204" pitchFamily="66" charset="-78"/>
+                </a:endParaRPr>
+              </a:p>
+            </p:txBody>
+          </p:sp>
+        </mc:Choice>
+        <mc:Fallback>
+          <p:sp>
+            <p:nvSpPr>
+              <p:cNvPr id="7" name="Inhaltsplatzhalter 6">
+                <a:extLst>
+                  <a:ext uri="{FF2B5EF4-FFF2-40B4-BE49-F238E27FC236}">
+                    <a16:creationId xmlns:a16="http://schemas.microsoft.com/office/drawing/2014/main" id="{F136CDAD-67B8-7251-C865-8F3C3708C3C4}"/>
+                  </a:ext>
+                </a:extLst>
+              </p:cNvPr>
+              <p:cNvSpPr>
+                <a:spLocks noGrp="1" noRot="1" noChangeAspect="1" noMove="1" noResize="1" noEditPoints="1" noAdjustHandles="1" noChangeArrowheads="1" noChangeShapeType="1" noTextEdit="1"/>
+              </p:cNvSpPr>
+              <p:nvPr>
+                <p:ph idx="1"/>
+              </p:nvPr>
+            </p:nvSpPr>
+            <p:spPr>
+              <a:blipFill>
+                <a:blip r:embed="rId2"/>
+                <a:stretch>
+                  <a:fillRect l="-1043"/>
+                </a:stretch>
+              </a:blipFill>
+            </p:spPr>
+            <p:txBody>
+              <a:bodyPr/>
+              <a:lstStyle/>
+              <a:p>
+                <a:r>
+                  <a:rPr lang="en-US">
+                    <a:noFill/>
+                  </a:rPr>
+                  <a:t> </a:t>
+                </a:r>
+              </a:p>
+            </p:txBody>
+          </p:sp>
+        </mc:Fallback>
+      </mc:AlternateContent>
+      <p:graphicFrame>
+        <p:nvGraphicFramePr>
+          <p:cNvPr id="9" name="Inhaltsplatzhalter 4">
+            <a:extLst>
+              <a:ext uri="{FF2B5EF4-FFF2-40B4-BE49-F238E27FC236}">
+                <a16:creationId xmlns:a16="http://schemas.microsoft.com/office/drawing/2014/main" id="{7385A376-6D68-9229-4D1A-9064B004D502}"/>
+              </a:ext>
+            </a:extLst>
+          </p:cNvPr>
+          <p:cNvGraphicFramePr>
+            <a:graphicFrameLocks/>
+          </p:cNvGraphicFramePr>
+          <p:nvPr>
+            <p:extLst>
+              <p:ext uri="{D42A27DB-BD31-4B8C-83A1-F6EECF244321}">
+                <p14:modId xmlns:p14="http://schemas.microsoft.com/office/powerpoint/2010/main" val="1731571910"/>
+              </p:ext>
+            </p:extLst>
+          </p:nvPr>
+        </p:nvGraphicFramePr>
+        <p:xfrm>
+          <a:off x="4059555" y="4001294"/>
+          <a:ext cx="4072890" cy="1371600"/>
+        </p:xfrm>
+        <a:graphic>
+          <a:graphicData uri="http://schemas.openxmlformats.org/drawingml/2006/table">
+            <a:tbl>
+              <a:tblPr firstRow="1" bandRow="1">
+                <a:tableStyleId>{5C22544A-7EE6-4342-B048-85BDC9FD1C3A}</a:tableStyleId>
+              </a:tblPr>
+              <a:tblGrid>
+                <a:gridCol w="2036445">
+                  <a:extLst>
+                    <a:ext uri="{9D8B030D-6E8A-4147-A177-3AD203B41FA5}">
+                      <a16:colId xmlns:a16="http://schemas.microsoft.com/office/drawing/2014/main" val="1287265074"/>
+                    </a:ext>
+                  </a:extLst>
+                </a:gridCol>
+                <a:gridCol w="2036445">
+                  <a:extLst>
+                    <a:ext uri="{9D8B030D-6E8A-4147-A177-3AD203B41FA5}">
+                      <a16:colId xmlns:a16="http://schemas.microsoft.com/office/drawing/2014/main" val="4281974570"/>
+                    </a:ext>
+                  </a:extLst>
+                </a:gridCol>
+              </a:tblGrid>
+              <a:tr h="240229">
+                <a:tc>
+                  <a:txBody>
+                    <a:bodyPr/>
+                    <a:lstStyle/>
+                    <a:p>
+                      <a:pPr algn="ctr"/>
+                      <a:r>
+                        <a:rPr lang="de-DE" sz="1200" dirty="0">
+                          <a:solidFill>
+                            <a:schemeClr val="tx1"/>
+                          </a:solidFill>
+                        </a:rPr>
+                        <a:t>Anzahl der Objekte ( Bälle )</a:t>
+                      </a:r>
+                      <a:endParaRPr lang="en-US" sz="1200" dirty="0">
+                        <a:solidFill>
+                          <a:schemeClr val="tx1"/>
+                        </a:solidFill>
+                      </a:endParaRPr>
+                    </a:p>
+                  </a:txBody>
+                  <a:tcPr>
+                    <a:solidFill>
+                      <a:schemeClr val="tx1">
+                        <a:alpha val="5000"/>
+                      </a:schemeClr>
+                    </a:solidFill>
+                  </a:tcPr>
+                </a:tc>
+                <a:tc>
+                  <a:txBody>
+                    <a:bodyPr/>
+                    <a:lstStyle/>
+                    <a:p>
+                      <a:pPr marL="0" marR="0" lvl="0" indent="0" algn="ctr" defTabSz="914400" rtl="0" eaLnBrk="1" fontAlgn="auto" latinLnBrk="0" hangingPunct="1">
+                        <a:lnSpc>
+                          <a:spcPct val="100000"/>
+                        </a:lnSpc>
+                        <a:spcBef>
+                          <a:spcPts val="0"/>
+                        </a:spcBef>
+                        <a:spcAft>
+                          <a:spcPts val="0"/>
+                        </a:spcAft>
+                        <a:buClrTx/>
+                        <a:buSzTx/>
+                        <a:buFontTx/>
+                        <a:buNone/>
+                        <a:tabLst/>
+                        <a:defRPr/>
+                      </a:pPr>
+                      <a:r>
+                        <a:rPr lang="de-DE" sz="1200" dirty="0">
+                          <a:solidFill>
+                            <a:schemeClr val="tx1"/>
+                          </a:solidFill>
+                        </a:rPr>
+                        <a:t>Anzahl der </a:t>
+                      </a:r>
+                      <a:r>
+                        <a:rPr lang="en-US" sz="1200" dirty="0" err="1">
+                          <a:solidFill>
+                            <a:schemeClr val="tx1"/>
+                          </a:solidFill>
+                        </a:rPr>
+                        <a:t>Kollisionen</a:t>
+                      </a:r>
+                      <a:endParaRPr lang="en-US" sz="1200" dirty="0">
+                        <a:solidFill>
+                          <a:schemeClr val="tx1"/>
+                        </a:solidFill>
+                      </a:endParaRPr>
+                    </a:p>
+                  </a:txBody>
+                  <a:tcPr>
+                    <a:solidFill>
+                      <a:schemeClr val="tx1">
+                        <a:alpha val="5000"/>
+                      </a:schemeClr>
+                    </a:solidFill>
+                  </a:tcPr>
+                </a:tc>
+                <a:extLst>
+                  <a:ext uri="{0D108BD9-81ED-4DB2-BD59-A6C34878D82A}">
+                    <a16:rowId xmlns:a16="http://schemas.microsoft.com/office/drawing/2014/main" val="612800788"/>
+                  </a:ext>
+                </a:extLst>
+              </a:tr>
+              <a:tr h="240229">
+                <a:tc>
+                  <a:txBody>
+                    <a:bodyPr/>
+                    <a:lstStyle/>
+                    <a:p>
+                      <a:pPr algn="ctr"/>
+                      <a:r>
+                        <a:rPr lang="de-DE" dirty="0"/>
+                        <a:t>2</a:t>
+                      </a:r>
+                      <a:endParaRPr lang="en-US" dirty="0"/>
+                    </a:p>
+                  </a:txBody>
+                  <a:tcPr>
+                    <a:solidFill>
+                      <a:schemeClr val="tx1">
+                        <a:alpha val="5000"/>
+                      </a:schemeClr>
+                    </a:solidFill>
+                  </a:tcPr>
+                </a:tc>
+                <a:tc>
+                  <a:txBody>
+                    <a:bodyPr/>
+                    <a:lstStyle/>
+                    <a:p>
+                      <a:pPr algn="ctr"/>
+                      <a:r>
+                        <a:rPr lang="de-DE" dirty="0"/>
+                        <a:t>1</a:t>
+                      </a:r>
+                      <a:endParaRPr lang="en-US" dirty="0"/>
+                    </a:p>
+                  </a:txBody>
+                  <a:tcPr>
+                    <a:solidFill>
+                      <a:schemeClr val="tx1">
+                        <a:alpha val="5000"/>
+                      </a:schemeClr>
+                    </a:solidFill>
+                  </a:tcPr>
+                </a:tc>
+                <a:extLst>
+                  <a:ext uri="{0D108BD9-81ED-4DB2-BD59-A6C34878D82A}">
+                    <a16:rowId xmlns:a16="http://schemas.microsoft.com/office/drawing/2014/main" val="2461253562"/>
+                  </a:ext>
+                </a:extLst>
+              </a:tr>
+              <a:tr h="240229">
+                <a:tc>
+                  <a:txBody>
+                    <a:bodyPr/>
+                    <a:lstStyle/>
+                    <a:p>
+                      <a:pPr algn="ctr"/>
+                      <a:r>
+                        <a:rPr lang="de-DE" dirty="0"/>
+                        <a:t>15</a:t>
+                      </a:r>
+                      <a:endParaRPr lang="en-US" dirty="0"/>
+                    </a:p>
+                  </a:txBody>
+                  <a:tcPr>
+                    <a:solidFill>
+                      <a:schemeClr val="tx1">
+                        <a:alpha val="5000"/>
+                      </a:schemeClr>
+                    </a:solidFill>
+                  </a:tcPr>
+                </a:tc>
+                <a:tc>
+                  <a:txBody>
+                    <a:bodyPr/>
+                    <a:lstStyle/>
+                    <a:p>
+                      <a:pPr algn="ctr"/>
+                      <a:r>
+                        <a:rPr lang="de-DE" dirty="0"/>
+                        <a:t>105</a:t>
+                      </a:r>
+                      <a:endParaRPr lang="en-US" dirty="0"/>
+                    </a:p>
+                  </a:txBody>
+                  <a:tcPr>
+                    <a:solidFill>
+                      <a:schemeClr val="tx1">
+                        <a:alpha val="5000"/>
+                      </a:schemeClr>
+                    </a:solidFill>
+                  </a:tcPr>
+                </a:tc>
+                <a:extLst>
+                  <a:ext uri="{0D108BD9-81ED-4DB2-BD59-A6C34878D82A}">
+                    <a16:rowId xmlns:a16="http://schemas.microsoft.com/office/drawing/2014/main" val="2728050079"/>
+                  </a:ext>
+                </a:extLst>
+              </a:tr>
+              <a:tr h="240229">
+                <a:tc>
+                  <a:txBody>
+                    <a:bodyPr/>
+                    <a:lstStyle/>
+                    <a:p>
+                      <a:pPr algn="ctr"/>
+                      <a:r>
+                        <a:rPr lang="de-DE" dirty="0"/>
+                        <a:t>100</a:t>
+                      </a:r>
+                      <a:endParaRPr lang="en-US" dirty="0"/>
+                    </a:p>
+                  </a:txBody>
+                  <a:tcPr>
+                    <a:solidFill>
+                      <a:schemeClr val="tx1">
+                        <a:alpha val="5000"/>
+                      </a:schemeClr>
+                    </a:solidFill>
+                  </a:tcPr>
+                </a:tc>
+                <a:tc>
+                  <a:txBody>
+                    <a:bodyPr/>
+                    <a:lstStyle/>
+                    <a:p>
+                      <a:pPr algn="ctr"/>
+                      <a:r>
+                        <a:rPr lang="de-DE" dirty="0"/>
+                        <a:t>4950</a:t>
+                      </a:r>
+                      <a:endParaRPr lang="en-US" dirty="0"/>
+                    </a:p>
+                  </a:txBody>
+                  <a:tcPr>
+                    <a:solidFill>
+                      <a:schemeClr val="tx1">
+                        <a:alpha val="5000"/>
+                      </a:schemeClr>
+                    </a:solidFill>
+                  </a:tcPr>
+                </a:tc>
+                <a:extLst>
+                  <a:ext uri="{0D108BD9-81ED-4DB2-BD59-A6C34878D82A}">
+                    <a16:rowId xmlns:a16="http://schemas.microsoft.com/office/drawing/2014/main" val="3090269480"/>
+                  </a:ext>
+                </a:extLst>
+              </a:tr>
+            </a:tbl>
+          </a:graphicData>
+        </a:graphic>
+      </p:graphicFrame>
+      <p:sp>
+        <p:nvSpPr>
+          <p:cNvPr id="10" name="Datumsplatzhalter 9">
+            <a:extLst>
+              <a:ext uri="{FF2B5EF4-FFF2-40B4-BE49-F238E27FC236}">
+                <a16:creationId xmlns:a16="http://schemas.microsoft.com/office/drawing/2014/main" id="{F44B4386-0054-1379-2701-6DB783875612}"/>
+              </a:ext>
+            </a:extLst>
+          </p:cNvPr>
+          <p:cNvSpPr>
+            <a:spLocks noGrp="1"/>
+          </p:cNvSpPr>
+          <p:nvPr>
+            <p:ph type="dt" sz="half" idx="10"/>
+          </p:nvPr>
+        </p:nvSpPr>
+        <p:spPr/>
+        <p:txBody>
+          <a:bodyPr/>
+          <a:lstStyle/>
+          <a:p>
+            <a:fld id="{5FA4DF8F-3F4F-4AA2-9FEF-C29C6C768E8D}" type="datetime1">
+              <a:rPr lang="de-DE" smtClean="0"/>
+              <a:t>10.12.2024</a:t>
+            </a:fld>
+            <a:endParaRPr lang="de-DE"/>
+          </a:p>
+        </p:txBody>
+      </p:sp>
+      <p:sp>
+        <p:nvSpPr>
+          <p:cNvPr id="12" name="Foliennummernplatzhalter 11">
+            <a:extLst>
+              <a:ext uri="{FF2B5EF4-FFF2-40B4-BE49-F238E27FC236}">
+                <a16:creationId xmlns:a16="http://schemas.microsoft.com/office/drawing/2014/main" id="{D209FB7A-A833-0579-CBA4-C02123DC99B8}"/>
+              </a:ext>
+            </a:extLst>
+          </p:cNvPr>
+          <p:cNvSpPr>
+            <a:spLocks noGrp="1"/>
+          </p:cNvSpPr>
+          <p:nvPr>
+            <p:ph type="sldNum" sz="quarter" idx="12"/>
+          </p:nvPr>
+        </p:nvSpPr>
+        <p:spPr/>
+        <p:txBody>
+          <a:bodyPr/>
+          <a:lstStyle/>
+          <a:p>
+            <a:fld id="{2F2A0DB8-2729-3A4D-A362-07849BE8AC54}" type="slidenum">
+              <a:rPr lang="de-DE" smtClean="0"/>
+              <a:t>14</a:t>
+            </a:fld>
+            <a:endParaRPr lang="de-DE"/>
+          </a:p>
+        </p:txBody>
+      </p:sp>
+    </p:spTree>
+    <p:extLst>
+      <p:ext uri="{BB962C8B-B14F-4D97-AF65-F5344CB8AC3E}">
+        <p14:creationId xmlns:p14="http://schemas.microsoft.com/office/powerpoint/2010/main" val="3415498520"/>
+      </p:ext>
+    </p:extLst>
+  </p:cSld>
+  <p:clrMapOvr>
+    <a:masterClrMapping/>
+  </p:clrMapOvr>
+</p:sld>
+</file>
+
 <file path=ppt/slides/slide2.xml><?xml version="1.0" encoding="utf-8"?>
 <p:sld xmlns:a="http://schemas.openxmlformats.org/drawingml/2006/main" xmlns:r="http://schemas.openxmlformats.org/officeDocument/2006/relationships" xmlns:p="http://schemas.openxmlformats.org/presentationml/2006/main">
   <p:cSld>
@@ -3531,6 +6107,64 @@
               <a:rPr lang="de-DE" dirty="0"/>
               <a:t> &lt;= die Summe der Radien gibt es eine Kollision</a:t>
             </a:r>
+          </a:p>
+        </p:txBody>
+      </p:sp>
+      <p:sp>
+        <p:nvSpPr>
+          <p:cNvPr id="4" name="Datumsplatzhalter 3">
+            <a:extLst>
+              <a:ext uri="{FF2B5EF4-FFF2-40B4-BE49-F238E27FC236}">
+                <a16:creationId xmlns:a16="http://schemas.microsoft.com/office/drawing/2014/main" id="{5ADC4ACF-7709-226B-7A43-9444ED39F298}"/>
+              </a:ext>
+            </a:extLst>
+          </p:cNvPr>
+          <p:cNvSpPr>
+            <a:spLocks noGrp="1"/>
+          </p:cNvSpPr>
+          <p:nvPr>
+            <p:ph type="dt" sz="half" idx="10"/>
+          </p:nvPr>
+        </p:nvSpPr>
+        <p:spPr/>
+        <p:txBody>
+          <a:bodyPr/>
+          <a:lstStyle/>
+          <a:p>
+            <a:fld id="{DBDC02CD-66B0-4A7F-A9B0-60DAC400A60B}" type="datetime1">
+              <a:rPr lang="de-DE" smtClean="0"/>
+              <a:t>10.12.2024</a:t>
+            </a:fld>
+            <a:endParaRPr lang="de-DE"/>
+          </a:p>
+        </p:txBody>
+      </p:sp>
+      <p:sp>
+        <p:nvSpPr>
+          <p:cNvPr id="6" name="Foliennummernplatzhalter 5">
+            <a:extLst>
+              <a:ext uri="{FF2B5EF4-FFF2-40B4-BE49-F238E27FC236}">
+                <a16:creationId xmlns:a16="http://schemas.microsoft.com/office/drawing/2014/main" id="{70B03C2B-A76E-8A77-661C-010C7BD53804}"/>
+              </a:ext>
+            </a:extLst>
+          </p:cNvPr>
+          <p:cNvSpPr>
+            <a:spLocks noGrp="1"/>
+          </p:cNvSpPr>
+          <p:nvPr>
+            <p:ph type="sldNum" sz="quarter" idx="12"/>
+          </p:nvPr>
+        </p:nvSpPr>
+        <p:spPr/>
+        <p:txBody>
+          <a:bodyPr/>
+          <a:lstStyle/>
+          <a:p>
+            <a:fld id="{2F2A0DB8-2729-3A4D-A362-07849BE8AC54}" type="slidenum">
+              <a:rPr lang="de-DE" smtClean="0"/>
+              <a:t>2</a:t>
+            </a:fld>
+            <a:endParaRPr lang="de-DE" dirty="0"/>
           </a:p>
         </p:txBody>
       </p:sp>
@@ -3566,6 +6200,694 @@
       </p:grpSpPr>
       <p:sp>
         <p:nvSpPr>
+          <p:cNvPr id="7" name="Flussdiagramm: Verbinder 6">
+            <a:extLst>
+              <a:ext uri="{FF2B5EF4-FFF2-40B4-BE49-F238E27FC236}">
+                <a16:creationId xmlns:a16="http://schemas.microsoft.com/office/drawing/2014/main" id="{25D39E28-8696-2333-B763-AE6DD9C92BAC}"/>
+              </a:ext>
+            </a:extLst>
+          </p:cNvPr>
+          <p:cNvSpPr/>
+          <p:nvPr/>
+        </p:nvSpPr>
+        <p:spPr>
+          <a:xfrm>
+            <a:off x="4126523" y="2444260"/>
+            <a:ext cx="1969477" cy="1969477"/>
+          </a:xfrm>
+          <a:prstGeom prst="flowChartConnector">
+            <a:avLst/>
+          </a:prstGeom>
+          <a:solidFill>
+            <a:schemeClr val="bg1"/>
+          </a:solidFill>
+        </p:spPr>
+        <p:style>
+          <a:lnRef idx="2">
+            <a:schemeClr val="accent1">
+              <a:shade val="15000"/>
+            </a:schemeClr>
+          </a:lnRef>
+          <a:fillRef idx="1">
+            <a:schemeClr val="accent1"/>
+          </a:fillRef>
+          <a:effectRef idx="0">
+            <a:schemeClr val="accent1"/>
+          </a:effectRef>
+          <a:fontRef idx="minor">
+            <a:schemeClr val="lt1"/>
+          </a:fontRef>
+        </p:style>
+        <p:txBody>
+          <a:bodyPr rtlCol="0" anchor="ctr"/>
+          <a:lstStyle/>
+          <a:p>
+            <a:pPr algn="ctr"/>
+            <a:endParaRPr lang="en-US" dirty="0"/>
+          </a:p>
+        </p:txBody>
+      </p:sp>
+      <p:sp>
+        <p:nvSpPr>
+          <p:cNvPr id="8" name="Flussdiagramm: Verbinder 7">
+            <a:extLst>
+              <a:ext uri="{FF2B5EF4-FFF2-40B4-BE49-F238E27FC236}">
+                <a16:creationId xmlns:a16="http://schemas.microsoft.com/office/drawing/2014/main" id="{B34A390F-A684-9C49-A254-C15A519DEDA5}"/>
+              </a:ext>
+            </a:extLst>
+          </p:cNvPr>
+          <p:cNvSpPr/>
+          <p:nvPr/>
+        </p:nvSpPr>
+        <p:spPr>
+          <a:xfrm>
+            <a:off x="6096000" y="2444261"/>
+            <a:ext cx="1969477" cy="1969477"/>
+          </a:xfrm>
+          <a:prstGeom prst="flowChartConnector">
+            <a:avLst/>
+          </a:prstGeom>
+          <a:solidFill>
+            <a:schemeClr val="bg1"/>
+          </a:solidFill>
+        </p:spPr>
+        <p:style>
+          <a:lnRef idx="2">
+            <a:schemeClr val="accent1">
+              <a:shade val="15000"/>
+            </a:schemeClr>
+          </a:lnRef>
+          <a:fillRef idx="1">
+            <a:schemeClr val="accent1"/>
+          </a:fillRef>
+          <a:effectRef idx="0">
+            <a:schemeClr val="accent1"/>
+          </a:effectRef>
+          <a:fontRef idx="minor">
+            <a:schemeClr val="lt1"/>
+          </a:fontRef>
+        </p:style>
+        <p:txBody>
+          <a:bodyPr rtlCol="0" anchor="ctr"/>
+          <a:lstStyle/>
+          <a:p>
+            <a:pPr algn="ctr"/>
+            <a:endParaRPr lang="en-US"/>
+          </a:p>
+        </p:txBody>
+      </p:sp>
+      <p:sp>
+        <p:nvSpPr>
+          <p:cNvPr id="12" name="Flussdiagramm: Verbinder 11">
+            <a:extLst>
+              <a:ext uri="{FF2B5EF4-FFF2-40B4-BE49-F238E27FC236}">
+                <a16:creationId xmlns:a16="http://schemas.microsoft.com/office/drawing/2014/main" id="{F8909894-73FF-E02F-26D2-33209F80DB18}"/>
+              </a:ext>
+            </a:extLst>
+          </p:cNvPr>
+          <p:cNvSpPr/>
+          <p:nvPr/>
+        </p:nvSpPr>
+        <p:spPr>
+          <a:xfrm>
+            <a:off x="5088402" y="3404543"/>
+            <a:ext cx="45719" cy="48909"/>
+          </a:xfrm>
+          <a:prstGeom prst="flowChartConnector">
+            <a:avLst/>
+          </a:prstGeom>
+        </p:spPr>
+        <p:style>
+          <a:lnRef idx="2">
+            <a:schemeClr val="accent1">
+              <a:shade val="15000"/>
+            </a:schemeClr>
+          </a:lnRef>
+          <a:fillRef idx="1">
+            <a:schemeClr val="accent1"/>
+          </a:fillRef>
+          <a:effectRef idx="0">
+            <a:schemeClr val="accent1"/>
+          </a:effectRef>
+          <a:fontRef idx="minor">
+            <a:schemeClr val="lt1"/>
+          </a:fontRef>
+        </p:style>
+        <p:txBody>
+          <a:bodyPr rtlCol="0" anchor="ctr"/>
+          <a:lstStyle/>
+          <a:p>
+            <a:pPr algn="ctr"/>
+            <a:endParaRPr lang="en-US"/>
+          </a:p>
+        </p:txBody>
+      </p:sp>
+      <p:sp>
+        <p:nvSpPr>
+          <p:cNvPr id="13" name="Flussdiagramm: Verbinder 12">
+            <a:extLst>
+              <a:ext uri="{FF2B5EF4-FFF2-40B4-BE49-F238E27FC236}">
+                <a16:creationId xmlns:a16="http://schemas.microsoft.com/office/drawing/2014/main" id="{ED7478A1-305E-58E9-886C-8EA07783981F}"/>
+              </a:ext>
+            </a:extLst>
+          </p:cNvPr>
+          <p:cNvSpPr/>
+          <p:nvPr/>
+        </p:nvSpPr>
+        <p:spPr>
+          <a:xfrm>
+            <a:off x="7057879" y="3404542"/>
+            <a:ext cx="45719" cy="48909"/>
+          </a:xfrm>
+          <a:prstGeom prst="flowChartConnector">
+            <a:avLst/>
+          </a:prstGeom>
+        </p:spPr>
+        <p:style>
+          <a:lnRef idx="2">
+            <a:schemeClr val="accent1">
+              <a:shade val="15000"/>
+            </a:schemeClr>
+          </a:lnRef>
+          <a:fillRef idx="1">
+            <a:schemeClr val="accent1"/>
+          </a:fillRef>
+          <a:effectRef idx="0">
+            <a:schemeClr val="accent1"/>
+          </a:effectRef>
+          <a:fontRef idx="minor">
+            <a:schemeClr val="lt1"/>
+          </a:fontRef>
+        </p:style>
+        <p:txBody>
+          <a:bodyPr rtlCol="0" anchor="ctr"/>
+          <a:lstStyle/>
+          <a:p>
+            <a:pPr algn="ctr"/>
+            <a:endParaRPr lang="en-US"/>
+          </a:p>
+        </p:txBody>
+      </p:sp>
+      <p:cxnSp>
+        <p:nvCxnSpPr>
+          <p:cNvPr id="19" name="Gerade Verbindung mit Pfeil 18">
+            <a:extLst>
+              <a:ext uri="{FF2B5EF4-FFF2-40B4-BE49-F238E27FC236}">
+                <a16:creationId xmlns:a16="http://schemas.microsoft.com/office/drawing/2014/main" id="{52707AE6-D986-7112-534D-E5A4FBA7D319}"/>
+              </a:ext>
+            </a:extLst>
+          </p:cNvPr>
+          <p:cNvCxnSpPr/>
+          <p:nvPr/>
+        </p:nvCxnSpPr>
+        <p:spPr>
+          <a:xfrm flipV="1">
+            <a:off x="5111261" y="2047233"/>
+            <a:ext cx="0" cy="1381763"/>
+          </a:xfrm>
+          <a:prstGeom prst="straightConnector1">
+            <a:avLst/>
+          </a:prstGeom>
+          <a:ln w="12700">
+            <a:solidFill>
+              <a:srgbClr val="FF0000"/>
+            </a:solidFill>
+            <a:tailEnd type="triangle"/>
+          </a:ln>
+        </p:spPr>
+        <p:style>
+          <a:lnRef idx="2">
+            <a:schemeClr val="accent1"/>
+          </a:lnRef>
+          <a:fillRef idx="0">
+            <a:schemeClr val="accent1"/>
+          </a:fillRef>
+          <a:effectRef idx="1">
+            <a:schemeClr val="accent1"/>
+          </a:effectRef>
+          <a:fontRef idx="minor">
+            <a:schemeClr val="tx1"/>
+          </a:fontRef>
+        </p:style>
+      </p:cxnSp>
+      <p:cxnSp>
+        <p:nvCxnSpPr>
+          <p:cNvPr id="20" name="Gerade Verbindung mit Pfeil 19">
+            <a:extLst>
+              <a:ext uri="{FF2B5EF4-FFF2-40B4-BE49-F238E27FC236}">
+                <a16:creationId xmlns:a16="http://schemas.microsoft.com/office/drawing/2014/main" id="{1022FE9A-090D-6297-5E2F-6DC4BAE00AF0}"/>
+              </a:ext>
+            </a:extLst>
+          </p:cNvPr>
+          <p:cNvCxnSpPr/>
+          <p:nvPr/>
+        </p:nvCxnSpPr>
+        <p:spPr>
+          <a:xfrm flipV="1">
+            <a:off x="7080738" y="2047233"/>
+            <a:ext cx="0" cy="1381763"/>
+          </a:xfrm>
+          <a:prstGeom prst="straightConnector1">
+            <a:avLst/>
+          </a:prstGeom>
+          <a:ln w="12700">
+            <a:solidFill>
+              <a:srgbClr val="FF0000"/>
+            </a:solidFill>
+            <a:tailEnd type="triangle"/>
+          </a:ln>
+        </p:spPr>
+        <p:style>
+          <a:lnRef idx="2">
+            <a:schemeClr val="accent1"/>
+          </a:lnRef>
+          <a:fillRef idx="0">
+            <a:schemeClr val="accent1"/>
+          </a:fillRef>
+          <a:effectRef idx="1">
+            <a:schemeClr val="accent1"/>
+          </a:effectRef>
+          <a:fontRef idx="minor">
+            <a:schemeClr val="tx1"/>
+          </a:fontRef>
+        </p:style>
+      </p:cxnSp>
+      <p:cxnSp>
+        <p:nvCxnSpPr>
+          <p:cNvPr id="22" name="Gerade Verbindung mit Pfeil 21">
+            <a:extLst>
+              <a:ext uri="{FF2B5EF4-FFF2-40B4-BE49-F238E27FC236}">
+                <a16:creationId xmlns:a16="http://schemas.microsoft.com/office/drawing/2014/main" id="{5F4143D6-6502-8D7C-39A7-42160827B847}"/>
+              </a:ext>
+            </a:extLst>
+          </p:cNvPr>
+          <p:cNvCxnSpPr/>
+          <p:nvPr/>
+        </p:nvCxnSpPr>
+        <p:spPr>
+          <a:xfrm>
+            <a:off x="5111261" y="2047233"/>
+            <a:ext cx="1969477" cy="0"/>
+          </a:xfrm>
+          <a:prstGeom prst="straightConnector1">
+            <a:avLst/>
+          </a:prstGeom>
+          <a:ln w="12700">
+            <a:solidFill>
+              <a:schemeClr val="tx1"/>
+            </a:solidFill>
+            <a:headEnd type="triangle"/>
+            <a:tailEnd type="triangle"/>
+          </a:ln>
+        </p:spPr>
+        <p:style>
+          <a:lnRef idx="2">
+            <a:schemeClr val="accent1"/>
+          </a:lnRef>
+          <a:fillRef idx="0">
+            <a:schemeClr val="accent1"/>
+          </a:fillRef>
+          <a:effectRef idx="1">
+            <a:schemeClr val="accent1"/>
+          </a:effectRef>
+          <a:fontRef idx="minor">
+            <a:schemeClr val="tx1"/>
+          </a:fontRef>
+        </p:style>
+      </p:cxnSp>
+      <p:cxnSp>
+        <p:nvCxnSpPr>
+          <p:cNvPr id="23" name="Gerade Verbindung mit Pfeil 22">
+            <a:extLst>
+              <a:ext uri="{FF2B5EF4-FFF2-40B4-BE49-F238E27FC236}">
+                <a16:creationId xmlns:a16="http://schemas.microsoft.com/office/drawing/2014/main" id="{9A799939-BB06-F585-F281-96F9763961B4}"/>
+              </a:ext>
+            </a:extLst>
+          </p:cNvPr>
+          <p:cNvCxnSpPr/>
+          <p:nvPr/>
+        </p:nvCxnSpPr>
+        <p:spPr>
+          <a:xfrm>
+            <a:off x="4126522" y="3418829"/>
+            <a:ext cx="1969477" cy="0"/>
+          </a:xfrm>
+          <a:prstGeom prst="straightConnector1">
+            <a:avLst/>
+          </a:prstGeom>
+          <a:ln w="12700">
+            <a:solidFill>
+              <a:schemeClr val="tx1"/>
+            </a:solidFill>
+            <a:headEnd type="triangle"/>
+            <a:tailEnd type="triangle"/>
+          </a:ln>
+        </p:spPr>
+        <p:style>
+          <a:lnRef idx="2">
+            <a:schemeClr val="accent1"/>
+          </a:lnRef>
+          <a:fillRef idx="0">
+            <a:schemeClr val="accent1"/>
+          </a:fillRef>
+          <a:effectRef idx="1">
+            <a:schemeClr val="accent1"/>
+          </a:effectRef>
+          <a:fontRef idx="minor">
+            <a:schemeClr val="tx1"/>
+          </a:fontRef>
+        </p:style>
+      </p:cxnSp>
+      <p:sp>
+        <p:nvSpPr>
+          <p:cNvPr id="24" name="Textfeld 23">
+            <a:extLst>
+              <a:ext uri="{FF2B5EF4-FFF2-40B4-BE49-F238E27FC236}">
+                <a16:creationId xmlns:a16="http://schemas.microsoft.com/office/drawing/2014/main" id="{9343AD62-16FA-F580-6C5C-32DCA0D3E817}"/>
+              </a:ext>
+            </a:extLst>
+          </p:cNvPr>
+          <p:cNvSpPr txBox="1"/>
+          <p:nvPr/>
+        </p:nvSpPr>
+        <p:spPr>
+          <a:xfrm>
+            <a:off x="4557681" y="3404542"/>
+            <a:ext cx="1152880" cy="369332"/>
+          </a:xfrm>
+          <a:prstGeom prst="rect">
+            <a:avLst/>
+          </a:prstGeom>
+          <a:noFill/>
+        </p:spPr>
+        <p:txBody>
+          <a:bodyPr wrap="none" rtlCol="0">
+            <a:spAutoFit/>
+          </a:bodyPr>
+          <a:lstStyle/>
+          <a:p>
+            <a:r>
+              <a:rPr lang="de-DE" dirty="0"/>
+              <a:t>R = 10 cm</a:t>
+            </a:r>
+            <a:endParaRPr lang="en-US" dirty="0"/>
+          </a:p>
+        </p:txBody>
+      </p:sp>
+      <p:sp>
+        <p:nvSpPr>
+          <p:cNvPr id="25" name="Textfeld 24">
+            <a:extLst>
+              <a:ext uri="{FF2B5EF4-FFF2-40B4-BE49-F238E27FC236}">
+                <a16:creationId xmlns:a16="http://schemas.microsoft.com/office/drawing/2014/main" id="{4B79DEDA-7326-1497-1D08-32592BA13B60}"/>
+              </a:ext>
+            </a:extLst>
+          </p:cNvPr>
+          <p:cNvSpPr txBox="1"/>
+          <p:nvPr/>
+        </p:nvSpPr>
+        <p:spPr>
+          <a:xfrm>
+            <a:off x="4241356" y="1236783"/>
+            <a:ext cx="3709285" cy="646331"/>
+          </a:xfrm>
+          <a:prstGeom prst="rect">
+            <a:avLst/>
+          </a:prstGeom>
+          <a:noFill/>
+        </p:spPr>
+        <p:txBody>
+          <a:bodyPr wrap="none" rtlCol="0">
+            <a:spAutoFit/>
+          </a:bodyPr>
+          <a:lstStyle/>
+          <a:p>
+            <a:pPr algn="ctr"/>
+            <a:r>
+              <a:rPr lang="de-DE" dirty="0"/>
+              <a:t>Kollision:</a:t>
+            </a:r>
+            <a:br>
+              <a:rPr lang="de-DE" dirty="0"/>
+            </a:br>
+            <a:r>
+              <a:rPr lang="de-DE" dirty="0"/>
+              <a:t> Distanz zwischen A und B &lt;= 10 cm</a:t>
+            </a:r>
+            <a:endParaRPr lang="en-US" dirty="0"/>
+          </a:p>
+        </p:txBody>
+      </p:sp>
+      <p:sp>
+        <p:nvSpPr>
+          <p:cNvPr id="26" name="Textfeld 25">
+            <a:extLst>
+              <a:ext uri="{FF2B5EF4-FFF2-40B4-BE49-F238E27FC236}">
+                <a16:creationId xmlns:a16="http://schemas.microsoft.com/office/drawing/2014/main" id="{D20C4155-356A-BED1-181E-A97AEB4E8510}"/>
+              </a:ext>
+            </a:extLst>
+          </p:cNvPr>
+          <p:cNvSpPr txBox="1"/>
+          <p:nvPr/>
+        </p:nvSpPr>
+        <p:spPr>
+          <a:xfrm>
+            <a:off x="5145107" y="3059664"/>
+            <a:ext cx="320922" cy="369332"/>
+          </a:xfrm>
+          <a:prstGeom prst="rect">
+            <a:avLst/>
+          </a:prstGeom>
+          <a:noFill/>
+        </p:spPr>
+        <p:txBody>
+          <a:bodyPr wrap="none" rtlCol="0">
+            <a:spAutoFit/>
+          </a:bodyPr>
+          <a:lstStyle/>
+          <a:p>
+            <a:r>
+              <a:rPr lang="de-DE" dirty="0"/>
+              <a:t>A</a:t>
+            </a:r>
+            <a:endParaRPr lang="en-US" dirty="0"/>
+          </a:p>
+        </p:txBody>
+      </p:sp>
+      <p:sp>
+        <p:nvSpPr>
+          <p:cNvPr id="28" name="Textfeld 27">
+            <a:extLst>
+              <a:ext uri="{FF2B5EF4-FFF2-40B4-BE49-F238E27FC236}">
+                <a16:creationId xmlns:a16="http://schemas.microsoft.com/office/drawing/2014/main" id="{339843AE-10B0-57B7-666B-B5C174DDDC18}"/>
+              </a:ext>
+            </a:extLst>
+          </p:cNvPr>
+          <p:cNvSpPr txBox="1"/>
+          <p:nvPr/>
+        </p:nvSpPr>
+        <p:spPr>
+          <a:xfrm>
+            <a:off x="6771664" y="3061008"/>
+            <a:ext cx="324128" cy="369332"/>
+          </a:xfrm>
+          <a:prstGeom prst="rect">
+            <a:avLst/>
+          </a:prstGeom>
+          <a:noFill/>
+        </p:spPr>
+        <p:txBody>
+          <a:bodyPr wrap="none" rtlCol="0">
+            <a:spAutoFit/>
+          </a:bodyPr>
+          <a:lstStyle/>
+          <a:p>
+            <a:r>
+              <a:rPr lang="de-DE" dirty="0"/>
+              <a:t>B</a:t>
+            </a:r>
+            <a:endParaRPr lang="en-US" dirty="0"/>
+          </a:p>
+        </p:txBody>
+      </p:sp>
+      <p:sp>
+        <p:nvSpPr>
+          <p:cNvPr id="29" name="Datumsplatzhalter 28">
+            <a:extLst>
+              <a:ext uri="{FF2B5EF4-FFF2-40B4-BE49-F238E27FC236}">
+                <a16:creationId xmlns:a16="http://schemas.microsoft.com/office/drawing/2014/main" id="{4462F5AA-710A-ACB8-1DAE-5600CC3C0655}"/>
+              </a:ext>
+            </a:extLst>
+          </p:cNvPr>
+          <p:cNvSpPr>
+            <a:spLocks noGrp="1"/>
+          </p:cNvSpPr>
+          <p:nvPr>
+            <p:ph type="dt" sz="half" idx="10"/>
+          </p:nvPr>
+        </p:nvSpPr>
+        <p:spPr/>
+        <p:txBody>
+          <a:bodyPr/>
+          <a:lstStyle/>
+          <a:p>
+            <a:fld id="{2D3D10DD-2A20-4C94-B6F1-82D8CB10BE32}" type="datetime1">
+              <a:rPr lang="de-DE" smtClean="0"/>
+              <a:t>10.12.2024</a:t>
+            </a:fld>
+            <a:endParaRPr lang="de-DE"/>
+          </a:p>
+        </p:txBody>
+      </p:sp>
+      <p:sp>
+        <p:nvSpPr>
+          <p:cNvPr id="31" name="Foliennummernplatzhalter 30">
+            <a:extLst>
+              <a:ext uri="{FF2B5EF4-FFF2-40B4-BE49-F238E27FC236}">
+                <a16:creationId xmlns:a16="http://schemas.microsoft.com/office/drawing/2014/main" id="{665BDFC6-CFBC-E6E3-2F2F-4883070A8713}"/>
+              </a:ext>
+            </a:extLst>
+          </p:cNvPr>
+          <p:cNvSpPr>
+            <a:spLocks noGrp="1"/>
+          </p:cNvSpPr>
+          <p:nvPr>
+            <p:ph type="sldNum" sz="quarter" idx="12"/>
+          </p:nvPr>
+        </p:nvSpPr>
+        <p:spPr/>
+        <p:txBody>
+          <a:bodyPr/>
+          <a:lstStyle/>
+          <a:p>
+            <a:fld id="{2F2A0DB8-2729-3A4D-A362-07849BE8AC54}" type="slidenum">
+              <a:rPr lang="de-DE" smtClean="0"/>
+              <a:t>3</a:t>
+            </a:fld>
+            <a:endParaRPr lang="de-DE"/>
+          </a:p>
+        </p:txBody>
+      </p:sp>
+      <p:sp>
+        <p:nvSpPr>
+          <p:cNvPr id="33" name="Textfeld 32">
+            <a:extLst>
+              <a:ext uri="{FF2B5EF4-FFF2-40B4-BE49-F238E27FC236}">
+                <a16:creationId xmlns:a16="http://schemas.microsoft.com/office/drawing/2014/main" id="{DB18817B-38D7-8C77-2BFA-CD42ADFDEA5E}"/>
+              </a:ext>
+            </a:extLst>
+          </p:cNvPr>
+          <p:cNvSpPr txBox="1"/>
+          <p:nvPr/>
+        </p:nvSpPr>
+        <p:spPr>
+          <a:xfrm>
+            <a:off x="3047998" y="5219832"/>
+            <a:ext cx="6096000" cy="646331"/>
+          </a:xfrm>
+          <a:prstGeom prst="rect">
+            <a:avLst/>
+          </a:prstGeom>
+          <a:noFill/>
+        </p:spPr>
+        <p:txBody>
+          <a:bodyPr wrap="square">
+            <a:spAutoFit/>
+          </a:bodyPr>
+          <a:lstStyle/>
+          <a:p>
+            <a:r>
+              <a:rPr lang="en-US" dirty="0"/>
+              <a:t>… </a:t>
+            </a:r>
+            <a:r>
+              <a:rPr lang="en-US" dirty="0" err="1"/>
+              <a:t>dabei</a:t>
+            </a:r>
+            <a:r>
+              <a:rPr lang="en-US" dirty="0"/>
+              <a:t> </a:t>
+            </a:r>
+            <a:r>
+              <a:rPr lang="en-US" dirty="0" err="1"/>
+              <a:t>wird</a:t>
+            </a:r>
+            <a:r>
+              <a:rPr lang="en-US" dirty="0"/>
+              <a:t> </a:t>
+            </a:r>
+            <a:r>
+              <a:rPr lang="en-US" dirty="0" err="1"/>
+              <a:t>hier</a:t>
+            </a:r>
+            <a:r>
+              <a:rPr lang="en-US" dirty="0"/>
+              <a:t> die </a:t>
+            </a:r>
+            <a:r>
+              <a:rPr lang="en-US" dirty="0" err="1"/>
+              <a:t>Distanz</a:t>
+            </a:r>
+            <a:r>
+              <a:rPr lang="en-US" dirty="0"/>
+              <a:t> </a:t>
+            </a:r>
+            <a:r>
+              <a:rPr lang="en-US" dirty="0" err="1"/>
+              <a:t>mit</a:t>
+            </a:r>
+            <a:r>
+              <a:rPr lang="en-US" dirty="0"/>
+              <a:t> der </a:t>
+            </a:r>
+            <a:r>
+              <a:rPr lang="en-US" dirty="0" err="1"/>
+              <a:t>Euklidischen</a:t>
+            </a:r>
+            <a:r>
+              <a:rPr lang="en-US" dirty="0"/>
+              <a:t> Norm </a:t>
+            </a:r>
+            <a:r>
+              <a:rPr lang="en-US" dirty="0" err="1"/>
+              <a:t>berechnet</a:t>
+            </a:r>
+            <a:endParaRPr lang="en-US" dirty="0"/>
+          </a:p>
+        </p:txBody>
+      </p:sp>
+    </p:spTree>
+    <p:extLst>
+      <p:ext uri="{BB962C8B-B14F-4D97-AF65-F5344CB8AC3E}">
+        <p14:creationId xmlns:p14="http://schemas.microsoft.com/office/powerpoint/2010/main" val="2296648526"/>
+      </p:ext>
+    </p:extLst>
+  </p:cSld>
+  <p:clrMapOvr>
+    <a:masterClrMapping/>
+  </p:clrMapOvr>
+</p:sld>
+</file>
+
+<file path=ppt/slides/slide4.xml><?xml version="1.0" encoding="utf-8"?>
+<p:sld xmlns:a="http://schemas.openxmlformats.org/drawingml/2006/main" xmlns:r="http://schemas.openxmlformats.org/officeDocument/2006/relationships" xmlns:p="http://schemas.openxmlformats.org/presentationml/2006/main">
+  <p:cSld>
+    <p:spTree>
+      <p:nvGrpSpPr>
+        <p:cNvPr id="1" name=""/>
+        <p:cNvGrpSpPr/>
+        <p:nvPr/>
+      </p:nvGrpSpPr>
+      <p:grpSpPr>
+        <a:xfrm>
+          <a:off x="0" y="0"/>
+          <a:ext cx="0" cy="0"/>
+          <a:chOff x="0" y="0"/>
+          <a:chExt cx="0" cy="0"/>
+        </a:xfrm>
+      </p:grpSpPr>
+      <p:sp>
+        <p:nvSpPr>
           <p:cNvPr id="2" name="Titel 1">
             <a:extLst>
               <a:ext uri="{FF2B5EF4-FFF2-40B4-BE49-F238E27FC236}">
@@ -3650,6 +6972,64 @@
           </a:prstGeom>
         </p:spPr>
       </p:pic>
+      <p:sp>
+        <p:nvSpPr>
+          <p:cNvPr id="3" name="Datumsplatzhalter 2">
+            <a:extLst>
+              <a:ext uri="{FF2B5EF4-FFF2-40B4-BE49-F238E27FC236}">
+                <a16:creationId xmlns:a16="http://schemas.microsoft.com/office/drawing/2014/main" id="{77A03A80-6A02-668E-AD95-94A51253C452}"/>
+              </a:ext>
+            </a:extLst>
+          </p:cNvPr>
+          <p:cNvSpPr>
+            <a:spLocks noGrp="1"/>
+          </p:cNvSpPr>
+          <p:nvPr>
+            <p:ph type="dt" sz="half" idx="10"/>
+          </p:nvPr>
+        </p:nvSpPr>
+        <p:spPr/>
+        <p:txBody>
+          <a:bodyPr/>
+          <a:lstStyle/>
+          <a:p>
+            <a:fld id="{FFDF0BBE-802C-4922-9F54-CA93643B59F9}" type="datetime1">
+              <a:rPr lang="de-DE" smtClean="0"/>
+              <a:t>10.12.2024</a:t>
+            </a:fld>
+            <a:endParaRPr lang="de-DE"/>
+          </a:p>
+        </p:txBody>
+      </p:sp>
+      <p:sp>
+        <p:nvSpPr>
+          <p:cNvPr id="5" name="Foliennummernplatzhalter 4">
+            <a:extLst>
+              <a:ext uri="{FF2B5EF4-FFF2-40B4-BE49-F238E27FC236}">
+                <a16:creationId xmlns:a16="http://schemas.microsoft.com/office/drawing/2014/main" id="{06061987-77BB-2685-29F4-76A8846586A7}"/>
+              </a:ext>
+            </a:extLst>
+          </p:cNvPr>
+          <p:cNvSpPr>
+            <a:spLocks noGrp="1"/>
+          </p:cNvSpPr>
+          <p:nvPr>
+            <p:ph type="sldNum" sz="quarter" idx="12"/>
+          </p:nvPr>
+        </p:nvSpPr>
+        <p:spPr/>
+        <p:txBody>
+          <a:bodyPr/>
+          <a:lstStyle/>
+          <a:p>
+            <a:fld id="{2F2A0DB8-2729-3A4D-A362-07849BE8AC54}" type="slidenum">
+              <a:rPr lang="de-DE" smtClean="0"/>
+              <a:t>4</a:t>
+            </a:fld>
+            <a:endParaRPr lang="de-DE"/>
+          </a:p>
+        </p:txBody>
+      </p:sp>
     </p:spTree>
     <p:extLst>
       <p:ext uri="{BB962C8B-B14F-4D97-AF65-F5344CB8AC3E}">
@@ -3663,7 +7043,7 @@
 </p:sld>
 </file>
 
-<file path=ppt/slides/slide4.xml><?xml version="1.0" encoding="utf-8"?>
+<file path=ppt/slides/slide5.xml><?xml version="1.0" encoding="utf-8"?>
 <p:sld xmlns:a="http://schemas.openxmlformats.org/drawingml/2006/main" xmlns:r="http://schemas.openxmlformats.org/officeDocument/2006/relationships" xmlns:p="http://schemas.openxmlformats.org/presentationml/2006/main">
   <p:cSld>
     <p:bg>
@@ -3972,163 +7352,68 @@
           </p:txBody>
         </p:sp>
       </p:grpSp>
+      <p:sp>
+        <p:nvSpPr>
+          <p:cNvPr id="4" name="Datumsplatzhalter 3">
+            <a:extLst>
+              <a:ext uri="{FF2B5EF4-FFF2-40B4-BE49-F238E27FC236}">
+                <a16:creationId xmlns:a16="http://schemas.microsoft.com/office/drawing/2014/main" id="{FC7EE918-FEA7-ED7A-B0E2-FBDC0DCCB5A0}"/>
+              </a:ext>
+            </a:extLst>
+          </p:cNvPr>
+          <p:cNvSpPr>
+            <a:spLocks noGrp="1"/>
+          </p:cNvSpPr>
+          <p:nvPr>
+            <p:ph type="dt" sz="half" idx="10"/>
+          </p:nvPr>
+        </p:nvSpPr>
+        <p:spPr/>
+        <p:txBody>
+          <a:bodyPr/>
+          <a:lstStyle/>
+          <a:p>
+            <a:fld id="{B86F56DF-FCB8-4D15-884B-940867336489}" type="datetime1">
+              <a:rPr lang="de-DE" smtClean="0"/>
+              <a:t>10.12.2024</a:t>
+            </a:fld>
+            <a:endParaRPr lang="de-DE"/>
+          </a:p>
+        </p:txBody>
+      </p:sp>
+      <p:sp>
+        <p:nvSpPr>
+          <p:cNvPr id="7" name="Foliennummernplatzhalter 6">
+            <a:extLst>
+              <a:ext uri="{FF2B5EF4-FFF2-40B4-BE49-F238E27FC236}">
+                <a16:creationId xmlns:a16="http://schemas.microsoft.com/office/drawing/2014/main" id="{1414BB8C-B8E6-2604-5715-1A4C8E8C5476}"/>
+              </a:ext>
+            </a:extLst>
+          </p:cNvPr>
+          <p:cNvSpPr>
+            <a:spLocks noGrp="1"/>
+          </p:cNvSpPr>
+          <p:nvPr>
+            <p:ph type="sldNum" sz="quarter" idx="12"/>
+          </p:nvPr>
+        </p:nvSpPr>
+        <p:spPr/>
+        <p:txBody>
+          <a:bodyPr/>
+          <a:lstStyle/>
+          <a:p>
+            <a:fld id="{2F2A0DB8-2729-3A4D-A362-07849BE8AC54}" type="slidenum">
+              <a:rPr lang="de-DE" smtClean="0"/>
+              <a:t>5</a:t>
+            </a:fld>
+            <a:endParaRPr lang="de-DE"/>
+          </a:p>
+        </p:txBody>
+      </p:sp>
     </p:spTree>
     <p:extLst>
       <p:ext uri="{BB962C8B-B14F-4D97-AF65-F5344CB8AC3E}">
         <p14:creationId xmlns:p14="http://schemas.microsoft.com/office/powerpoint/2010/main" val="3682691996"/>
-      </p:ext>
-    </p:extLst>
-  </p:cSld>
-  <p:clrMapOvr>
-    <a:masterClrMapping/>
-  </p:clrMapOvr>
-</p:sld>
-</file>
-
-<file path=ppt/slides/slide5.xml><?xml version="1.0" encoding="utf-8"?>
-<p:sld xmlns:a="http://schemas.openxmlformats.org/drawingml/2006/main" xmlns:r="http://schemas.openxmlformats.org/officeDocument/2006/relationships" xmlns:p="http://schemas.openxmlformats.org/presentationml/2006/main">
-  <p:cSld>
-    <p:spTree>
-      <p:nvGrpSpPr>
-        <p:cNvPr id="1" name=""/>
-        <p:cNvGrpSpPr/>
-        <p:nvPr/>
-      </p:nvGrpSpPr>
-      <p:grpSpPr>
-        <a:xfrm>
-          <a:off x="0" y="0"/>
-          <a:ext cx="0" cy="0"/>
-          <a:chOff x="0" y="0"/>
-          <a:chExt cx="0" cy="0"/>
-        </a:xfrm>
-      </p:grpSpPr>
-      <p:sp>
-        <p:nvSpPr>
-          <p:cNvPr id="2" name="Titel 1">
-            <a:extLst>
-              <a:ext uri="{FF2B5EF4-FFF2-40B4-BE49-F238E27FC236}">
-                <a16:creationId xmlns:a16="http://schemas.microsoft.com/office/drawing/2014/main" id="{1FA392BF-8B33-5DD4-5B04-59A257277373}"/>
-              </a:ext>
-            </a:extLst>
-          </p:cNvPr>
-          <p:cNvSpPr>
-            <a:spLocks noGrp="1"/>
-          </p:cNvSpPr>
-          <p:nvPr>
-            <p:ph type="title"/>
-          </p:nvPr>
-        </p:nvSpPr>
-        <p:spPr/>
-        <p:txBody>
-          <a:bodyPr/>
-          <a:lstStyle/>
-          <a:p>
-            <a:r>
-              <a:rPr lang="de-DE" dirty="0"/>
-              <a:t>Probleme bei Kollisionsdetektion</a:t>
-            </a:r>
-          </a:p>
-        </p:txBody>
-      </p:sp>
-      <p:sp>
-        <p:nvSpPr>
-          <p:cNvPr id="3" name="Inhaltsplatzhalter 2">
-            <a:extLst>
-              <a:ext uri="{FF2B5EF4-FFF2-40B4-BE49-F238E27FC236}">
-                <a16:creationId xmlns:a16="http://schemas.microsoft.com/office/drawing/2014/main" id="{D4A8ABC2-8CF8-1451-93E1-345F358D810B}"/>
-              </a:ext>
-            </a:extLst>
-          </p:cNvPr>
-          <p:cNvSpPr>
-            <a:spLocks noGrp="1"/>
-          </p:cNvSpPr>
-          <p:nvPr>
-            <p:ph idx="1"/>
-          </p:nvPr>
-        </p:nvSpPr>
-        <p:spPr/>
-        <p:txBody>
-          <a:bodyPr/>
-          <a:lstStyle/>
-          <a:p>
-            <a:r>
-              <a:rPr lang="de-DE" dirty="0"/>
-              <a:t>Tunneling</a:t>
-            </a:r>
-          </a:p>
-          <a:p>
-            <a:pPr lvl="1"/>
-            <a:r>
-              <a:rPr lang="de-DE" dirty="0"/>
-              <a:t>Ein Objekt bewegt sich so schnell, dass es beim nächsten Frame über die Grenze hinausschießt ohne das eine Kollision erkannt wird.</a:t>
-            </a:r>
-          </a:p>
-        </p:txBody>
-      </p:sp>
-      <p:pic>
-        <p:nvPicPr>
-          <p:cNvPr id="5" name="Grafik 4" descr="Ein Bild, das Screenshot enthält.&#10;&#10;Automatisch generierte Beschreibung">
-            <a:extLst>
-              <a:ext uri="{FF2B5EF4-FFF2-40B4-BE49-F238E27FC236}">
-                <a16:creationId xmlns:a16="http://schemas.microsoft.com/office/drawing/2014/main" id="{65380651-F298-4633-8407-CAFA91448012}"/>
-              </a:ext>
-            </a:extLst>
-          </p:cNvPr>
-          <p:cNvPicPr>
-            <a:picLocks noChangeAspect="1"/>
-          </p:cNvPicPr>
-          <p:nvPr/>
-        </p:nvPicPr>
-        <p:blipFill>
-          <a:blip r:embed="rId2"/>
-          <a:stretch>
-            <a:fillRect/>
-          </a:stretch>
-        </p:blipFill>
-        <p:spPr>
-          <a:xfrm>
-            <a:off x="838199" y="3429000"/>
-            <a:ext cx="4830289" cy="2882900"/>
-          </a:xfrm>
-          <a:prstGeom prst="rect">
-            <a:avLst/>
-          </a:prstGeom>
-        </p:spPr>
-      </p:pic>
-      <p:pic>
-        <p:nvPicPr>
-          <p:cNvPr id="7" name="Grafik 6" descr="Ein Bild, das Screenshot enthält.&#10;&#10;Automatisch generierte Beschreibung">
-            <a:extLst>
-              <a:ext uri="{FF2B5EF4-FFF2-40B4-BE49-F238E27FC236}">
-                <a16:creationId xmlns:a16="http://schemas.microsoft.com/office/drawing/2014/main" id="{0AB7111A-B9EB-BE7D-967A-B88375A296A8}"/>
-              </a:ext>
-            </a:extLst>
-          </p:cNvPr>
-          <p:cNvPicPr>
-            <a:picLocks noChangeAspect="1"/>
-          </p:cNvPicPr>
-          <p:nvPr/>
-        </p:nvPicPr>
-        <p:blipFill>
-          <a:blip r:embed="rId3"/>
-          <a:stretch>
-            <a:fillRect/>
-          </a:stretch>
-        </p:blipFill>
-        <p:spPr>
-          <a:xfrm>
-            <a:off x="6523514" y="3429000"/>
-            <a:ext cx="4830289" cy="2882900"/>
-          </a:xfrm>
-          <a:prstGeom prst="rect">
-            <a:avLst/>
-          </a:prstGeom>
-        </p:spPr>
-      </p:pic>
-    </p:spTree>
-    <p:extLst>
-      <p:ext uri="{BB962C8B-B14F-4D97-AF65-F5344CB8AC3E}">
-        <p14:creationId xmlns:p14="http://schemas.microsoft.com/office/powerpoint/2010/main" val="1606194002"/>
       </p:ext>
     </p:extLst>
   </p:cSld>
@@ -4160,7 +7445,7 @@
           <p:cNvPr id="2" name="Titel 1">
             <a:extLst>
               <a:ext uri="{FF2B5EF4-FFF2-40B4-BE49-F238E27FC236}">
-                <a16:creationId xmlns:a16="http://schemas.microsoft.com/office/drawing/2014/main" id="{CFB01F99-2DD5-29A1-DF48-1FB7B8111427}"/>
+                <a16:creationId xmlns:a16="http://schemas.microsoft.com/office/drawing/2014/main" id="{7FEBA610-FC4A-6141-80BD-E615D8E76051}"/>
               </a:ext>
             </a:extLst>
           </p:cNvPr>
@@ -4178,13 +7463,16 @@
           <a:p>
             <a:r>
               <a:rPr lang="de-DE" dirty="0"/>
-              <a:t>Probleme bei </a:t>
+              <a:t>Line </a:t>
             </a:r>
             <a:r>
               <a:rPr lang="de-DE" dirty="0" err="1"/>
-              <a:t>Kollisiondetektion</a:t>
-            </a:r>
-            <a:endParaRPr lang="de-DE" dirty="0"/>
+              <a:t>of</a:t>
+            </a:r>
+            <a:r>
+              <a:rPr lang="de-DE" dirty="0"/>
+              <a:t> Action / Wirkungslinie</a:t>
+            </a:r>
           </a:p>
         </p:txBody>
       </p:sp>
@@ -4193,7 +7481,7 @@
           <p:cNvPr id="3" name="Inhaltsplatzhalter 2">
             <a:extLst>
               <a:ext uri="{FF2B5EF4-FFF2-40B4-BE49-F238E27FC236}">
-                <a16:creationId xmlns:a16="http://schemas.microsoft.com/office/drawing/2014/main" id="{4FA6169A-3945-B86E-8BD7-BD64DB940806}"/>
+                <a16:creationId xmlns:a16="http://schemas.microsoft.com/office/drawing/2014/main" id="{75A751AF-CECB-9E5D-A33F-692A2ADC6D20}"/>
               </a:ext>
             </a:extLst>
           </p:cNvPr>
@@ -4206,47 +7494,92 @@
         </p:nvSpPr>
         <p:spPr/>
         <p:txBody>
+          <a:bodyPr>
+            <a:normAutofit fontScale="92500" lnSpcReduction="10000"/>
+          </a:bodyPr>
+          <a:lstStyle/>
+          <a:p>
+            <a:r>
+              <a:rPr lang="de-DE" dirty="0"/>
+              <a:t>Die Wirkungslinie hilft dabei, die Richtung und Stärke der Kräfte zu bestimmen, die bei einer Kollision zwischen Objekten wirken, und ist somit ein zentraler Bestandteil der Kollisionserkennung und -antwort.</a:t>
+            </a:r>
+          </a:p>
+          <a:p>
+            <a:r>
+              <a:rPr lang="de-DE" dirty="0"/>
+              <a:t>Bei der Kollisionserkennung und -antwort ist die Wirkungslinie entscheidend, um die Richtung und den Punkt der Krafteinwirkung zu bestimmen. Dies hilft dabei, die Reaktion der Objekte auf die Kollision zu berechnen, wie z.B. die Änderung ihrer Geschwindigkeiten und Bewegungsrichtungen</a:t>
+            </a:r>
+          </a:p>
+          <a:p>
+            <a:r>
+              <a:rPr lang="de-DE" dirty="0"/>
+              <a:t> Wenn zwei Objekte kollidieren, wird die relative Geschwindigkeit entlang der Wirkungslinie berechnet, um zu bestimmen, wie stark die Objekte aufeinander einwirken. Dies ist wichtig, um realistische physikalische Reaktionen zu simulieren</a:t>
+            </a:r>
+          </a:p>
+        </p:txBody>
+      </p:sp>
+      <p:sp>
+        <p:nvSpPr>
+          <p:cNvPr id="4" name="Datumsplatzhalter 3">
+            <a:extLst>
+              <a:ext uri="{FF2B5EF4-FFF2-40B4-BE49-F238E27FC236}">
+                <a16:creationId xmlns:a16="http://schemas.microsoft.com/office/drawing/2014/main" id="{24220761-BD2D-6ED6-DE7F-40F3CC263751}"/>
+              </a:ext>
+            </a:extLst>
+          </p:cNvPr>
+          <p:cNvSpPr>
+            <a:spLocks noGrp="1"/>
+          </p:cNvSpPr>
+          <p:nvPr>
+            <p:ph type="dt" sz="half" idx="10"/>
+          </p:nvPr>
+        </p:nvSpPr>
+        <p:spPr/>
+        <p:txBody>
           <a:bodyPr/>
           <a:lstStyle/>
           <a:p>
-            <a:r>
-              <a:rPr lang="de-DE" dirty="0"/>
-              <a:t>Performance</a:t>
-            </a:r>
-          </a:p>
-          <a:p>
-            <a:r>
-              <a:rPr lang="de-DE" dirty="0"/>
-              <a:t>Komplexe Formen (</a:t>
-            </a:r>
-            <a:r>
-              <a:rPr lang="de-DE" dirty="0" err="1"/>
-              <a:t>Bounding</a:t>
-            </a:r>
-            <a:r>
-              <a:rPr lang="de-DE" dirty="0"/>
-              <a:t> Boxes müssen </a:t>
-            </a:r>
-            <a:r>
-              <a:rPr lang="de-DE" dirty="0" err="1"/>
-              <a:t>evtl</a:t>
-            </a:r>
-            <a:r>
-              <a:rPr lang="de-DE" dirty="0"/>
-              <a:t> angewendet werden was ein Verlust der Genauigkeit </a:t>
-            </a:r>
-            <a:r>
-              <a:rPr lang="de-DE"/>
-              <a:t>hervorbringen könnte)</a:t>
-            </a:r>
-            <a:endParaRPr lang="de-DE" dirty="0"/>
+            <a:fld id="{746B4C57-E489-4B0D-855B-6CF28BDB2031}" type="datetime1">
+              <a:rPr lang="de-DE" smtClean="0"/>
+              <a:t>10.12.2024</a:t>
+            </a:fld>
+            <a:endParaRPr lang="de-DE"/>
+          </a:p>
+        </p:txBody>
+      </p:sp>
+      <p:sp>
+        <p:nvSpPr>
+          <p:cNvPr id="6" name="Foliennummernplatzhalter 5">
+            <a:extLst>
+              <a:ext uri="{FF2B5EF4-FFF2-40B4-BE49-F238E27FC236}">
+                <a16:creationId xmlns:a16="http://schemas.microsoft.com/office/drawing/2014/main" id="{8AFA5452-D9D6-6D9A-FCA0-74C31F1C2E31}"/>
+              </a:ext>
+            </a:extLst>
+          </p:cNvPr>
+          <p:cNvSpPr>
+            <a:spLocks noGrp="1"/>
+          </p:cNvSpPr>
+          <p:nvPr>
+            <p:ph type="sldNum" sz="quarter" idx="12"/>
+          </p:nvPr>
+        </p:nvSpPr>
+        <p:spPr/>
+        <p:txBody>
+          <a:bodyPr/>
+          <a:lstStyle/>
+          <a:p>
+            <a:fld id="{2F2A0DB8-2729-3A4D-A362-07849BE8AC54}" type="slidenum">
+              <a:rPr lang="de-DE" smtClean="0"/>
+              <a:t>6</a:t>
+            </a:fld>
+            <a:endParaRPr lang="de-DE"/>
           </a:p>
         </p:txBody>
       </p:sp>
     </p:spTree>
     <p:extLst>
       <p:ext uri="{BB962C8B-B14F-4D97-AF65-F5344CB8AC3E}">
-        <p14:creationId xmlns:p14="http://schemas.microsoft.com/office/powerpoint/2010/main" val="1253975808"/>
+        <p14:creationId xmlns:p14="http://schemas.microsoft.com/office/powerpoint/2010/main" val="3941568303"/>
       </p:ext>
     </p:extLst>
   </p:cSld>
@@ -4278,7 +7611,7 @@
           <p:cNvPr id="2" name="Titel 1">
             <a:extLst>
               <a:ext uri="{FF2B5EF4-FFF2-40B4-BE49-F238E27FC236}">
-                <a16:creationId xmlns:a16="http://schemas.microsoft.com/office/drawing/2014/main" id="{7FEBA610-FC4A-6141-80BD-E615D8E76051}"/>
+                <a16:creationId xmlns:a16="http://schemas.microsoft.com/office/drawing/2014/main" id="{F701B04D-941E-AD53-A261-66400E3F2419}"/>
               </a:ext>
             </a:extLst>
           </p:cNvPr>
@@ -4296,71 +7629,253 @@
           <a:p>
             <a:r>
               <a:rPr lang="de-DE" dirty="0"/>
-              <a:t>Line </a:t>
-            </a:r>
-            <a:r>
-              <a:rPr lang="de-DE" dirty="0" err="1"/>
-              <a:t>of</a:t>
-            </a:r>
-            <a:r>
-              <a:rPr lang="de-DE" dirty="0"/>
-              <a:t> Action / Wirkungslinie</a:t>
-            </a:r>
-          </a:p>
-        </p:txBody>
-      </p:sp>
-      <p:sp>
-        <p:nvSpPr>
-          <p:cNvPr id="3" name="Inhaltsplatzhalter 2">
-            <a:extLst>
-              <a:ext uri="{FF2B5EF4-FFF2-40B4-BE49-F238E27FC236}">
-                <a16:creationId xmlns:a16="http://schemas.microsoft.com/office/drawing/2014/main" id="{75A751AF-CECB-9E5D-A33F-692A2ADC6D20}"/>
-              </a:ext>
-            </a:extLst>
-          </p:cNvPr>
-          <p:cNvSpPr>
-            <a:spLocks noGrp="1"/>
-          </p:cNvSpPr>
-          <p:nvPr>
-            <p:ph idx="1"/>
+              <a:t>Zentraler elastischer Stoß</a:t>
+            </a:r>
+            <a:endParaRPr lang="en-US" dirty="0"/>
+          </a:p>
+        </p:txBody>
+      </p:sp>
+      <p:sp>
+        <p:nvSpPr>
+          <p:cNvPr id="4" name="Datumsplatzhalter 3">
+            <a:extLst>
+              <a:ext uri="{FF2B5EF4-FFF2-40B4-BE49-F238E27FC236}">
+                <a16:creationId xmlns:a16="http://schemas.microsoft.com/office/drawing/2014/main" id="{0A14344A-6AED-53C0-3636-BE6515820EAC}"/>
+              </a:ext>
+            </a:extLst>
+          </p:cNvPr>
+          <p:cNvSpPr>
+            <a:spLocks noGrp="1"/>
+          </p:cNvSpPr>
+          <p:nvPr>
+            <p:ph type="dt" sz="half" idx="10"/>
           </p:nvPr>
         </p:nvSpPr>
         <p:spPr/>
         <p:txBody>
-          <a:bodyPr>
-            <a:normAutofit fontScale="92500" lnSpcReduction="10000"/>
-          </a:bodyPr>
-          <a:lstStyle/>
-          <a:p>
-            <a:r>
-              <a:rPr lang="de-DE" dirty="0"/>
-              <a:t>Die Wirkungslinie hilft dabei, die Richtung und Stärke der Kräfte zu bestimmen, die bei einer Kollision zwischen Objekten wirken, und ist somit ein zentraler Bestandteil der Kollisionserkennung und -antwort.</a:t>
-            </a:r>
-          </a:p>
-          <a:p>
-            <a:r>
-              <a:rPr lang="de-DE" dirty="0"/>
-              <a:t>Bei der Kollisionserkennung und -antwort ist die Wirkungslinie entscheidend, um die Richtung und den Punkt der Krafteinwirkung zu bestimmen. Dies hilft dabei, die Reaktion der Objekte auf die Kollision zu berechnen, wie z.B. die Änderung ihrer Geschwindigkeiten und Bewegungsrichtungen</a:t>
-            </a:r>
-          </a:p>
-          <a:p>
-            <a:r>
-              <a:rPr lang="de-DE" dirty="0"/>
-              <a:t> Wenn zwei Objekte kollidieren, wird die relative Geschwindigkeit entlang der Wirkungslinie berechnet, um zu bestimmen, wie stark die Objekte aufeinander einwirken. Dies ist wichtig, um realistische physikalische Reaktionen zu simulieren</a:t>
-            </a:r>
-          </a:p>
-        </p:txBody>
-      </p:sp>
+          <a:bodyPr/>
+          <a:lstStyle/>
+          <a:p>
+            <a:fld id="{F93171F1-3AC1-4821-9122-C904B048FE43}" type="datetime1">
+              <a:rPr lang="de-DE" smtClean="0"/>
+              <a:t>10.12.2024</a:t>
+            </a:fld>
+            <a:endParaRPr lang="de-DE"/>
+          </a:p>
+        </p:txBody>
+      </p:sp>
+      <p:sp>
+        <p:nvSpPr>
+          <p:cNvPr id="5" name="Foliennummernplatzhalter 4">
+            <a:extLst>
+              <a:ext uri="{FF2B5EF4-FFF2-40B4-BE49-F238E27FC236}">
+                <a16:creationId xmlns:a16="http://schemas.microsoft.com/office/drawing/2014/main" id="{39DB91BC-0117-B256-0150-4D380CF1239F}"/>
+              </a:ext>
+            </a:extLst>
+          </p:cNvPr>
+          <p:cNvSpPr>
+            <a:spLocks noGrp="1"/>
+          </p:cNvSpPr>
+          <p:nvPr>
+            <p:ph type="sldNum" sz="quarter" idx="12"/>
+          </p:nvPr>
+        </p:nvSpPr>
+        <p:spPr/>
+        <p:txBody>
+          <a:bodyPr/>
+          <a:lstStyle/>
+          <a:p>
+            <a:fld id="{2F2A0DB8-2729-3A4D-A362-07849BE8AC54}" type="slidenum">
+              <a:rPr lang="de-DE" smtClean="0"/>
+              <a:t>7</a:t>
+            </a:fld>
+            <a:endParaRPr lang="de-DE"/>
+          </a:p>
+        </p:txBody>
+      </p:sp>
+      <p:pic>
+        <p:nvPicPr>
+          <p:cNvPr id="7" name="El_Kollision">
+            <a:hlinkClick r:id="" action="ppaction://media"/>
+            <a:extLst>
+              <a:ext uri="{FF2B5EF4-FFF2-40B4-BE49-F238E27FC236}">
+                <a16:creationId xmlns:a16="http://schemas.microsoft.com/office/drawing/2014/main" id="{87AE5B9E-2817-CE11-2887-C2DEB7EB6A2F}"/>
+              </a:ext>
+            </a:extLst>
+          </p:cNvPr>
+          <p:cNvPicPr>
+            <a:picLocks noChangeAspect="1"/>
+          </p:cNvPicPr>
+          <p:nvPr>
+            <a:videoFile r:link="rId2"/>
+            <p:extLst>
+              <p:ext uri="{DAA4B4D4-6D71-4841-9C94-3DE7FCFB9230}">
+                <p14:media xmlns:p14="http://schemas.microsoft.com/office/powerpoint/2010/main" r:embed="rId1"/>
+              </p:ext>
+            </p:extLst>
+          </p:nvPr>
+        </p:nvPicPr>
+        <p:blipFill>
+          <a:blip r:embed="rId4"/>
+          <a:stretch>
+            <a:fillRect/>
+          </a:stretch>
+        </p:blipFill>
+        <p:spPr>
+          <a:xfrm>
+            <a:off x="2362200" y="1690688"/>
+            <a:ext cx="7467600" cy="4200525"/>
+          </a:xfrm>
+          <a:prstGeom prst="rect">
+            <a:avLst/>
+          </a:prstGeom>
+        </p:spPr>
+      </p:pic>
     </p:spTree>
     <p:extLst>
       <p:ext uri="{BB962C8B-B14F-4D97-AF65-F5344CB8AC3E}">
-        <p14:creationId xmlns:p14="http://schemas.microsoft.com/office/powerpoint/2010/main" val="3941568303"/>
+        <p14:creationId xmlns:p14="http://schemas.microsoft.com/office/powerpoint/2010/main" val="3803359830"/>
       </p:ext>
     </p:extLst>
   </p:cSld>
   <p:clrMapOvr>
     <a:masterClrMapping/>
   </p:clrMapOvr>
+  <p:timing>
+    <p:tnLst>
+      <p:par>
+        <p:cTn id="1" dur="indefinite" restart="never" nodeType="tmRoot">
+          <p:childTnLst>
+            <p:seq concurrent="1" nextAc="seek">
+              <p:cTn id="2" dur="indefinite" nodeType="mainSeq">
+                <p:childTnLst>
+                  <p:par>
+                    <p:cTn id="3" fill="hold">
+                      <p:stCondLst>
+                        <p:cond delay="indefinite"/>
+                      </p:stCondLst>
+                      <p:childTnLst>
+                        <p:par>
+                          <p:cTn id="4" fill="hold">
+                            <p:stCondLst>
+                              <p:cond delay="0"/>
+                            </p:stCondLst>
+                            <p:childTnLst>
+                              <p:par>
+                                <p:cTn id="5" presetID="1" presetClass="mediacall" presetSubtype="0" fill="hold" nodeType="clickEffect">
+                                  <p:stCondLst>
+                                    <p:cond delay="0"/>
+                                  </p:stCondLst>
+                                  <p:childTnLst>
+                                    <p:cmd type="call" cmd="playFrom(0.0)">
+                                      <p:cBhvr>
+                                        <p:cTn id="6" dur="6433" fill="hold"/>
+                                        <p:tgtEl>
+                                          <p:spTgt spid="7"/>
+                                        </p:tgtEl>
+                                      </p:cBhvr>
+                                    </p:cmd>
+                                  </p:childTnLst>
+                                </p:cTn>
+                              </p:par>
+                            </p:childTnLst>
+                          </p:cTn>
+                        </p:par>
+                      </p:childTnLst>
+                    </p:cTn>
+                  </p:par>
+                </p:childTnLst>
+              </p:cTn>
+              <p:prevCondLst>
+                <p:cond evt="onPrev" delay="0">
+                  <p:tgtEl>
+                    <p:sldTgt/>
+                  </p:tgtEl>
+                </p:cond>
+              </p:prevCondLst>
+              <p:nextCondLst>
+                <p:cond evt="onNext" delay="0">
+                  <p:tgtEl>
+                    <p:sldTgt/>
+                  </p:tgtEl>
+                </p:cond>
+              </p:nextCondLst>
+            </p:seq>
+            <p:video>
+              <p:cMediaNode vol="0">
+                <p:cTn id="7" fill="hold" display="0">
+                  <p:stCondLst>
+                    <p:cond delay="indefinite"/>
+                  </p:stCondLst>
+                </p:cTn>
+                <p:tgtEl>
+                  <p:spTgt spid="7"/>
+                </p:tgtEl>
+              </p:cMediaNode>
+            </p:video>
+            <p:seq concurrent="1" nextAc="seek">
+              <p:cTn id="8" restart="whenNotActive" fill="hold" evtFilter="cancelBubble" nodeType="interactiveSeq">
+                <p:stCondLst>
+                  <p:cond evt="onClick" delay="0">
+                    <p:tgtEl>
+                      <p:spTgt spid="7"/>
+                    </p:tgtEl>
+                  </p:cond>
+                </p:stCondLst>
+                <p:endSync evt="end" delay="0">
+                  <p:rtn val="all"/>
+                </p:endSync>
+                <p:childTnLst>
+                  <p:par>
+                    <p:cTn id="9" fill="hold">
+                      <p:stCondLst>
+                        <p:cond delay="0"/>
+                      </p:stCondLst>
+                      <p:childTnLst>
+                        <p:par>
+                          <p:cTn id="10" fill="hold">
+                            <p:stCondLst>
+                              <p:cond delay="0"/>
+                            </p:stCondLst>
+                            <p:childTnLst>
+                              <p:par>
+                                <p:cTn id="11" presetID="2" presetClass="mediacall" presetSubtype="0" fill="hold" nodeType="clickEffect">
+                                  <p:stCondLst>
+                                    <p:cond delay="0"/>
+                                  </p:stCondLst>
+                                  <p:childTnLst>
+                                    <p:cmd type="call" cmd="togglePause">
+                                      <p:cBhvr>
+                                        <p:cTn id="12" dur="1" fill="hold"/>
+                                        <p:tgtEl>
+                                          <p:spTgt spid="7"/>
+                                        </p:tgtEl>
+                                      </p:cBhvr>
+                                    </p:cmd>
+                                  </p:childTnLst>
+                                </p:cTn>
+                              </p:par>
+                            </p:childTnLst>
+                          </p:cTn>
+                        </p:par>
+                      </p:childTnLst>
+                    </p:cTn>
+                  </p:par>
+                </p:childTnLst>
+              </p:cTn>
+              <p:nextCondLst>
+                <p:cond evt="onClick" delay="0">
+                  <p:tgtEl>
+                    <p:spTgt spid="7"/>
+                  </p:tgtEl>
+                </p:cond>
+              </p:nextCondLst>
+            </p:seq>
+          </p:childTnLst>
+        </p:cTn>
+      </p:par>
+    </p:tnLst>
+  </p:timing>
 </p:sld>
 </file>
 
@@ -4386,7 +7901,7 @@
           <p:cNvPr id="2" name="Titel 1">
             <a:extLst>
               <a:ext uri="{FF2B5EF4-FFF2-40B4-BE49-F238E27FC236}">
-                <a16:creationId xmlns:a16="http://schemas.microsoft.com/office/drawing/2014/main" id="{5125205F-0E93-A22A-FA1E-63BE0FBEF5FF}"/>
+                <a16:creationId xmlns:a16="http://schemas.microsoft.com/office/drawing/2014/main" id="{EAAE1D2C-878D-FDD5-F736-C2CF3B693229}"/>
               </a:ext>
             </a:extLst>
           </p:cNvPr>
@@ -4404,25 +7919,199 @@
           <a:p>
             <a:r>
               <a:rPr lang="de-DE" dirty="0"/>
-              <a:t>Skalierung bei mehreren Objekten</a:t>
-            </a:r>
-          </a:p>
-        </p:txBody>
-      </p:sp>
-      <p:sp>
-        <p:nvSpPr>
-          <p:cNvPr id="3" name="Inhaltsplatzhalter 2">
-            <a:extLst>
-              <a:ext uri="{FF2B5EF4-FFF2-40B4-BE49-F238E27FC236}">
-                <a16:creationId xmlns:a16="http://schemas.microsoft.com/office/drawing/2014/main" id="{4D249EB6-97E1-A5FC-8F7C-6B5BEBDB31CB}"/>
-              </a:ext>
-            </a:extLst>
-          </p:cNvPr>
-          <p:cNvSpPr>
-            <a:spLocks noGrp="1"/>
-          </p:cNvSpPr>
-          <p:nvPr>
-            <p:ph idx="1"/>
+              <a:t>Zentraler elastischer Stoß</a:t>
+            </a:r>
+          </a:p>
+        </p:txBody>
+      </p:sp>
+      <mc:AlternateContent xmlns:mc="http://schemas.openxmlformats.org/markup-compatibility/2006">
+        <mc:Choice xmlns:a14="http://schemas.microsoft.com/office/drawing/2010/main" Requires="a14">
+          <p:sp>
+            <p:nvSpPr>
+              <p:cNvPr id="3" name="Inhaltsplatzhalter 2">
+                <a:extLst>
+                  <a:ext uri="{FF2B5EF4-FFF2-40B4-BE49-F238E27FC236}">
+                    <a16:creationId xmlns:a16="http://schemas.microsoft.com/office/drawing/2014/main" id="{CE4BD4AF-A1C9-F942-F99D-ACCA40122FBA}"/>
+                  </a:ext>
+                </a:extLst>
+              </p:cNvPr>
+              <p:cNvSpPr>
+                <a:spLocks noGrp="1"/>
+              </p:cNvSpPr>
+              <p:nvPr>
+                <p:ph idx="1"/>
+              </p:nvPr>
+            </p:nvSpPr>
+            <p:spPr>
+              <a:noFill/>
+            </p:spPr>
+            <p:txBody>
+              <a:bodyPr>
+                <a:normAutofit/>
+              </a:bodyPr>
+              <a:lstStyle/>
+              <a:p>
+                <a:r>
+                  <a:rPr lang="de-DE" dirty="0"/>
+                  <a:t>Einen Stoß kann man als elastisch bezeichnen, falls sich die Energie der Objekte nach dem Stoß erhalten bleibt</a:t>
+                </a:r>
+              </a:p>
+              <a:p>
+                <a:r>
+                  <a:rPr lang="de-DE" dirty="0"/>
+                  <a:t>Um den elastischen Stoß virtuell darstellen zu Können werden folgende Komponenten benötigt:</a:t>
+                </a:r>
+              </a:p>
+              <a:p>
+                <a:pPr marL="514350" indent="-514350">
+                  <a:buFont typeface="+mj-lt"/>
+                  <a:buAutoNum type="arabicPeriod"/>
+                </a:pPr>
+                <a:r>
+                  <a:rPr lang="de-DE" dirty="0"/>
+                  <a:t>Impulserhaltungssatz &amp; </a:t>
+                </a:r>
+                <a:r>
+                  <a:rPr lang="en-US" dirty="0" err="1">
+                    <a:solidFill>
+                      <a:schemeClr val="tx1"/>
+                    </a:solidFill>
+                  </a:rPr>
+                  <a:t>Energieerhaltungssatz</a:t>
+                </a:r>
+                <a:endParaRPr lang="de-DE" dirty="0"/>
+              </a:p>
+              <a:p>
+                <a:pPr marL="514350" indent="-514350">
+                  <a:buFont typeface="+mj-lt"/>
+                  <a:buAutoNum type="arabicPeriod"/>
+                </a:pPr>
+                <a:r>
+                  <a:rPr lang="en-US" dirty="0" err="1"/>
+                  <a:t>Einheitsvektor</a:t>
+                </a:r>
+                <a:r>
+                  <a:rPr lang="en-US" dirty="0"/>
+                  <a:t> </a:t>
+                </a:r>
+                <a14:m>
+                  <m:oMath xmlns:m="http://schemas.openxmlformats.org/officeDocument/2006/math">
+                    <m:acc>
+                      <m:accPr>
+                        <m:chr m:val="̂"/>
+                        <m:ctrlPr>
+                          <a:rPr lang="en-US" i="1" dirty="0" smtClean="0">
+                            <a:latin typeface="Cambria Math" panose="02040503050406030204" pitchFamily="18" charset="0"/>
+                          </a:rPr>
+                        </m:ctrlPr>
+                      </m:accPr>
+                      <m:e>
+                        <m:r>
+                          <a:rPr lang="de-DE" i="1" dirty="0">
+                            <a:latin typeface="Cambria Math" panose="02040503050406030204" pitchFamily="18" charset="0"/>
+                          </a:rPr>
+                          <m:t>𝑢</m:t>
+                        </m:r>
+                      </m:e>
+                    </m:acc>
+                  </m:oMath>
+                </a14:m>
+                <a:endParaRPr lang="en-US" dirty="0"/>
+              </a:p>
+              <a:p>
+                <a:pPr marL="514350" indent="-514350">
+                  <a:buFont typeface="+mj-lt"/>
+                  <a:buAutoNum type="arabicPeriod"/>
+                </a:pPr>
+                <a:r>
+                  <a:rPr lang="en-US" dirty="0"/>
+                  <a:t>Relative </a:t>
+                </a:r>
+                <a:r>
+                  <a:rPr lang="en-US" dirty="0" err="1"/>
+                  <a:t>Geschwindigkeit</a:t>
+                </a:r>
+                <a:endParaRPr lang="en-US" dirty="0"/>
+              </a:p>
+              <a:p>
+                <a:pPr marL="514350" indent="-514350">
+                  <a:buFont typeface="+mj-lt"/>
+                  <a:buAutoNum type="arabicPeriod"/>
+                </a:pPr>
+                <a:r>
+                  <a:rPr lang="en-US" dirty="0" err="1"/>
+                  <a:t>Skalarprodukt</a:t>
+                </a:r>
+                <a:endParaRPr lang="en-US" dirty="0"/>
+              </a:p>
+              <a:p>
+                <a:pPr marL="514350" indent="-514350">
+                  <a:buFont typeface="+mj-lt"/>
+                  <a:buAutoNum type="arabicPeriod"/>
+                </a:pPr>
+                <a:r>
+                  <a:rPr lang="en-US" dirty="0" err="1"/>
+                  <a:t>Impulsberechnung</a:t>
+                </a:r>
+                <a:endParaRPr lang="de-DE" dirty="0"/>
+              </a:p>
+            </p:txBody>
+          </p:sp>
+        </mc:Choice>
+        <mc:Fallback>
+          <p:sp>
+            <p:nvSpPr>
+              <p:cNvPr id="3" name="Inhaltsplatzhalter 2">
+                <a:extLst>
+                  <a:ext uri="{FF2B5EF4-FFF2-40B4-BE49-F238E27FC236}">
+                    <a16:creationId xmlns:a16="http://schemas.microsoft.com/office/drawing/2014/main" id="{CE4BD4AF-A1C9-F942-F99D-ACCA40122FBA}"/>
+                  </a:ext>
+                </a:extLst>
+              </p:cNvPr>
+              <p:cNvSpPr>
+                <a:spLocks noGrp="1" noRot="1" noChangeAspect="1" noMove="1" noResize="1" noEditPoints="1" noAdjustHandles="1" noChangeArrowheads="1" noChangeShapeType="1" noTextEdit="1"/>
+              </p:cNvSpPr>
+              <p:nvPr>
+                <p:ph idx="1"/>
+              </p:nvPr>
+            </p:nvSpPr>
+            <p:spPr>
+              <a:blipFill>
+                <a:blip r:embed="rId2"/>
+                <a:stretch>
+                  <a:fillRect l="-1217" t="-2381" b="-2941"/>
+                </a:stretch>
+              </a:blipFill>
+            </p:spPr>
+            <p:txBody>
+              <a:bodyPr/>
+              <a:lstStyle/>
+              <a:p>
+                <a:r>
+                  <a:rPr lang="en-US">
+                    <a:noFill/>
+                  </a:rPr>
+                  <a:t> </a:t>
+                </a:r>
+              </a:p>
+            </p:txBody>
+          </p:sp>
+        </mc:Fallback>
+      </mc:AlternateContent>
+      <p:sp>
+        <p:nvSpPr>
+          <p:cNvPr id="4" name="Datumsplatzhalter 3">
+            <a:extLst>
+              <a:ext uri="{FF2B5EF4-FFF2-40B4-BE49-F238E27FC236}">
+                <a16:creationId xmlns:a16="http://schemas.microsoft.com/office/drawing/2014/main" id="{9D4AB40F-C545-F7FC-D790-917B9306DEC0}"/>
+              </a:ext>
+            </a:extLst>
+          </p:cNvPr>
+          <p:cNvSpPr>
+            <a:spLocks noGrp="1"/>
+          </p:cNvSpPr>
+          <p:nvPr>
+            <p:ph type="dt" sz="half" idx="10"/>
           </p:nvPr>
         </p:nvSpPr>
         <p:spPr/>
@@ -4430,6 +8119,39 @@
           <a:bodyPr/>
           <a:lstStyle/>
           <a:p>
+            <a:fld id="{B19C0ABB-DBBF-464C-A96B-FED2BC8E1520}" type="datetime1">
+              <a:rPr lang="de-DE" smtClean="0"/>
+              <a:t>10.12.2024</a:t>
+            </a:fld>
+            <a:endParaRPr lang="de-DE"/>
+          </a:p>
+        </p:txBody>
+      </p:sp>
+      <p:sp>
+        <p:nvSpPr>
+          <p:cNvPr id="6" name="Foliennummernplatzhalter 5">
+            <a:extLst>
+              <a:ext uri="{FF2B5EF4-FFF2-40B4-BE49-F238E27FC236}">
+                <a16:creationId xmlns:a16="http://schemas.microsoft.com/office/drawing/2014/main" id="{2808B521-3AF7-EFFB-C038-15F6FED36B3B}"/>
+              </a:ext>
+            </a:extLst>
+          </p:cNvPr>
+          <p:cNvSpPr>
+            <a:spLocks noGrp="1"/>
+          </p:cNvSpPr>
+          <p:nvPr>
+            <p:ph type="sldNum" sz="quarter" idx="12"/>
+          </p:nvPr>
+        </p:nvSpPr>
+        <p:spPr/>
+        <p:txBody>
+          <a:bodyPr/>
+          <a:lstStyle/>
+          <a:p>
+            <a:fld id="{2F2A0DB8-2729-3A4D-A362-07849BE8AC54}" type="slidenum">
+              <a:rPr lang="de-DE" smtClean="0"/>
+              <a:t>8</a:t>
+            </a:fld>
             <a:endParaRPr lang="de-DE"/>
           </a:p>
         </p:txBody>
@@ -4437,7 +8159,7 @@
     </p:spTree>
     <p:extLst>
       <p:ext uri="{BB962C8B-B14F-4D97-AF65-F5344CB8AC3E}">
-        <p14:creationId xmlns:p14="http://schemas.microsoft.com/office/powerpoint/2010/main" val="3415498520"/>
+        <p14:creationId xmlns:p14="http://schemas.microsoft.com/office/powerpoint/2010/main" val="239348592"/>
       </p:ext>
     </p:extLst>
   </p:cSld>
@@ -4469,7 +8191,7 @@
           <p:cNvPr id="2" name="Titel 1">
             <a:extLst>
               <a:ext uri="{FF2B5EF4-FFF2-40B4-BE49-F238E27FC236}">
-                <a16:creationId xmlns:a16="http://schemas.microsoft.com/office/drawing/2014/main" id="{EAAE1D2C-878D-FDD5-F736-C2CF3B693229}"/>
+                <a16:creationId xmlns:a16="http://schemas.microsoft.com/office/drawing/2014/main" id="{A0289E12-02FE-A3B1-5852-565B209E58A1}"/>
               </a:ext>
             </a:extLst>
           </p:cNvPr>
@@ -4487,25 +8209,1145 @@
           <a:p>
             <a:r>
               <a:rPr lang="de-DE" dirty="0"/>
-              <a:t>Verhalten bei unelastischen Stößen</a:t>
-            </a:r>
-          </a:p>
-        </p:txBody>
-      </p:sp>
-      <p:sp>
-        <p:nvSpPr>
-          <p:cNvPr id="3" name="Inhaltsplatzhalter 2">
-            <a:extLst>
-              <a:ext uri="{FF2B5EF4-FFF2-40B4-BE49-F238E27FC236}">
-                <a16:creationId xmlns:a16="http://schemas.microsoft.com/office/drawing/2014/main" id="{CE4BD4AF-A1C9-F942-F99D-ACCA40122FBA}"/>
-              </a:ext>
-            </a:extLst>
-          </p:cNvPr>
-          <p:cNvSpPr>
-            <a:spLocks noGrp="1"/>
-          </p:cNvSpPr>
-          <p:nvPr>
-            <p:ph idx="1"/>
+              <a:t>Zentraler elastischer Stoß</a:t>
+            </a:r>
+            <a:endParaRPr lang="en-US" dirty="0"/>
+          </a:p>
+        </p:txBody>
+      </p:sp>
+      <mc:AlternateContent xmlns:mc="http://schemas.openxmlformats.org/markup-compatibility/2006">
+        <mc:Choice xmlns:a14="http://schemas.microsoft.com/office/drawing/2010/main" Requires="a14">
+          <p:sp>
+            <p:nvSpPr>
+              <p:cNvPr id="3" name="Inhaltsplatzhalter 2">
+                <a:extLst>
+                  <a:ext uri="{FF2B5EF4-FFF2-40B4-BE49-F238E27FC236}">
+                    <a16:creationId xmlns:a16="http://schemas.microsoft.com/office/drawing/2014/main" id="{C39C3033-2096-2497-889E-7F51FB339A2A}"/>
+                  </a:ext>
+                </a:extLst>
+              </p:cNvPr>
+              <p:cNvSpPr>
+                <a:spLocks noGrp="1"/>
+              </p:cNvSpPr>
+              <p:nvPr>
+                <p:ph idx="1"/>
+              </p:nvPr>
+            </p:nvSpPr>
+            <p:spPr/>
+            <p:txBody>
+              <a:bodyPr/>
+              <a:lstStyle/>
+              <a:p>
+                <a:r>
+                  <a:rPr lang="de-DE" dirty="0"/>
+                  <a:t>Impulserhaltungssatz:</a:t>
+                </a:r>
+              </a:p>
+              <a:p>
+                <a:pPr marL="0" indent="0">
+                  <a:buNone/>
+                </a:pPr>
+                <a14:m>
+                  <m:oMathPara xmlns:m="http://schemas.openxmlformats.org/officeDocument/2006/math">
+                    <m:oMathParaPr>
+                      <m:jc m:val="centerGroup"/>
+                    </m:oMathParaPr>
+                    <m:oMath xmlns:m="http://schemas.openxmlformats.org/officeDocument/2006/math">
+                      <m:sSub>
+                        <m:sSubPr>
+                          <m:ctrlPr>
+                            <a:rPr lang="en-US" i="1" smtClean="0">
+                              <a:solidFill>
+                                <a:srgbClr val="836967"/>
+                              </a:solidFill>
+                              <a:latin typeface="Cambria Math" panose="02040503050406030204" pitchFamily="18" charset="0"/>
+                            </a:rPr>
+                          </m:ctrlPr>
+                        </m:sSubPr>
+                        <m:e>
+                          <m:r>
+                            <a:rPr lang="en-US" i="1">
+                              <a:latin typeface="Cambria Math" panose="02040503050406030204" pitchFamily="18" charset="0"/>
+                            </a:rPr>
+                            <m:t>𝑚</m:t>
+                          </m:r>
+                        </m:e>
+                        <m:sub>
+                          <m:r>
+                            <a:rPr lang="en-US" i="0">
+                              <a:latin typeface="Cambria Math" panose="02040503050406030204" pitchFamily="18" charset="0"/>
+                            </a:rPr>
+                            <m:t>1</m:t>
+                          </m:r>
+                        </m:sub>
+                      </m:sSub>
+                      <m:sSub>
+                        <m:sSubPr>
+                          <m:ctrlPr>
+                            <a:rPr lang="en-US" i="1">
+                              <a:solidFill>
+                                <a:srgbClr val="836967"/>
+                              </a:solidFill>
+                              <a:latin typeface="Cambria Math" panose="02040503050406030204" pitchFamily="18" charset="0"/>
+                            </a:rPr>
+                          </m:ctrlPr>
+                        </m:sSubPr>
+                        <m:e>
+                          <m:r>
+                            <a:rPr lang="en-US" i="1">
+                              <a:latin typeface="Cambria Math" panose="02040503050406030204" pitchFamily="18" charset="0"/>
+                            </a:rPr>
+                            <m:t>𝑣</m:t>
+                          </m:r>
+                        </m:e>
+                        <m:sub>
+                          <m:r>
+                            <a:rPr lang="en-US" i="0">
+                              <a:latin typeface="Cambria Math" panose="02040503050406030204" pitchFamily="18" charset="0"/>
+                            </a:rPr>
+                            <m:t>1</m:t>
+                          </m:r>
+                        </m:sub>
+                      </m:sSub>
+                      <m:r>
+                        <a:rPr lang="en-US" i="0">
+                          <a:latin typeface="Cambria Math" panose="02040503050406030204" pitchFamily="18" charset="0"/>
+                        </a:rPr>
+                        <m:t>+</m:t>
+                      </m:r>
+                      <m:sSub>
+                        <m:sSubPr>
+                          <m:ctrlPr>
+                            <a:rPr lang="en-US" i="1">
+                              <a:solidFill>
+                                <a:srgbClr val="836967"/>
+                              </a:solidFill>
+                              <a:latin typeface="Cambria Math" panose="02040503050406030204" pitchFamily="18" charset="0"/>
+                            </a:rPr>
+                          </m:ctrlPr>
+                        </m:sSubPr>
+                        <m:e>
+                          <m:r>
+                            <a:rPr lang="en-US" i="1">
+                              <a:latin typeface="Cambria Math" panose="02040503050406030204" pitchFamily="18" charset="0"/>
+                            </a:rPr>
+                            <m:t>𝑚</m:t>
+                          </m:r>
+                        </m:e>
+                        <m:sub>
+                          <m:r>
+                            <a:rPr lang="en-US" i="0">
+                              <a:latin typeface="Cambria Math" panose="02040503050406030204" pitchFamily="18" charset="0"/>
+                            </a:rPr>
+                            <m:t>2</m:t>
+                          </m:r>
+                        </m:sub>
+                      </m:sSub>
+                      <m:sSub>
+                        <m:sSubPr>
+                          <m:ctrlPr>
+                            <a:rPr lang="en-US" i="1">
+                              <a:solidFill>
+                                <a:srgbClr val="836967"/>
+                              </a:solidFill>
+                              <a:latin typeface="Cambria Math" panose="02040503050406030204" pitchFamily="18" charset="0"/>
+                            </a:rPr>
+                          </m:ctrlPr>
+                        </m:sSubPr>
+                        <m:e>
+                          <m:r>
+                            <a:rPr lang="en-US" i="1">
+                              <a:latin typeface="Cambria Math" panose="02040503050406030204" pitchFamily="18" charset="0"/>
+                            </a:rPr>
+                            <m:t>𝑣</m:t>
+                          </m:r>
+                        </m:e>
+                        <m:sub>
+                          <m:r>
+                            <a:rPr lang="en-US" i="0">
+                              <a:latin typeface="Cambria Math" panose="02040503050406030204" pitchFamily="18" charset="0"/>
+                            </a:rPr>
+                            <m:t>2</m:t>
+                          </m:r>
+                        </m:sub>
+                      </m:sSub>
+                      <m:r>
+                        <a:rPr lang="en-US" i="0">
+                          <a:latin typeface="Cambria Math" panose="02040503050406030204" pitchFamily="18" charset="0"/>
+                        </a:rPr>
+                        <m:t>=</m:t>
+                      </m:r>
+                      <m:sSub>
+                        <m:sSubPr>
+                          <m:ctrlPr>
+                            <a:rPr lang="en-US" i="1">
+                              <a:solidFill>
+                                <a:srgbClr val="836967"/>
+                              </a:solidFill>
+                              <a:latin typeface="Cambria Math" panose="02040503050406030204" pitchFamily="18" charset="0"/>
+                            </a:rPr>
+                          </m:ctrlPr>
+                        </m:sSubPr>
+                        <m:e>
+                          <m:r>
+                            <a:rPr lang="en-US" i="1">
+                              <a:latin typeface="Cambria Math" panose="02040503050406030204" pitchFamily="18" charset="0"/>
+                            </a:rPr>
+                            <m:t>𝑚</m:t>
+                          </m:r>
+                        </m:e>
+                        <m:sub>
+                          <m:r>
+                            <a:rPr lang="en-US" i="0">
+                              <a:latin typeface="Cambria Math" panose="02040503050406030204" pitchFamily="18" charset="0"/>
+                            </a:rPr>
+                            <m:t>1</m:t>
+                          </m:r>
+                        </m:sub>
+                      </m:sSub>
+                      <m:sSubSup>
+                        <m:sSubSupPr>
+                          <m:ctrlPr>
+                            <a:rPr lang="en-US" i="1">
+                              <a:solidFill>
+                                <a:srgbClr val="836967"/>
+                              </a:solidFill>
+                              <a:latin typeface="Cambria Math" panose="02040503050406030204" pitchFamily="18" charset="0"/>
+                            </a:rPr>
+                          </m:ctrlPr>
+                        </m:sSubSupPr>
+                        <m:e>
+                          <m:r>
+                            <a:rPr lang="en-US" i="1">
+                              <a:latin typeface="Cambria Math" panose="02040503050406030204" pitchFamily="18" charset="0"/>
+                            </a:rPr>
+                            <m:t>𝑣</m:t>
+                          </m:r>
+                        </m:e>
+                        <m:sub>
+                          <m:r>
+                            <a:rPr lang="en-US" i="0">
+                              <a:latin typeface="Cambria Math" panose="02040503050406030204" pitchFamily="18" charset="0"/>
+                            </a:rPr>
+                            <m:t>1</m:t>
+                          </m:r>
+                        </m:sub>
+                        <m:sup>
+                          <m:r>
+                            <a:rPr lang="en-US" i="0">
+                              <a:latin typeface="Cambria Math" panose="02040503050406030204" pitchFamily="18" charset="0"/>
+                            </a:rPr>
+                            <m:t>′</m:t>
+                          </m:r>
+                        </m:sup>
+                      </m:sSubSup>
+                      <m:r>
+                        <a:rPr lang="en-US" i="0">
+                          <a:latin typeface="Cambria Math" panose="02040503050406030204" pitchFamily="18" charset="0"/>
+                        </a:rPr>
+                        <m:t>+</m:t>
+                      </m:r>
+                      <m:sSub>
+                        <m:sSubPr>
+                          <m:ctrlPr>
+                            <a:rPr lang="en-US" i="1">
+                              <a:solidFill>
+                                <a:srgbClr val="836967"/>
+                              </a:solidFill>
+                              <a:latin typeface="Cambria Math" panose="02040503050406030204" pitchFamily="18" charset="0"/>
+                            </a:rPr>
+                          </m:ctrlPr>
+                        </m:sSubPr>
+                        <m:e>
+                          <m:r>
+                            <a:rPr lang="en-US" i="1">
+                              <a:latin typeface="Cambria Math" panose="02040503050406030204" pitchFamily="18" charset="0"/>
+                            </a:rPr>
+                            <m:t>𝑚</m:t>
+                          </m:r>
+                        </m:e>
+                        <m:sub>
+                          <m:r>
+                            <a:rPr lang="en-US" i="0">
+                              <a:latin typeface="Cambria Math" panose="02040503050406030204" pitchFamily="18" charset="0"/>
+                            </a:rPr>
+                            <m:t>2</m:t>
+                          </m:r>
+                        </m:sub>
+                      </m:sSub>
+                      <m:sSubSup>
+                        <m:sSubSupPr>
+                          <m:ctrlPr>
+                            <a:rPr lang="en-US" i="1">
+                              <a:solidFill>
+                                <a:srgbClr val="836967"/>
+                              </a:solidFill>
+                              <a:latin typeface="Cambria Math" panose="02040503050406030204" pitchFamily="18" charset="0"/>
+                            </a:rPr>
+                          </m:ctrlPr>
+                        </m:sSubSupPr>
+                        <m:e>
+                          <m:r>
+                            <a:rPr lang="en-US" i="1">
+                              <a:latin typeface="Cambria Math" panose="02040503050406030204" pitchFamily="18" charset="0"/>
+                            </a:rPr>
+                            <m:t>𝑣</m:t>
+                          </m:r>
+                        </m:e>
+                        <m:sub>
+                          <m:r>
+                            <a:rPr lang="en-US" i="0">
+                              <a:latin typeface="Cambria Math" panose="02040503050406030204" pitchFamily="18" charset="0"/>
+                            </a:rPr>
+                            <m:t>2</m:t>
+                          </m:r>
+                        </m:sub>
+                        <m:sup>
+                          <m:r>
+                            <a:rPr lang="en-US" i="0">
+                              <a:latin typeface="Cambria Math" panose="02040503050406030204" pitchFamily="18" charset="0"/>
+                            </a:rPr>
+                            <m:t>′</m:t>
+                          </m:r>
+                        </m:sup>
+                      </m:sSubSup>
+                    </m:oMath>
+                  </m:oMathPara>
+                </a14:m>
+                <a:endParaRPr lang="en-US" dirty="0"/>
+              </a:p>
+              <a:p>
+                <a:r>
+                  <a:rPr lang="en-US" dirty="0">
+                    <a:solidFill>
+                      <a:schemeClr val="tx1"/>
+                    </a:solidFill>
+                  </a:rPr>
+                  <a:t>Energieerhaltungssatz:</a:t>
+                </a:r>
+                <a:endParaRPr lang="de-DE" i="1" dirty="0">
+                  <a:solidFill>
+                    <a:schemeClr val="tx1"/>
+                  </a:solidFill>
+                  <a:latin typeface="Cambria Math" panose="02040503050406030204" pitchFamily="18" charset="0"/>
+                </a:endParaRPr>
+              </a:p>
+              <a:p>
+                <a:pPr marL="0" indent="0" algn="ctr">
+                  <a:buNone/>
+                </a:pPr>
+                <a14:m>
+                  <m:oMath xmlns:m="http://schemas.openxmlformats.org/officeDocument/2006/math">
+                    <m:sSub>
+                      <m:sSubPr>
+                        <m:ctrlPr>
+                          <a:rPr lang="en-US" i="1" smtClean="0">
+                            <a:solidFill>
+                              <a:schemeClr val="tx1"/>
+                            </a:solidFill>
+                            <a:latin typeface="Cambria Math" panose="02040503050406030204" pitchFamily="18" charset="0"/>
+                          </a:rPr>
+                        </m:ctrlPr>
+                      </m:sSubPr>
+                      <m:e>
+                        <m:f>
+                          <m:fPr>
+                            <m:ctrlPr>
+                              <a:rPr lang="en-US" i="1">
+                                <a:solidFill>
+                                  <a:schemeClr val="tx1"/>
+                                </a:solidFill>
+                                <a:latin typeface="Cambria Math" panose="02040503050406030204" pitchFamily="18" charset="0"/>
+                              </a:rPr>
+                            </m:ctrlPr>
+                          </m:fPr>
+                          <m:num>
+                            <m:r>
+                              <a:rPr lang="de-DE" i="1">
+                                <a:solidFill>
+                                  <a:schemeClr val="tx1"/>
+                                </a:solidFill>
+                                <a:latin typeface="Cambria Math" panose="02040503050406030204" pitchFamily="18" charset="0"/>
+                              </a:rPr>
+                              <m:t>1</m:t>
+                            </m:r>
+                          </m:num>
+                          <m:den>
+                            <m:r>
+                              <a:rPr lang="en-US" i="1">
+                                <a:solidFill>
+                                  <a:schemeClr val="tx1"/>
+                                </a:solidFill>
+                                <a:latin typeface="Cambria Math" panose="02040503050406030204" pitchFamily="18" charset="0"/>
+                              </a:rPr>
+                              <m:t>2</m:t>
+                            </m:r>
+                          </m:den>
+                        </m:f>
+                        <m:r>
+                          <a:rPr lang="en-US" i="1">
+                            <a:solidFill>
+                              <a:schemeClr val="tx1"/>
+                            </a:solidFill>
+                            <a:latin typeface="Cambria Math" panose="02040503050406030204" pitchFamily="18" charset="0"/>
+                          </a:rPr>
+                          <m:t>𝑚</m:t>
+                        </m:r>
+                      </m:e>
+                      <m:sub>
+                        <m:r>
+                          <a:rPr lang="en-US" i="0">
+                            <a:solidFill>
+                              <a:schemeClr val="tx1"/>
+                            </a:solidFill>
+                            <a:latin typeface="Cambria Math" panose="02040503050406030204" pitchFamily="18" charset="0"/>
+                          </a:rPr>
+                          <m:t>1</m:t>
+                        </m:r>
+                      </m:sub>
+                    </m:sSub>
+                    <m:sSubSup>
+                      <m:sSubSupPr>
+                        <m:ctrlPr>
+                          <a:rPr lang="de-DE" b="0" i="0" smtClean="0">
+                            <a:solidFill>
+                              <a:schemeClr val="tx1"/>
+                            </a:solidFill>
+                            <a:latin typeface="Cambria Math" panose="02040503050406030204" pitchFamily="18" charset="0"/>
+                          </a:rPr>
+                        </m:ctrlPr>
+                      </m:sSubSupPr>
+                      <m:e>
+                        <m:r>
+                          <a:rPr lang="en-US" i="1">
+                            <a:solidFill>
+                              <a:schemeClr val="tx1"/>
+                            </a:solidFill>
+                            <a:latin typeface="Cambria Math" panose="02040503050406030204" pitchFamily="18" charset="0"/>
+                          </a:rPr>
+                          <m:t>𝑣</m:t>
+                        </m:r>
+                      </m:e>
+                      <m:sub>
+                        <m:r>
+                          <a:rPr lang="en-US" i="0">
+                            <a:solidFill>
+                              <a:schemeClr val="tx1"/>
+                            </a:solidFill>
+                            <a:latin typeface="Cambria Math" panose="02040503050406030204" pitchFamily="18" charset="0"/>
+                          </a:rPr>
+                          <m:t>1</m:t>
+                        </m:r>
+                      </m:sub>
+                      <m:sup>
+                        <m:r>
+                          <a:rPr lang="de-DE" b="0" i="0" smtClean="0">
+                            <a:solidFill>
+                              <a:schemeClr val="tx1"/>
+                            </a:solidFill>
+                            <a:latin typeface="Cambria Math" panose="02040503050406030204" pitchFamily="18" charset="0"/>
+                          </a:rPr>
+                          <m:t>2</m:t>
+                        </m:r>
+                      </m:sup>
+                    </m:sSubSup>
+                    <m:r>
+                      <a:rPr lang="en-US" i="0">
+                        <a:solidFill>
+                          <a:schemeClr val="tx1"/>
+                        </a:solidFill>
+                        <a:latin typeface="Cambria Math" panose="02040503050406030204" pitchFamily="18" charset="0"/>
+                      </a:rPr>
+                      <m:t>+</m:t>
+                    </m:r>
+                    <m:sSub>
+                      <m:sSubPr>
+                        <m:ctrlPr>
+                          <a:rPr lang="en-US" b="0" i="1">
+                            <a:solidFill>
+                              <a:schemeClr val="tx1"/>
+                            </a:solidFill>
+                            <a:latin typeface="Cambria Math" panose="02040503050406030204" pitchFamily="18" charset="0"/>
+                          </a:rPr>
+                        </m:ctrlPr>
+                      </m:sSubPr>
+                      <m:e>
+                        <m:f>
+                          <m:fPr>
+                            <m:ctrlPr>
+                              <a:rPr lang="en-US" b="0" i="1">
+                                <a:solidFill>
+                                  <a:schemeClr val="tx1"/>
+                                </a:solidFill>
+                                <a:latin typeface="Cambria Math" panose="02040503050406030204" pitchFamily="18" charset="0"/>
+                              </a:rPr>
+                            </m:ctrlPr>
+                          </m:fPr>
+                          <m:num>
+                            <m:r>
+                              <a:rPr lang="de-DE" i="1">
+                                <a:solidFill>
+                                  <a:schemeClr val="tx1"/>
+                                </a:solidFill>
+                                <a:latin typeface="Cambria Math" panose="02040503050406030204" pitchFamily="18" charset="0"/>
+                              </a:rPr>
+                              <m:t>1</m:t>
+                            </m:r>
+                          </m:num>
+                          <m:den>
+                            <m:r>
+                              <a:rPr lang="en-US" i="1">
+                                <a:solidFill>
+                                  <a:schemeClr val="tx1"/>
+                                </a:solidFill>
+                                <a:latin typeface="Cambria Math" panose="02040503050406030204" pitchFamily="18" charset="0"/>
+                              </a:rPr>
+                              <m:t>2</m:t>
+                            </m:r>
+                          </m:den>
+                        </m:f>
+                        <m:r>
+                          <a:rPr lang="en-US" i="1">
+                            <a:solidFill>
+                              <a:schemeClr val="tx1"/>
+                            </a:solidFill>
+                            <a:latin typeface="Cambria Math" panose="02040503050406030204" pitchFamily="18" charset="0"/>
+                          </a:rPr>
+                          <m:t>𝑚</m:t>
+                        </m:r>
+                      </m:e>
+                      <m:sub>
+                        <m:r>
+                          <a:rPr lang="en-US" i="0">
+                            <a:solidFill>
+                              <a:schemeClr val="tx1"/>
+                            </a:solidFill>
+                            <a:latin typeface="Cambria Math" panose="02040503050406030204" pitchFamily="18" charset="0"/>
+                          </a:rPr>
+                          <m:t>2</m:t>
+                        </m:r>
+                      </m:sub>
+                    </m:sSub>
+                    <m:sSubSup>
+                      <m:sSubSupPr>
+                        <m:ctrlPr>
+                          <a:rPr lang="de-DE" b="0" i="1">
+                            <a:solidFill>
+                              <a:schemeClr val="tx1"/>
+                            </a:solidFill>
+                            <a:latin typeface="Cambria Math" panose="02040503050406030204" pitchFamily="18" charset="0"/>
+                          </a:rPr>
+                        </m:ctrlPr>
+                      </m:sSubSupPr>
+                      <m:e>
+                        <m:r>
+                          <a:rPr lang="en-US" i="1">
+                            <a:solidFill>
+                              <a:schemeClr val="tx1"/>
+                            </a:solidFill>
+                            <a:latin typeface="Cambria Math" panose="02040503050406030204" pitchFamily="18" charset="0"/>
+                          </a:rPr>
+                          <m:t>𝑣</m:t>
+                        </m:r>
+                      </m:e>
+                      <m:sub>
+                        <m:r>
+                          <a:rPr lang="en-US" i="0">
+                            <a:solidFill>
+                              <a:schemeClr val="tx1"/>
+                            </a:solidFill>
+                            <a:latin typeface="Cambria Math" panose="02040503050406030204" pitchFamily="18" charset="0"/>
+                          </a:rPr>
+                          <m:t>2</m:t>
+                        </m:r>
+                      </m:sub>
+                      <m:sup>
+                        <m:r>
+                          <a:rPr lang="de-DE" i="1">
+                            <a:solidFill>
+                              <a:schemeClr val="tx1"/>
+                            </a:solidFill>
+                            <a:latin typeface="Cambria Math" panose="02040503050406030204" pitchFamily="18" charset="0"/>
+                          </a:rPr>
+                          <m:t>2</m:t>
+                        </m:r>
+                      </m:sup>
+                    </m:sSubSup>
+                    <m:r>
+                      <a:rPr lang="en-US" i="0">
+                        <a:solidFill>
+                          <a:schemeClr val="tx1"/>
+                        </a:solidFill>
+                        <a:latin typeface="Cambria Math" panose="02040503050406030204" pitchFamily="18" charset="0"/>
+                      </a:rPr>
+                      <m:t>=</m:t>
+                    </m:r>
+                    <m:sSub>
+                      <m:sSubPr>
+                        <m:ctrlPr>
+                          <a:rPr lang="en-US" i="1">
+                            <a:solidFill>
+                              <a:schemeClr val="tx1"/>
+                            </a:solidFill>
+                            <a:latin typeface="Cambria Math" panose="02040503050406030204" pitchFamily="18" charset="0"/>
+                          </a:rPr>
+                        </m:ctrlPr>
+                      </m:sSubPr>
+                      <m:e>
+                        <m:f>
+                          <m:fPr>
+                            <m:ctrlPr>
+                              <a:rPr lang="en-US" i="1">
+                                <a:solidFill>
+                                  <a:schemeClr val="tx1"/>
+                                </a:solidFill>
+                                <a:latin typeface="Cambria Math" panose="02040503050406030204" pitchFamily="18" charset="0"/>
+                              </a:rPr>
+                            </m:ctrlPr>
+                          </m:fPr>
+                          <m:num>
+                            <m:r>
+                              <a:rPr lang="de-DE" i="1">
+                                <a:solidFill>
+                                  <a:schemeClr val="tx1"/>
+                                </a:solidFill>
+                                <a:latin typeface="Cambria Math" panose="02040503050406030204" pitchFamily="18" charset="0"/>
+                              </a:rPr>
+                              <m:t>1</m:t>
+                            </m:r>
+                          </m:num>
+                          <m:den>
+                            <m:r>
+                              <a:rPr lang="en-US" i="1">
+                                <a:solidFill>
+                                  <a:schemeClr val="tx1"/>
+                                </a:solidFill>
+                                <a:latin typeface="Cambria Math" panose="02040503050406030204" pitchFamily="18" charset="0"/>
+                              </a:rPr>
+                              <m:t>2</m:t>
+                            </m:r>
+                          </m:den>
+                        </m:f>
+                        <m:r>
+                          <a:rPr lang="en-US" i="1">
+                            <a:solidFill>
+                              <a:schemeClr val="tx1"/>
+                            </a:solidFill>
+                            <a:latin typeface="Cambria Math" panose="02040503050406030204" pitchFamily="18" charset="0"/>
+                          </a:rPr>
+                          <m:t>𝑚</m:t>
+                        </m:r>
+                      </m:e>
+                      <m:sub>
+                        <m:r>
+                          <a:rPr lang="en-US" i="0">
+                            <a:solidFill>
+                              <a:schemeClr val="tx1"/>
+                            </a:solidFill>
+                            <a:latin typeface="Cambria Math" panose="02040503050406030204" pitchFamily="18" charset="0"/>
+                          </a:rPr>
+                          <m:t>1</m:t>
+                        </m:r>
+                      </m:sub>
+                    </m:sSub>
+                    <m:sSup>
+                      <m:sSupPr>
+                        <m:ctrlPr>
+                          <a:rPr lang="de-DE" i="1">
+                            <a:solidFill>
+                              <a:schemeClr val="tx1"/>
+                            </a:solidFill>
+                            <a:latin typeface="Cambria Math" panose="02040503050406030204" pitchFamily="18" charset="0"/>
+                          </a:rPr>
+                        </m:ctrlPr>
+                      </m:sSupPr>
+                      <m:e>
+                        <m:sSubSup>
+                          <m:sSubSupPr>
+                            <m:ctrlPr>
+                              <a:rPr lang="en-US" i="1">
+                                <a:solidFill>
+                                  <a:schemeClr val="tx1"/>
+                                </a:solidFill>
+                                <a:latin typeface="Cambria Math" panose="02040503050406030204" pitchFamily="18" charset="0"/>
+                              </a:rPr>
+                            </m:ctrlPr>
+                          </m:sSubSupPr>
+                          <m:e>
+                            <m:r>
+                              <a:rPr lang="en-US" i="1">
+                                <a:solidFill>
+                                  <a:schemeClr val="tx1"/>
+                                </a:solidFill>
+                                <a:latin typeface="Cambria Math" panose="02040503050406030204" pitchFamily="18" charset="0"/>
+                              </a:rPr>
+                              <m:t>𝑣</m:t>
+                            </m:r>
+                          </m:e>
+                          <m:sub>
+                            <m:r>
+                              <a:rPr lang="en-US" i="0">
+                                <a:solidFill>
+                                  <a:schemeClr val="tx1"/>
+                                </a:solidFill>
+                                <a:latin typeface="Cambria Math" panose="02040503050406030204" pitchFamily="18" charset="0"/>
+                              </a:rPr>
+                              <m:t>1</m:t>
+                            </m:r>
+                          </m:sub>
+                          <m:sup>
+                            <m:r>
+                              <a:rPr lang="en-US" i="0">
+                                <a:solidFill>
+                                  <a:schemeClr val="tx1"/>
+                                </a:solidFill>
+                                <a:latin typeface="Cambria Math" panose="02040503050406030204" pitchFamily="18" charset="0"/>
+                              </a:rPr>
+                              <m:t>′</m:t>
+                            </m:r>
+                          </m:sup>
+                        </m:sSubSup>
+                      </m:e>
+                      <m:sup>
+                        <m:r>
+                          <a:rPr lang="de-DE" i="1">
+                            <a:solidFill>
+                              <a:schemeClr val="tx1"/>
+                            </a:solidFill>
+                            <a:latin typeface="Cambria Math" panose="02040503050406030204" pitchFamily="18" charset="0"/>
+                          </a:rPr>
+                          <m:t>2</m:t>
+                        </m:r>
+                      </m:sup>
+                    </m:sSup>
+                    <m:r>
+                      <a:rPr lang="en-US" i="0">
+                        <a:solidFill>
+                          <a:schemeClr val="tx1"/>
+                        </a:solidFill>
+                        <a:latin typeface="Cambria Math" panose="02040503050406030204" pitchFamily="18" charset="0"/>
+                      </a:rPr>
+                      <m:t>+</m:t>
+                    </m:r>
+                    <m:sSub>
+                      <m:sSubPr>
+                        <m:ctrlPr>
+                          <a:rPr lang="en-US" i="1">
+                            <a:solidFill>
+                              <a:schemeClr val="tx1"/>
+                            </a:solidFill>
+                            <a:latin typeface="Cambria Math" panose="02040503050406030204" pitchFamily="18" charset="0"/>
+                          </a:rPr>
+                        </m:ctrlPr>
+                      </m:sSubPr>
+                      <m:e>
+                        <m:f>
+                          <m:fPr>
+                            <m:ctrlPr>
+                              <a:rPr lang="en-US" i="1">
+                                <a:solidFill>
+                                  <a:schemeClr val="tx1"/>
+                                </a:solidFill>
+                                <a:latin typeface="Cambria Math" panose="02040503050406030204" pitchFamily="18" charset="0"/>
+                              </a:rPr>
+                            </m:ctrlPr>
+                          </m:fPr>
+                          <m:num>
+                            <m:r>
+                              <a:rPr lang="de-DE" i="1">
+                                <a:solidFill>
+                                  <a:schemeClr val="tx1"/>
+                                </a:solidFill>
+                                <a:latin typeface="Cambria Math" panose="02040503050406030204" pitchFamily="18" charset="0"/>
+                              </a:rPr>
+                              <m:t>1</m:t>
+                            </m:r>
+                          </m:num>
+                          <m:den>
+                            <m:r>
+                              <a:rPr lang="en-US" i="1">
+                                <a:solidFill>
+                                  <a:schemeClr val="tx1"/>
+                                </a:solidFill>
+                                <a:latin typeface="Cambria Math" panose="02040503050406030204" pitchFamily="18" charset="0"/>
+                              </a:rPr>
+                              <m:t>2</m:t>
+                            </m:r>
+                          </m:den>
+                        </m:f>
+                        <m:r>
+                          <a:rPr lang="en-US" i="1">
+                            <a:solidFill>
+                              <a:schemeClr val="tx1"/>
+                            </a:solidFill>
+                            <a:latin typeface="Cambria Math" panose="02040503050406030204" pitchFamily="18" charset="0"/>
+                          </a:rPr>
+                          <m:t>𝑚</m:t>
+                        </m:r>
+                      </m:e>
+                      <m:sub>
+                        <m:r>
+                          <a:rPr lang="en-US" i="0">
+                            <a:solidFill>
+                              <a:schemeClr val="tx1"/>
+                            </a:solidFill>
+                            <a:latin typeface="Cambria Math" panose="02040503050406030204" pitchFamily="18" charset="0"/>
+                          </a:rPr>
+                          <m:t>2</m:t>
+                        </m:r>
+                      </m:sub>
+                    </m:sSub>
+                    <m:sSubSup>
+                      <m:sSubSupPr>
+                        <m:ctrlPr>
+                          <a:rPr lang="en-US" i="1">
+                            <a:solidFill>
+                              <a:schemeClr val="tx1"/>
+                            </a:solidFill>
+                            <a:latin typeface="Cambria Math" panose="02040503050406030204" pitchFamily="18" charset="0"/>
+                          </a:rPr>
+                        </m:ctrlPr>
+                      </m:sSubSupPr>
+                      <m:e>
+                        <m:r>
+                          <a:rPr lang="en-US" i="1">
+                            <a:solidFill>
+                              <a:schemeClr val="tx1"/>
+                            </a:solidFill>
+                            <a:latin typeface="Cambria Math" panose="02040503050406030204" pitchFamily="18" charset="0"/>
+                          </a:rPr>
+                          <m:t>𝑣</m:t>
+                        </m:r>
+                      </m:e>
+                      <m:sub>
+                        <m:r>
+                          <a:rPr lang="en-US" i="0">
+                            <a:solidFill>
+                              <a:schemeClr val="tx1"/>
+                            </a:solidFill>
+                            <a:latin typeface="Cambria Math" panose="02040503050406030204" pitchFamily="18" charset="0"/>
+                          </a:rPr>
+                          <m:t>2</m:t>
+                        </m:r>
+                      </m:sub>
+                      <m:sup>
+                        <m:r>
+                          <a:rPr lang="en-US" i="0">
+                            <a:solidFill>
+                              <a:schemeClr val="tx1"/>
+                            </a:solidFill>
+                            <a:latin typeface="Cambria Math" panose="02040503050406030204" pitchFamily="18" charset="0"/>
+                          </a:rPr>
+                          <m:t>′</m:t>
+                        </m:r>
+                      </m:sup>
+                    </m:sSubSup>
+                  </m:oMath>
+                </a14:m>
+                <a:r>
+                  <a:rPr lang="de-DE" dirty="0">
+                    <a:solidFill>
+                      <a:schemeClr val="tx1"/>
+                    </a:solidFill>
+                  </a:rPr>
+                  <a:t> </a:t>
+                </a:r>
+                <a14:m>
+                  <m:oMath xmlns:m="http://schemas.openxmlformats.org/officeDocument/2006/math">
+                    <m:r>
+                      <a:rPr lang="de-DE">
+                        <a:solidFill>
+                          <a:schemeClr val="tx1"/>
+                        </a:solidFill>
+                        <a:latin typeface="Cambria Math" panose="02040503050406030204" pitchFamily="18" charset="0"/>
+                      </a:rPr>
+                      <m:t>²</m:t>
+                    </m:r>
+                  </m:oMath>
+                </a14:m>
+                <a:endParaRPr lang="en-US" dirty="0">
+                  <a:solidFill>
+                    <a:schemeClr val="tx1"/>
+                  </a:solidFill>
+                </a:endParaRPr>
+              </a:p>
+              <a:p>
+                <a14:m>
+                  <m:oMath xmlns:m="http://schemas.openxmlformats.org/officeDocument/2006/math">
+                    <m:sSub>
+                      <m:sSubPr>
+                        <m:ctrlPr>
+                          <a:rPr lang="en-US" i="1" smtClean="0">
+                            <a:solidFill>
+                              <a:schemeClr val="tx1"/>
+                            </a:solidFill>
+                            <a:latin typeface="Cambria Math" panose="02040503050406030204" pitchFamily="18" charset="0"/>
+                          </a:rPr>
+                        </m:ctrlPr>
+                      </m:sSubPr>
+                      <m:e>
+                        <m:r>
+                          <a:rPr lang="en-US" i="1">
+                            <a:solidFill>
+                              <a:schemeClr val="tx1"/>
+                            </a:solidFill>
+                            <a:latin typeface="Cambria Math" panose="02040503050406030204" pitchFamily="18" charset="0"/>
+                          </a:rPr>
+                          <m:t>𝑚</m:t>
+                        </m:r>
+                      </m:e>
+                      <m:sub>
+                        <m:r>
+                          <a:rPr lang="en-US" i="0">
+                            <a:solidFill>
+                              <a:schemeClr val="tx1"/>
+                            </a:solidFill>
+                            <a:latin typeface="Cambria Math" panose="02040503050406030204" pitchFamily="18" charset="0"/>
+                          </a:rPr>
+                          <m:t>1</m:t>
+                        </m:r>
+                      </m:sub>
+                    </m:sSub>
+                    <m:r>
+                      <a:rPr lang="de-DE" b="0" i="1" smtClean="0">
+                        <a:solidFill>
+                          <a:schemeClr val="tx1"/>
+                        </a:solidFill>
+                        <a:latin typeface="Cambria Math" panose="02040503050406030204" pitchFamily="18" charset="0"/>
+                      </a:rPr>
+                      <m:t>,</m:t>
+                    </m:r>
+                    <m:sSub>
+                      <m:sSubPr>
+                        <m:ctrlPr>
+                          <a:rPr lang="en-US" i="1">
+                            <a:solidFill>
+                              <a:schemeClr val="tx1"/>
+                            </a:solidFill>
+                            <a:latin typeface="Cambria Math" panose="02040503050406030204" pitchFamily="18" charset="0"/>
+                          </a:rPr>
+                        </m:ctrlPr>
+                      </m:sSubPr>
+                      <m:e>
+                        <m:r>
+                          <a:rPr lang="en-US" i="1">
+                            <a:solidFill>
+                              <a:schemeClr val="tx1"/>
+                            </a:solidFill>
+                            <a:latin typeface="Cambria Math" panose="02040503050406030204" pitchFamily="18" charset="0"/>
+                          </a:rPr>
+                          <m:t>𝑚</m:t>
+                        </m:r>
+                      </m:e>
+                      <m:sub>
+                        <m:r>
+                          <a:rPr lang="en-US">
+                            <a:solidFill>
+                              <a:schemeClr val="tx1"/>
+                            </a:solidFill>
+                            <a:latin typeface="Cambria Math" panose="02040503050406030204" pitchFamily="18" charset="0"/>
+                          </a:rPr>
+                          <m:t>2</m:t>
+                        </m:r>
+                      </m:sub>
+                    </m:sSub>
+                  </m:oMath>
+                </a14:m>
+                <a:r>
+                  <a:rPr lang="de-DE" dirty="0">
+                    <a:solidFill>
+                      <a:schemeClr val="tx1"/>
+                    </a:solidFill>
+                  </a:rPr>
+                  <a:t>	: die Massen der beiden Objekte</a:t>
+                </a:r>
+              </a:p>
+              <a:p>
+                <a14:m>
+                  <m:oMath xmlns:m="http://schemas.openxmlformats.org/officeDocument/2006/math">
+                    <m:sSub>
+                      <m:sSubPr>
+                        <m:ctrlPr>
+                          <a:rPr lang="en-US" i="1" smtClean="0">
+                            <a:solidFill>
+                              <a:schemeClr val="tx1"/>
+                            </a:solidFill>
+                            <a:latin typeface="Cambria Math" panose="02040503050406030204" pitchFamily="18" charset="0"/>
+                          </a:rPr>
+                        </m:ctrlPr>
+                      </m:sSubPr>
+                      <m:e>
+                        <m:r>
+                          <a:rPr lang="en-US" i="1">
+                            <a:solidFill>
+                              <a:schemeClr val="tx1"/>
+                            </a:solidFill>
+                            <a:latin typeface="Cambria Math" panose="02040503050406030204" pitchFamily="18" charset="0"/>
+                          </a:rPr>
+                          <m:t>𝑣</m:t>
+                        </m:r>
+                      </m:e>
+                      <m:sub>
+                        <m:r>
+                          <a:rPr lang="en-US" i="0">
+                            <a:solidFill>
+                              <a:schemeClr val="tx1"/>
+                            </a:solidFill>
+                            <a:latin typeface="Cambria Math" panose="02040503050406030204" pitchFamily="18" charset="0"/>
+                          </a:rPr>
+                          <m:t>1</m:t>
+                        </m:r>
+                      </m:sub>
+                    </m:sSub>
+                  </m:oMath>
+                </a14:m>
+                <a:r>
+                  <a:rPr lang="de-DE" dirty="0">
+                    <a:solidFill>
+                      <a:schemeClr val="tx1"/>
+                    </a:solidFill>
+                  </a:rPr>
+                  <a:t>, </a:t>
+                </a:r>
+                <a14:m>
+                  <m:oMath xmlns:m="http://schemas.openxmlformats.org/officeDocument/2006/math">
+                    <m:sSub>
+                      <m:sSubPr>
+                        <m:ctrlPr>
+                          <a:rPr lang="en-US" i="1">
+                            <a:solidFill>
+                              <a:schemeClr val="tx1"/>
+                            </a:solidFill>
+                            <a:latin typeface="Cambria Math" panose="02040503050406030204" pitchFamily="18" charset="0"/>
+                          </a:rPr>
+                        </m:ctrlPr>
+                      </m:sSubPr>
+                      <m:e>
+                        <m:r>
+                          <a:rPr lang="en-US" i="1">
+                            <a:solidFill>
+                              <a:schemeClr val="tx1"/>
+                            </a:solidFill>
+                            <a:latin typeface="Cambria Math" panose="02040503050406030204" pitchFamily="18" charset="0"/>
+                          </a:rPr>
+                          <m:t>𝑣</m:t>
+                        </m:r>
+                      </m:e>
+                      <m:sub>
+                        <m:r>
+                          <a:rPr lang="en-US">
+                            <a:solidFill>
+                              <a:schemeClr val="tx1"/>
+                            </a:solidFill>
+                            <a:latin typeface="Cambria Math" panose="02040503050406030204" pitchFamily="18" charset="0"/>
+                          </a:rPr>
+                          <m:t>2</m:t>
+                        </m:r>
+                      </m:sub>
+                    </m:sSub>
+                  </m:oMath>
+                </a14:m>
+                <a:r>
+                  <a:rPr lang="de-DE" dirty="0">
+                    <a:solidFill>
+                      <a:schemeClr val="tx1"/>
+                    </a:solidFill>
+                  </a:rPr>
+                  <a:t> 	: die Geschwindigkeiten der beiden Objekte</a:t>
+                </a:r>
+              </a:p>
+              <a:p>
+                <a:r>
+                  <a:rPr lang="de-DE" dirty="0"/>
+                  <a:t>Die rechte Seite der Gleichung spiegelt den Impuls nach dem Stoß</a:t>
+                </a:r>
+                <a:endParaRPr lang="de-DE" dirty="0">
+                  <a:solidFill>
+                    <a:schemeClr val="tx1"/>
+                  </a:solidFill>
+                </a:endParaRPr>
+              </a:p>
+              <a:p>
+                <a:pPr marL="0" indent="0">
+                  <a:buNone/>
+                </a:pPr>
+                <a:endParaRPr lang="en-US" dirty="0">
+                  <a:solidFill>
+                    <a:schemeClr val="tx1"/>
+                  </a:solidFill>
+                </a:endParaRPr>
+              </a:p>
+              <a:p>
+                <a:endParaRPr lang="en-US" dirty="0">
+                  <a:solidFill>
+                    <a:schemeClr val="tx1"/>
+                  </a:solidFill>
+                </a:endParaRPr>
+              </a:p>
+              <a:p>
+                <a:endParaRPr lang="en-US" dirty="0">
+                  <a:solidFill>
+                    <a:schemeClr val="tx1"/>
+                  </a:solidFill>
+                </a:endParaRPr>
+              </a:p>
+            </p:txBody>
+          </p:sp>
+        </mc:Choice>
+        <mc:Fallback>
+          <p:sp>
+            <p:nvSpPr>
+              <p:cNvPr id="3" name="Inhaltsplatzhalter 2">
+                <a:extLst>
+                  <a:ext uri="{FF2B5EF4-FFF2-40B4-BE49-F238E27FC236}">
+                    <a16:creationId xmlns:a16="http://schemas.microsoft.com/office/drawing/2014/main" id="{C39C3033-2096-2497-889E-7F51FB339A2A}"/>
+                  </a:ext>
+                </a:extLst>
+              </p:cNvPr>
+              <p:cNvSpPr>
+                <a:spLocks noGrp="1" noRot="1" noChangeAspect="1" noMove="1" noResize="1" noEditPoints="1" noAdjustHandles="1" noChangeArrowheads="1" noChangeShapeType="1" noTextEdit="1"/>
+              </p:cNvSpPr>
+              <p:nvPr>
+                <p:ph idx="1"/>
+              </p:nvPr>
+            </p:nvSpPr>
+            <p:spPr>
+              <a:blipFill>
+                <a:blip r:embed="rId2"/>
+                <a:stretch>
+                  <a:fillRect l="-1043" t="-2381" r="-986"/>
+                </a:stretch>
+              </a:blipFill>
+            </p:spPr>
+            <p:txBody>
+              <a:bodyPr/>
+              <a:lstStyle/>
+              <a:p>
+                <a:r>
+                  <a:rPr lang="en-US">
+                    <a:noFill/>
+                  </a:rPr>
+                  <a:t> </a:t>
+                </a:r>
+              </a:p>
+            </p:txBody>
+          </p:sp>
+        </mc:Fallback>
+      </mc:AlternateContent>
+      <p:sp>
+        <p:nvSpPr>
+          <p:cNvPr id="4" name="Datumsplatzhalter 3">
+            <a:extLst>
+              <a:ext uri="{FF2B5EF4-FFF2-40B4-BE49-F238E27FC236}">
+                <a16:creationId xmlns:a16="http://schemas.microsoft.com/office/drawing/2014/main" id="{F6C0FEDE-E6DB-3AFF-D753-23EC20C21913}"/>
+              </a:ext>
+            </a:extLst>
+          </p:cNvPr>
+          <p:cNvSpPr>
+            <a:spLocks noGrp="1"/>
+          </p:cNvSpPr>
+          <p:nvPr>
+            <p:ph type="dt" sz="half" idx="10"/>
           </p:nvPr>
         </p:nvSpPr>
         <p:spPr/>
@@ -4513,14 +9355,47 @@
           <a:bodyPr/>
           <a:lstStyle/>
           <a:p>
-            <a:endParaRPr lang="de-DE" dirty="0"/>
+            <a:fld id="{F93171F1-3AC1-4821-9122-C904B048FE43}" type="datetime1">
+              <a:rPr lang="de-DE" smtClean="0"/>
+              <a:t>10.12.2024</a:t>
+            </a:fld>
+            <a:endParaRPr lang="de-DE"/>
+          </a:p>
+        </p:txBody>
+      </p:sp>
+      <p:sp>
+        <p:nvSpPr>
+          <p:cNvPr id="5" name="Foliennummernplatzhalter 4">
+            <a:extLst>
+              <a:ext uri="{FF2B5EF4-FFF2-40B4-BE49-F238E27FC236}">
+                <a16:creationId xmlns:a16="http://schemas.microsoft.com/office/drawing/2014/main" id="{A434F4B3-BFCE-0B70-4C82-1BF9411AA42B}"/>
+              </a:ext>
+            </a:extLst>
+          </p:cNvPr>
+          <p:cNvSpPr>
+            <a:spLocks noGrp="1"/>
+          </p:cNvSpPr>
+          <p:nvPr>
+            <p:ph type="sldNum" sz="quarter" idx="12"/>
+          </p:nvPr>
+        </p:nvSpPr>
+        <p:spPr/>
+        <p:txBody>
+          <a:bodyPr/>
+          <a:lstStyle/>
+          <a:p>
+            <a:fld id="{2F2A0DB8-2729-3A4D-A362-07849BE8AC54}" type="slidenum">
+              <a:rPr lang="de-DE" smtClean="0"/>
+              <a:t>9</a:t>
+            </a:fld>
+            <a:endParaRPr lang="de-DE"/>
           </a:p>
         </p:txBody>
       </p:sp>
     </p:spTree>
     <p:extLst>
       <p:ext uri="{BB962C8B-B14F-4D97-AF65-F5344CB8AC3E}">
-        <p14:creationId xmlns:p14="http://schemas.microsoft.com/office/powerpoint/2010/main" val="239348592"/>
+        <p14:creationId xmlns:p14="http://schemas.microsoft.com/office/powerpoint/2010/main" val="582870880"/>
       </p:ext>
     </p:extLst>
   </p:cSld>
@@ -4843,4 +9718,319 @@
     </a:ext>
   </a:extLst>
 </a:theme>
+</file>
+
+<file path=ppt/theme/theme2.xml><?xml version="1.0" encoding="utf-8"?>
+<a:theme xmlns:a="http://schemas.openxmlformats.org/drawingml/2006/main" name="Office">
+  <a:themeElements>
+    <a:clrScheme name="Office">
+      <a:dk1>
+        <a:sysClr val="windowText" lastClr="000000"/>
+      </a:dk1>
+      <a:lt1>
+        <a:sysClr val="window" lastClr="FFFFFF"/>
+      </a:lt1>
+      <a:dk2>
+        <a:srgbClr val="0E2841"/>
+      </a:dk2>
+      <a:lt2>
+        <a:srgbClr val="E8E8E8"/>
+      </a:lt2>
+      <a:accent1>
+        <a:srgbClr val="156082"/>
+      </a:accent1>
+      <a:accent2>
+        <a:srgbClr val="E97132"/>
+      </a:accent2>
+      <a:accent3>
+        <a:srgbClr val="196B24"/>
+      </a:accent3>
+      <a:accent4>
+        <a:srgbClr val="0F9ED5"/>
+      </a:accent4>
+      <a:accent5>
+        <a:srgbClr val="A02B93"/>
+      </a:accent5>
+      <a:accent6>
+        <a:srgbClr val="4EA72E"/>
+      </a:accent6>
+      <a:hlink>
+        <a:srgbClr val="467886"/>
+      </a:hlink>
+      <a:folHlink>
+        <a:srgbClr val="96607D"/>
+      </a:folHlink>
+    </a:clrScheme>
+    <a:fontScheme name="Office">
+      <a:majorFont>
+        <a:latin typeface="Aptos Display" panose="02110004020202020204"/>
+        <a:ea typeface=""/>
+        <a:cs typeface=""/>
+        <a:font script="Jpan" typeface="游ゴシック Light"/>
+        <a:font script="Hang" typeface="맑은 고딕"/>
+        <a:font script="Hans" typeface="等线 Light"/>
+        <a:font script="Hant" typeface="新細明體"/>
+        <a:font script="Arab" typeface="Times New Roman"/>
+        <a:font script="Hebr" typeface="Times New Roman"/>
+        <a:font script="Thai" typeface="Angsana New"/>
+        <a:font script="Ethi" typeface="Nyala"/>
+        <a:font script="Beng" typeface="Vrinda"/>
+        <a:font script="Gujr" typeface="Shruti"/>
+        <a:font script="Khmr" typeface="MoolBoran"/>
+        <a:font script="Knda" typeface="Tunga"/>
+        <a:font script="Guru" typeface="Raavi"/>
+        <a:font script="Cans" typeface="Euphemia"/>
+        <a:font script="Cher" typeface="Plantagenet Cherokee"/>
+        <a:font script="Yiii" typeface="Microsoft Yi Baiti"/>
+        <a:font script="Tibt" typeface="Microsoft Himalaya"/>
+        <a:font script="Thaa" typeface="MV Boli"/>
+        <a:font script="Deva" typeface="Mangal"/>
+        <a:font script="Telu" typeface="Gautami"/>
+        <a:font script="Taml" typeface="Latha"/>
+        <a:font script="Syrc" typeface="Estrangelo Edessa"/>
+        <a:font script="Orya" typeface="Kalinga"/>
+        <a:font script="Mlym" typeface="Kartika"/>
+        <a:font script="Laoo" typeface="DokChampa"/>
+        <a:font script="Sinh" typeface="Iskoola Pota"/>
+        <a:font script="Mong" typeface="Mongolian Baiti"/>
+        <a:font script="Viet" typeface="Times New Roman"/>
+        <a:font script="Uigh" typeface="Microsoft Uighur"/>
+        <a:font script="Geor" typeface="Sylfaen"/>
+        <a:font script="Armn" typeface="Arial"/>
+        <a:font script="Bugi" typeface="Leelawadee UI"/>
+        <a:font script="Bopo" typeface="Microsoft JhengHei"/>
+        <a:font script="Java" typeface="Javanese Text"/>
+        <a:font script="Lisu" typeface="Segoe UI"/>
+        <a:font script="Mymr" typeface="Myanmar Text"/>
+        <a:font script="Nkoo" typeface="Ebrima"/>
+        <a:font script="Olck" typeface="Nirmala UI"/>
+        <a:font script="Osma" typeface="Ebrima"/>
+        <a:font script="Phag" typeface="Phagspa"/>
+        <a:font script="Syrn" typeface="Estrangelo Edessa"/>
+        <a:font script="Syrj" typeface="Estrangelo Edessa"/>
+        <a:font script="Syre" typeface="Estrangelo Edessa"/>
+        <a:font script="Sora" typeface="Nirmala UI"/>
+        <a:font script="Tale" typeface="Microsoft Tai Le"/>
+        <a:font script="Talu" typeface="Microsoft New Tai Lue"/>
+        <a:font script="Tfng" typeface="Ebrima"/>
+      </a:majorFont>
+      <a:minorFont>
+        <a:latin typeface="Aptos" panose="02110004020202020204"/>
+        <a:ea typeface=""/>
+        <a:cs typeface=""/>
+        <a:font script="Jpan" typeface="游ゴシック"/>
+        <a:font script="Hang" typeface="맑은 고딕"/>
+        <a:font script="Hans" typeface="等线"/>
+        <a:font script="Hant" typeface="新細明體"/>
+        <a:font script="Arab" typeface="Arial"/>
+        <a:font script="Hebr" typeface="Arial"/>
+        <a:font script="Thai" typeface="Cordia New"/>
+        <a:font script="Ethi" typeface="Nyala"/>
+        <a:font script="Beng" typeface="Vrinda"/>
+        <a:font script="Gujr" typeface="Shruti"/>
+        <a:font script="Khmr" typeface="DaunPenh"/>
+        <a:font script="Knda" typeface="Tunga"/>
+        <a:font script="Guru" typeface="Raavi"/>
+        <a:font script="Cans" typeface="Euphemia"/>
+        <a:font script="Cher" typeface="Plantagenet Cherokee"/>
+        <a:font script="Yiii" typeface="Microsoft Yi Baiti"/>
+        <a:font script="Tibt" typeface="Microsoft Himalaya"/>
+        <a:font script="Thaa" typeface="MV Boli"/>
+        <a:font script="Deva" typeface="Mangal"/>
+        <a:font script="Telu" typeface="Gautami"/>
+        <a:font script="Taml" typeface="Latha"/>
+        <a:font script="Syrc" typeface="Estrangelo Edessa"/>
+        <a:font script="Orya" typeface="Kalinga"/>
+        <a:font script="Mlym" typeface="Kartika"/>
+        <a:font script="Laoo" typeface="DokChampa"/>
+        <a:font script="Sinh" typeface="Iskoola Pota"/>
+        <a:font script="Mong" typeface="Mongolian Baiti"/>
+        <a:font script="Viet" typeface="Arial"/>
+        <a:font script="Uigh" typeface="Microsoft Uighur"/>
+        <a:font script="Geor" typeface="Sylfaen"/>
+        <a:font script="Armn" typeface="Arial"/>
+        <a:font script="Bugi" typeface="Leelawadee UI"/>
+        <a:font script="Bopo" typeface="Microsoft JhengHei"/>
+        <a:font script="Java" typeface="Javanese Text"/>
+        <a:font script="Lisu" typeface="Segoe UI"/>
+        <a:font script="Mymr" typeface="Myanmar Text"/>
+        <a:font script="Nkoo" typeface="Ebrima"/>
+        <a:font script="Olck" typeface="Nirmala UI"/>
+        <a:font script="Osma" typeface="Ebrima"/>
+        <a:font script="Phag" typeface="Phagspa"/>
+        <a:font script="Syrn" typeface="Estrangelo Edessa"/>
+        <a:font script="Syrj" typeface="Estrangelo Edessa"/>
+        <a:font script="Syre" typeface="Estrangelo Edessa"/>
+        <a:font script="Sora" typeface="Nirmala UI"/>
+        <a:font script="Tale" typeface="Microsoft Tai Le"/>
+        <a:font script="Talu" typeface="Microsoft New Tai Lue"/>
+        <a:font script="Tfng" typeface="Ebrima"/>
+      </a:minorFont>
+    </a:fontScheme>
+    <a:fmtScheme name="Office">
+      <a:fillStyleLst>
+        <a:solidFill>
+          <a:schemeClr val="phClr"/>
+        </a:solidFill>
+        <a:gradFill rotWithShape="1">
+          <a:gsLst>
+            <a:gs pos="0">
+              <a:schemeClr val="phClr">
+                <a:lumMod val="110000"/>
+                <a:satMod val="105000"/>
+                <a:tint val="67000"/>
+              </a:schemeClr>
+            </a:gs>
+            <a:gs pos="50000">
+              <a:schemeClr val="phClr">
+                <a:lumMod val="105000"/>
+                <a:satMod val="103000"/>
+                <a:tint val="73000"/>
+              </a:schemeClr>
+            </a:gs>
+            <a:gs pos="100000">
+              <a:schemeClr val="phClr">
+                <a:lumMod val="105000"/>
+                <a:satMod val="109000"/>
+                <a:tint val="81000"/>
+              </a:schemeClr>
+            </a:gs>
+          </a:gsLst>
+          <a:lin ang="5400000" scaled="0"/>
+        </a:gradFill>
+        <a:gradFill rotWithShape="1">
+          <a:gsLst>
+            <a:gs pos="0">
+              <a:schemeClr val="phClr">
+                <a:satMod val="103000"/>
+                <a:lumMod val="102000"/>
+                <a:tint val="94000"/>
+              </a:schemeClr>
+            </a:gs>
+            <a:gs pos="50000">
+              <a:schemeClr val="phClr">
+                <a:satMod val="110000"/>
+                <a:lumMod val="100000"/>
+                <a:shade val="100000"/>
+              </a:schemeClr>
+            </a:gs>
+            <a:gs pos="100000">
+              <a:schemeClr val="phClr">
+                <a:lumMod val="99000"/>
+                <a:satMod val="120000"/>
+                <a:shade val="78000"/>
+              </a:schemeClr>
+            </a:gs>
+          </a:gsLst>
+          <a:lin ang="5400000" scaled="0"/>
+        </a:gradFill>
+      </a:fillStyleLst>
+      <a:lnStyleLst>
+        <a:ln w="12700" cap="flat" cmpd="sng" algn="ctr">
+          <a:solidFill>
+            <a:schemeClr val="phClr"/>
+          </a:solidFill>
+          <a:prstDash val="solid"/>
+          <a:miter lim="800000"/>
+        </a:ln>
+        <a:ln w="19050" cap="flat" cmpd="sng" algn="ctr">
+          <a:solidFill>
+            <a:schemeClr val="phClr"/>
+          </a:solidFill>
+          <a:prstDash val="solid"/>
+          <a:miter lim="800000"/>
+        </a:ln>
+        <a:ln w="25400" cap="flat" cmpd="sng" algn="ctr">
+          <a:solidFill>
+            <a:schemeClr val="phClr"/>
+          </a:solidFill>
+          <a:prstDash val="solid"/>
+          <a:miter lim="800000"/>
+        </a:ln>
+      </a:lnStyleLst>
+      <a:effectStyleLst>
+        <a:effectStyle>
+          <a:effectLst/>
+        </a:effectStyle>
+        <a:effectStyle>
+          <a:effectLst/>
+        </a:effectStyle>
+        <a:effectStyle>
+          <a:effectLst>
+            <a:outerShdw blurRad="57150" dist="19050" dir="5400000" algn="ctr" rotWithShape="0">
+              <a:srgbClr val="000000">
+                <a:alpha val="63000"/>
+              </a:srgbClr>
+            </a:outerShdw>
+          </a:effectLst>
+        </a:effectStyle>
+      </a:effectStyleLst>
+      <a:bgFillStyleLst>
+        <a:solidFill>
+          <a:schemeClr val="phClr"/>
+        </a:solidFill>
+        <a:solidFill>
+          <a:schemeClr val="phClr">
+            <a:tint val="95000"/>
+            <a:satMod val="170000"/>
+          </a:schemeClr>
+        </a:solidFill>
+        <a:gradFill rotWithShape="1">
+          <a:gsLst>
+            <a:gs pos="0">
+              <a:schemeClr val="phClr">
+                <a:tint val="93000"/>
+                <a:satMod val="150000"/>
+                <a:shade val="98000"/>
+                <a:lumMod val="102000"/>
+              </a:schemeClr>
+            </a:gs>
+            <a:gs pos="50000">
+              <a:schemeClr val="phClr">
+                <a:tint val="98000"/>
+                <a:satMod val="130000"/>
+                <a:shade val="90000"/>
+                <a:lumMod val="103000"/>
+              </a:schemeClr>
+            </a:gs>
+            <a:gs pos="100000">
+              <a:schemeClr val="phClr">
+                <a:shade val="63000"/>
+                <a:satMod val="120000"/>
+              </a:schemeClr>
+            </a:gs>
+          </a:gsLst>
+          <a:lin ang="5400000" scaled="0"/>
+        </a:gradFill>
+      </a:bgFillStyleLst>
+    </a:fmtScheme>
+  </a:themeElements>
+  <a:objectDefaults>
+    <a:lnDef>
+      <a:spPr/>
+      <a:bodyPr/>
+      <a:lstStyle/>
+      <a:style>
+        <a:lnRef idx="2">
+          <a:schemeClr val="accent1"/>
+        </a:lnRef>
+        <a:fillRef idx="0">
+          <a:schemeClr val="accent1"/>
+        </a:fillRef>
+        <a:effectRef idx="1">
+          <a:schemeClr val="accent1"/>
+        </a:effectRef>
+        <a:fontRef idx="minor">
+          <a:schemeClr val="tx1"/>
+        </a:fontRef>
+      </a:style>
+    </a:lnDef>
+  </a:objectDefaults>
+  <a:extraClrSchemeLst/>
+  <a:extLst>
+    <a:ext uri="{05A4C25C-085E-4340-85A3-A5531E510DB2}">
+      <thm15:themeFamily xmlns:thm15="http://schemas.microsoft.com/office/thememl/2012/main" name="Office Theme" id="{2E142A2C-CD16-42D6-873A-C26D2A0506FA}" vid="{1BDDFF52-6CD6-40A5-AB3C-68EB2F1E4D0A}"/>
+    </a:ext>
+  </a:extLst>
+</a:theme>
 </file>
--- a/SSPS_11.12_sketch.pptx
+++ b/SSPS_11.12_sketch.pptx
@@ -210,7 +210,7 @@
           <a:p>
             <a:fld id="{1BD3FA11-E74D-424F-9AF9-4FB3E3C76A33}" type="datetimeFigureOut">
               <a:rPr lang="en-US" smtClean="0"/>
-              <a:t>12/10/2024</a:t>
+              <a:t>12/11/2024</a:t>
             </a:fld>
             <a:endParaRPr lang="en-US"/>
           </a:p>
@@ -625,7 +625,7 @@
           <a:p>
             <a:fld id="{9D6937DF-4E0C-4BDE-8A0A-EA2E03F3CD75}" type="datetime1">
               <a:rPr lang="de-DE" smtClean="0"/>
-              <a:t>10.12.2024</a:t>
+              <a:t>11.12.2024</a:t>
             </a:fld>
             <a:endParaRPr lang="de-DE"/>
           </a:p>
@@ -823,7 +823,7 @@
           <a:p>
             <a:fld id="{EB80D259-FD4B-4365-9AA3-F6CED0046B76}" type="datetime1">
               <a:rPr lang="de-DE" smtClean="0"/>
-              <a:t>10.12.2024</a:t>
+              <a:t>11.12.2024</a:t>
             </a:fld>
             <a:endParaRPr lang="de-DE"/>
           </a:p>
@@ -1031,7 +1031,7 @@
           <a:p>
             <a:fld id="{5DC2BD21-A82E-44BA-95E6-C97C344CDF55}" type="datetime1">
               <a:rPr lang="de-DE" smtClean="0"/>
-              <a:t>10.12.2024</a:t>
+              <a:t>11.12.2024</a:t>
             </a:fld>
             <a:endParaRPr lang="de-DE"/>
           </a:p>
@@ -1229,7 +1229,7 @@
           <a:p>
             <a:fld id="{F93171F1-3AC1-4821-9122-C904B048FE43}" type="datetime1">
               <a:rPr lang="de-DE" smtClean="0"/>
-              <a:t>10.12.2024</a:t>
+              <a:t>11.12.2024</a:t>
             </a:fld>
             <a:endParaRPr lang="de-DE"/>
           </a:p>
@@ -1504,7 +1504,7 @@
           <a:p>
             <a:fld id="{6A36EF52-4910-4C2D-8CF3-4DB6C99B4BD5}" type="datetime1">
               <a:rPr lang="de-DE" smtClean="0"/>
-              <a:t>10.12.2024</a:t>
+              <a:t>11.12.2024</a:t>
             </a:fld>
             <a:endParaRPr lang="de-DE"/>
           </a:p>
@@ -1769,7 +1769,7 @@
           <a:p>
             <a:fld id="{185202DE-F5EC-4844-90C4-75EB9E59292C}" type="datetime1">
               <a:rPr lang="de-DE" smtClean="0"/>
-              <a:t>10.12.2024</a:t>
+              <a:t>11.12.2024</a:t>
             </a:fld>
             <a:endParaRPr lang="de-DE"/>
           </a:p>
@@ -2181,7 +2181,7 @@
           <a:p>
             <a:fld id="{93226BE8-CE1A-44BA-B043-BB8219D521B8}" type="datetime1">
               <a:rPr lang="de-DE" smtClean="0"/>
-              <a:t>10.12.2024</a:t>
+              <a:t>11.12.2024</a:t>
             </a:fld>
             <a:endParaRPr lang="de-DE"/>
           </a:p>
@@ -2322,7 +2322,7 @@
           <a:p>
             <a:fld id="{77536EA2-277B-4F32-BBD7-E718D7F3C975}" type="datetime1">
               <a:rPr lang="de-DE" smtClean="0"/>
-              <a:t>10.12.2024</a:t>
+              <a:t>11.12.2024</a:t>
             </a:fld>
             <a:endParaRPr lang="de-DE"/>
           </a:p>
@@ -2435,7 +2435,7 @@
           <a:p>
             <a:fld id="{28A080B9-28ED-42A6-9FFE-BC3E1F17444A}" type="datetime1">
               <a:rPr lang="de-DE" smtClean="0"/>
-              <a:t>10.12.2024</a:t>
+              <a:t>11.12.2024</a:t>
             </a:fld>
             <a:endParaRPr lang="de-DE"/>
           </a:p>
@@ -2746,7 +2746,7 @@
           <a:p>
             <a:fld id="{585322BD-A736-420C-8D41-F3A667DCA06D}" type="datetime1">
               <a:rPr lang="de-DE" smtClean="0"/>
-              <a:t>10.12.2024</a:t>
+              <a:t>11.12.2024</a:t>
             </a:fld>
             <a:endParaRPr lang="de-DE"/>
           </a:p>
@@ -3034,7 +3034,7 @@
           <a:p>
             <a:fld id="{56F37B7C-2BE5-47E3-9028-2102B2B00543}" type="datetime1">
               <a:rPr lang="de-DE" smtClean="0"/>
-              <a:t>10.12.2024</a:t>
+              <a:t>11.12.2024</a:t>
             </a:fld>
             <a:endParaRPr lang="de-DE"/>
           </a:p>
@@ -3275,7 +3275,7 @@
           <a:p>
             <a:fld id="{8EBB7E99-C74A-49F1-8D09-92A944F1D2C7}" type="datetime1">
               <a:rPr lang="de-DE" smtClean="0"/>
-              <a:t>10.12.2024</a:t>
+              <a:t>11.12.2024</a:t>
             </a:fld>
             <a:endParaRPr lang="de-DE"/>
           </a:p>
@@ -3821,8 +3821,8 @@
           </a:p>
         </p:txBody>
       </p:sp>
-      <mc:AlternateContent xmlns:mc="http://schemas.openxmlformats.org/markup-compatibility/2006">
-        <mc:Choice xmlns:a14="http://schemas.microsoft.com/office/drawing/2010/main" Requires="a14">
+      <mc:AlternateContent xmlns:mc="http://schemas.openxmlformats.org/markup-compatibility/2006" xmlns:a14="http://schemas.microsoft.com/office/drawing/2010/main">
+        <mc:Choice Requires="a14">
           <p:sp>
             <p:nvSpPr>
               <p:cNvPr id="3" name="Inhaltsplatzhalter 2">
@@ -4094,7 +4094,7 @@
             </p:txBody>
           </p:sp>
         </mc:Choice>
-        <mc:Fallback>
+        <mc:Fallback xmlns="">
           <p:sp>
             <p:nvSpPr>
               <p:cNvPr id="3" name="Inhaltsplatzhalter 2">
@@ -4157,7 +4157,7 @@
           <a:p>
             <a:fld id="{F93171F1-3AC1-4821-9122-C904B048FE43}" type="datetime1">
               <a:rPr lang="de-DE" smtClean="0"/>
-              <a:t>10.12.2024</a:t>
+              <a:t>11.12.2024</a:t>
             </a:fld>
             <a:endParaRPr lang="de-DE"/>
           </a:p>
@@ -4251,8 +4251,8 @@
           </a:p>
         </p:txBody>
       </p:sp>
-      <mc:AlternateContent xmlns:mc="http://schemas.openxmlformats.org/markup-compatibility/2006">
-        <mc:Choice xmlns:a14="http://schemas.microsoft.com/office/drawing/2010/main" Requires="a14">
+      <mc:AlternateContent xmlns:mc="http://schemas.openxmlformats.org/markup-compatibility/2006" xmlns:a14="http://schemas.microsoft.com/office/drawing/2010/main">
+        <mc:Choice Requires="a14">
           <p:sp>
             <p:nvSpPr>
               <p:cNvPr id="3" name="Inhaltsplatzhalter 2">
@@ -4682,7 +4682,7 @@
             </p:txBody>
           </p:sp>
         </mc:Choice>
-        <mc:Fallback>
+        <mc:Fallback xmlns="">
           <p:sp>
             <p:nvSpPr>
               <p:cNvPr id="3" name="Inhaltsplatzhalter 2">
@@ -4745,7 +4745,7 @@
           <a:p>
             <a:fld id="{F93171F1-3AC1-4821-9122-C904B048FE43}" type="datetime1">
               <a:rPr lang="de-DE" smtClean="0"/>
-              <a:t>10.12.2024</a:t>
+              <a:t>11.12.2024</a:t>
             </a:fld>
             <a:endParaRPr lang="de-DE"/>
           </a:p>
@@ -4956,7 +4956,7 @@
           <a:p>
             <a:fld id="{BD24458A-0043-4E4F-8027-3992B36F2154}" type="datetime1">
               <a:rPr lang="de-DE" smtClean="0"/>
-              <a:t>10.12.2024</a:t>
+              <a:t>11.12.2024</a:t>
             </a:fld>
             <a:endParaRPr lang="de-DE"/>
           </a:p>
@@ -5127,7 +5127,7 @@
           <a:p>
             <a:fld id="{5DF3E358-6AEA-4C2D-970A-3E87B577A52D}" type="datetime1">
               <a:rPr lang="de-DE" smtClean="0"/>
-              <a:t>10.12.2024</a:t>
+              <a:t>11.12.2024</a:t>
             </a:fld>
             <a:endParaRPr lang="de-DE"/>
           </a:p>
@@ -5230,8 +5230,8 @@
           </a:p>
         </p:txBody>
       </p:sp>
-      <mc:AlternateContent xmlns:mc="http://schemas.openxmlformats.org/markup-compatibility/2006">
-        <mc:Choice xmlns:a14="http://schemas.microsoft.com/office/drawing/2010/main" Requires="a14">
+      <mc:AlternateContent xmlns:mc="http://schemas.openxmlformats.org/markup-compatibility/2006" xmlns:a14="http://schemas.microsoft.com/office/drawing/2010/main">
+        <mc:Choice Requires="a14">
           <p:sp>
             <p:nvSpPr>
               <p:cNvPr id="7" name="Inhaltsplatzhalter 6">
@@ -5370,6 +5370,7 @@
                         <a:solidFill>
                           <a:schemeClr val="tx1"/>
                         </a:solidFill>
+                        <a:latin typeface="Cambria Math" panose="02040503050406030204" pitchFamily="18" charset="0"/>
                       </a:rPr>
                       <m:t>Anzahl</m:t>
                     </m:r>
@@ -5378,6 +5379,7 @@
                         <a:solidFill>
                           <a:schemeClr val="tx1"/>
                         </a:solidFill>
+                        <a:latin typeface="Cambria Math" panose="02040503050406030204" pitchFamily="18" charset="0"/>
                       </a:rPr>
                       <m:t> </m:t>
                     </m:r>
@@ -5389,6 +5391,7 @@
                         <a:solidFill>
                           <a:schemeClr val="tx1"/>
                         </a:solidFill>
+                        <a:latin typeface="Cambria Math" panose="02040503050406030204" pitchFamily="18" charset="0"/>
                       </a:rPr>
                       <m:t>der</m:t>
                     </m:r>
@@ -5397,6 +5400,7 @@
                         <a:solidFill>
                           <a:schemeClr val="tx1"/>
                         </a:solidFill>
+                        <a:latin typeface="Cambria Math" panose="02040503050406030204" pitchFamily="18" charset="0"/>
                       </a:rPr>
                       <m:t> </m:t>
                     </m:r>
@@ -5408,6 +5412,7 @@
                         <a:solidFill>
                           <a:schemeClr val="tx1"/>
                         </a:solidFill>
+                        <a:latin typeface="Cambria Math" panose="02040503050406030204" pitchFamily="18" charset="0"/>
                       </a:rPr>
                       <m:t>Kollisione</m:t>
                     </m:r>
@@ -5436,6 +5441,7 @@
                             <a:solidFill>
                               <a:schemeClr val="tx1"/>
                             </a:solidFill>
+                            <a:latin typeface="Cambria Math" panose="02040503050406030204" pitchFamily="18" charset="0"/>
                           </a:rPr>
                         </m:ctrlPr>
                       </m:fPr>
@@ -5445,6 +5451,7 @@
                             <a:solidFill>
                               <a:schemeClr val="tx1"/>
                             </a:solidFill>
+                            <a:latin typeface="Cambria Math" panose="02040503050406030204" pitchFamily="18" charset="0"/>
                           </a:rPr>
                           <m:t>𝑛</m:t>
                         </m:r>
@@ -5453,6 +5460,7 @@
                             <a:solidFill>
                               <a:schemeClr val="tx1"/>
                             </a:solidFill>
+                            <a:latin typeface="Cambria Math" panose="02040503050406030204" pitchFamily="18" charset="0"/>
                           </a:rPr>
                           <m:t>(</m:t>
                         </m:r>
@@ -5461,6 +5469,7 @@
                             <a:solidFill>
                               <a:schemeClr val="tx1"/>
                             </a:solidFill>
+                            <a:latin typeface="Cambria Math" panose="02040503050406030204" pitchFamily="18" charset="0"/>
                           </a:rPr>
                           <m:t>𝑛</m:t>
                         </m:r>
@@ -5469,6 +5478,7 @@
                             <a:solidFill>
                               <a:schemeClr val="tx1"/>
                             </a:solidFill>
+                            <a:latin typeface="Cambria Math" panose="02040503050406030204" pitchFamily="18" charset="0"/>
                           </a:rPr>
                           <m:t>−1)</m:t>
                         </m:r>
@@ -5479,6 +5489,7 @@
                             <a:solidFill>
                               <a:schemeClr val="tx1"/>
                             </a:solidFill>
+                            <a:latin typeface="Cambria Math" panose="02040503050406030204" pitchFamily="18" charset="0"/>
                           </a:rPr>
                           <m:t>2</m:t>
                         </m:r>
@@ -5590,7 +5601,7 @@
             </p:txBody>
           </p:sp>
         </mc:Choice>
-        <mc:Fallback>
+        <mc:Fallback xmlns="">
           <p:sp>
             <p:nvSpPr>
               <p:cNvPr id="7" name="Inhaltsplatzhalter 6">
@@ -5939,7 +5950,7 @@
           <a:p>
             <a:fld id="{5FA4DF8F-3F4F-4AA2-9FEF-C29C6C768E8D}" type="datetime1">
               <a:rPr lang="de-DE" smtClean="0"/>
-              <a:t>10.12.2024</a:t>
+              <a:t>11.12.2024</a:t>
             </a:fld>
             <a:endParaRPr lang="de-DE"/>
           </a:p>
@@ -6133,7 +6144,7 @@
           <a:p>
             <a:fld id="{DBDC02CD-66B0-4A7F-A9B0-60DAC400A60B}" type="datetime1">
               <a:rPr lang="de-DE" smtClean="0"/>
-              <a:t>10.12.2024</a:t>
+              <a:t>11.12.2024</a:t>
             </a:fld>
             <a:endParaRPr lang="de-DE"/>
           </a:p>
@@ -6515,65 +6526,22 @@
           </a:fontRef>
         </p:style>
       </p:cxnSp>
-      <p:cxnSp>
-        <p:nvCxnSpPr>
-          <p:cNvPr id="23" name="Gerade Verbindung mit Pfeil 22">
-            <a:extLst>
-              <a:ext uri="{FF2B5EF4-FFF2-40B4-BE49-F238E27FC236}">
-                <a16:creationId xmlns:a16="http://schemas.microsoft.com/office/drawing/2014/main" id="{9A799939-BB06-F585-F281-96F9763961B4}"/>
-              </a:ext>
-            </a:extLst>
-          </p:cNvPr>
-          <p:cNvCxnSpPr/>
+      <p:sp>
+        <p:nvSpPr>
+          <p:cNvPr id="24" name="Textfeld 23">
+            <a:extLst>
+              <a:ext uri="{FF2B5EF4-FFF2-40B4-BE49-F238E27FC236}">
+                <a16:creationId xmlns:a16="http://schemas.microsoft.com/office/drawing/2014/main" id="{9343AD62-16FA-F580-6C5C-32DCA0D3E817}"/>
+              </a:ext>
+            </a:extLst>
+          </p:cNvPr>
+          <p:cNvSpPr txBox="1"/>
           <p:nvPr/>
-        </p:nvCxnSpPr>
+        </p:nvSpPr>
         <p:spPr>
           <a:xfrm>
-            <a:off x="4126522" y="3418829"/>
-            <a:ext cx="1969477" cy="0"/>
-          </a:xfrm>
-          <a:prstGeom prst="straightConnector1">
-            <a:avLst/>
-          </a:prstGeom>
-          <a:ln w="12700">
-            <a:solidFill>
-              <a:schemeClr val="tx1"/>
-            </a:solidFill>
-            <a:headEnd type="triangle"/>
-            <a:tailEnd type="triangle"/>
-          </a:ln>
-        </p:spPr>
-        <p:style>
-          <a:lnRef idx="2">
-            <a:schemeClr val="accent1"/>
-          </a:lnRef>
-          <a:fillRef idx="0">
-            <a:schemeClr val="accent1"/>
-          </a:fillRef>
-          <a:effectRef idx="1">
-            <a:schemeClr val="accent1"/>
-          </a:effectRef>
-          <a:fontRef idx="minor">
-            <a:schemeClr val="tx1"/>
-          </a:fontRef>
-        </p:style>
-      </p:cxnSp>
-      <p:sp>
-        <p:nvSpPr>
-          <p:cNvPr id="24" name="Textfeld 23">
-            <a:extLst>
-              <a:ext uri="{FF2B5EF4-FFF2-40B4-BE49-F238E27FC236}">
-                <a16:creationId xmlns:a16="http://schemas.microsoft.com/office/drawing/2014/main" id="{9343AD62-16FA-F580-6C5C-32DCA0D3E817}"/>
-              </a:ext>
-            </a:extLst>
-          </p:cNvPr>
-          <p:cNvSpPr txBox="1"/>
-          <p:nvPr/>
-        </p:nvSpPr>
-        <p:spPr>
-          <a:xfrm>
-            <a:off x="4557681" y="3404542"/>
-            <a:ext cx="1152880" cy="369332"/>
+            <a:off x="4107616" y="3404542"/>
+            <a:ext cx="1029449" cy="369332"/>
           </a:xfrm>
           <a:prstGeom prst="rect">
             <a:avLst/>
@@ -6588,7 +6556,7 @@
           <a:p>
             <a:r>
               <a:rPr lang="de-DE" dirty="0"/>
-              <a:t>R = 10 cm</a:t>
+              <a:t>R = 5 cm</a:t>
             </a:r>
             <a:endParaRPr lang="en-US" dirty="0"/>
           </a:p>
@@ -6733,7 +6701,7 @@
           <a:p>
             <a:fld id="{2D3D10DD-2A20-4C94-B6F1-82D8CB10BE32}" type="datetime1">
               <a:rPr lang="de-DE" smtClean="0"/>
-              <a:t>10.12.2024</a:t>
+              <a:t>11.12.2024</a:t>
             </a:fld>
             <a:endParaRPr lang="de-DE"/>
           </a:p>
@@ -6851,6 +6819,127 @@
             <a:r>
               <a:rPr lang="en-US" dirty="0" err="1"/>
               <a:t>berechnet</a:t>
+            </a:r>
+            <a:endParaRPr lang="en-US" dirty="0"/>
+          </a:p>
+        </p:txBody>
+      </p:sp>
+      <p:cxnSp>
+        <p:nvCxnSpPr>
+          <p:cNvPr id="4" name="Gerade Verbindung mit Pfeil 3">
+            <a:extLst>
+              <a:ext uri="{FF2B5EF4-FFF2-40B4-BE49-F238E27FC236}">
+                <a16:creationId xmlns:a16="http://schemas.microsoft.com/office/drawing/2014/main" id="{054C6D89-98D8-4404-6796-B0D9F6014874}"/>
+              </a:ext>
+            </a:extLst>
+          </p:cNvPr>
+          <p:cNvCxnSpPr>
+            <a:cxnSpLocks/>
+            <a:stCxn id="7" idx="2"/>
+          </p:cNvCxnSpPr>
+          <p:nvPr/>
+        </p:nvCxnSpPr>
+        <p:spPr>
+          <a:xfrm flipV="1">
+            <a:off x="4126523" y="3428996"/>
+            <a:ext cx="984738" cy="3"/>
+          </a:xfrm>
+          <a:prstGeom prst="straightConnector1">
+            <a:avLst/>
+          </a:prstGeom>
+          <a:ln>
+            <a:headEnd type="triangle"/>
+            <a:tailEnd type="triangle"/>
+          </a:ln>
+        </p:spPr>
+        <p:style>
+          <a:lnRef idx="1">
+            <a:schemeClr val="dk1"/>
+          </a:lnRef>
+          <a:fillRef idx="0">
+            <a:schemeClr val="dk1"/>
+          </a:fillRef>
+          <a:effectRef idx="0">
+            <a:schemeClr val="dk1"/>
+          </a:effectRef>
+          <a:fontRef idx="minor">
+            <a:schemeClr val="tx1"/>
+          </a:fontRef>
+        </p:style>
+      </p:cxnSp>
+      <p:cxnSp>
+        <p:nvCxnSpPr>
+          <p:cNvPr id="9" name="Gerade Verbindung mit Pfeil 8">
+            <a:extLst>
+              <a:ext uri="{FF2B5EF4-FFF2-40B4-BE49-F238E27FC236}">
+                <a16:creationId xmlns:a16="http://schemas.microsoft.com/office/drawing/2014/main" id="{FCF43E63-4070-EC13-FC93-EA16C6191B24}"/>
+              </a:ext>
+            </a:extLst>
+          </p:cNvPr>
+          <p:cNvCxnSpPr>
+            <a:cxnSpLocks/>
+          </p:cNvCxnSpPr>
+          <p:nvPr/>
+        </p:nvCxnSpPr>
+        <p:spPr>
+          <a:xfrm flipV="1">
+            <a:off x="7084642" y="3428993"/>
+            <a:ext cx="984738" cy="3"/>
+          </a:xfrm>
+          <a:prstGeom prst="straightConnector1">
+            <a:avLst/>
+          </a:prstGeom>
+          <a:ln>
+            <a:headEnd type="triangle"/>
+            <a:tailEnd type="triangle"/>
+          </a:ln>
+        </p:spPr>
+        <p:style>
+          <a:lnRef idx="1">
+            <a:schemeClr val="dk1"/>
+          </a:lnRef>
+          <a:fillRef idx="0">
+            <a:schemeClr val="dk1"/>
+          </a:fillRef>
+          <a:effectRef idx="0">
+            <a:schemeClr val="dk1"/>
+          </a:effectRef>
+          <a:fontRef idx="minor">
+            <a:schemeClr val="tx1"/>
+          </a:fontRef>
+        </p:style>
+      </p:cxnSp>
+      <p:sp>
+        <p:nvSpPr>
+          <p:cNvPr id="10" name="Textfeld 9">
+            <a:extLst>
+              <a:ext uri="{FF2B5EF4-FFF2-40B4-BE49-F238E27FC236}">
+                <a16:creationId xmlns:a16="http://schemas.microsoft.com/office/drawing/2014/main" id="{54537639-E394-791B-17B3-B09C30605255}"/>
+              </a:ext>
+            </a:extLst>
+          </p:cNvPr>
+          <p:cNvSpPr txBox="1"/>
+          <p:nvPr/>
+        </p:nvSpPr>
+        <p:spPr>
+          <a:xfrm>
+            <a:off x="7043834" y="3404542"/>
+            <a:ext cx="1029449" cy="369332"/>
+          </a:xfrm>
+          <a:prstGeom prst="rect">
+            <a:avLst/>
+          </a:prstGeom>
+          <a:noFill/>
+        </p:spPr>
+        <p:txBody>
+          <a:bodyPr wrap="none" rtlCol="0">
+            <a:spAutoFit/>
+          </a:bodyPr>
+          <a:lstStyle/>
+          <a:p>
+            <a:r>
+              <a:rPr lang="de-DE" dirty="0"/>
+              <a:t>R = 5 cm</a:t>
             </a:r>
             <a:endParaRPr lang="en-US" dirty="0"/>
           </a:p>
@@ -6995,7 +7084,7 @@
           <a:p>
             <a:fld id="{FFDF0BBE-802C-4922-9F54-CA93643B59F9}" type="datetime1">
               <a:rPr lang="de-DE" smtClean="0"/>
-              <a:t>10.12.2024</a:t>
+              <a:t>11.12.2024</a:t>
             </a:fld>
             <a:endParaRPr lang="de-DE"/>
           </a:p>
@@ -7375,7 +7464,7 @@
           <a:p>
             <a:fld id="{B86F56DF-FCB8-4D15-884B-940867336489}" type="datetime1">
               <a:rPr lang="de-DE" smtClean="0"/>
-              <a:t>10.12.2024</a:t>
+              <a:t>11.12.2024</a:t>
             </a:fld>
             <a:endParaRPr lang="de-DE"/>
           </a:p>
@@ -7541,7 +7630,7 @@
           <a:p>
             <a:fld id="{746B4C57-E489-4B0D-855B-6CF28BDB2031}" type="datetime1">
               <a:rPr lang="de-DE" smtClean="0"/>
-              <a:t>10.12.2024</a:t>
+              <a:t>11.12.2024</a:t>
             </a:fld>
             <a:endParaRPr lang="de-DE"/>
           </a:p>
@@ -7658,7 +7747,7 @@
           <a:p>
             <a:fld id="{F93171F1-3AC1-4821-9122-C904B048FE43}" type="datetime1">
               <a:rPr lang="de-DE" smtClean="0"/>
-              <a:t>10.12.2024</a:t>
+              <a:t>11.12.2024</a:t>
             </a:fld>
             <a:endParaRPr lang="de-DE"/>
           </a:p>
@@ -7924,8 +8013,8 @@
           </a:p>
         </p:txBody>
       </p:sp>
-      <mc:AlternateContent xmlns:mc="http://schemas.openxmlformats.org/markup-compatibility/2006">
-        <mc:Choice xmlns:a14="http://schemas.microsoft.com/office/drawing/2010/main" Requires="a14">
+      <mc:AlternateContent xmlns:mc="http://schemas.openxmlformats.org/markup-compatibility/2006" xmlns:a14="http://schemas.microsoft.com/office/drawing/2010/main">
+        <mc:Choice Requires="a14">
           <p:sp>
             <p:nvSpPr>
               <p:cNvPr id="3" name="Inhaltsplatzhalter 2">
@@ -8058,7 +8147,7 @@
             </p:txBody>
           </p:sp>
         </mc:Choice>
-        <mc:Fallback>
+        <mc:Fallback xmlns="">
           <p:sp>
             <p:nvSpPr>
               <p:cNvPr id="3" name="Inhaltsplatzhalter 2">
@@ -8121,7 +8210,7 @@
           <a:p>
             <a:fld id="{B19C0ABB-DBBF-464C-A96B-FED2BC8E1520}" type="datetime1">
               <a:rPr lang="de-DE" smtClean="0"/>
-              <a:t>10.12.2024</a:t>
+              <a:t>11.12.2024</a:t>
             </a:fld>
             <a:endParaRPr lang="de-DE"/>
           </a:p>
@@ -8215,8 +8304,8 @@
           </a:p>
         </p:txBody>
       </p:sp>
-      <mc:AlternateContent xmlns:mc="http://schemas.openxmlformats.org/markup-compatibility/2006">
-        <mc:Choice xmlns:a14="http://schemas.microsoft.com/office/drawing/2010/main" Requires="a14">
+      <mc:AlternateContent xmlns:mc="http://schemas.openxmlformats.org/markup-compatibility/2006" xmlns:a14="http://schemas.microsoft.com/office/drawing/2010/main">
+        <mc:Choice Requires="a14">
           <p:sp>
             <p:nvSpPr>
               <p:cNvPr id="3" name="Inhaltsplatzhalter 2">
@@ -8609,7 +8698,7 @@
                     <m:sSubSup>
                       <m:sSubSupPr>
                         <m:ctrlPr>
-                          <a:rPr lang="de-DE" b="0" i="0" smtClean="0">
+                          <a:rPr lang="de-DE" b="0" i="1" smtClean="0">
                             <a:solidFill>
                               <a:schemeClr val="tx1"/>
                             </a:solidFill>
@@ -9294,7 +9383,7 @@
             </p:txBody>
           </p:sp>
         </mc:Choice>
-        <mc:Fallback>
+        <mc:Fallback xmlns="">
           <p:sp>
             <p:nvSpPr>
               <p:cNvPr id="3" name="Inhaltsplatzhalter 2">
@@ -9357,7 +9446,7 @@
           <a:p>
             <a:fld id="{F93171F1-3AC1-4821-9122-C904B048FE43}" type="datetime1">
               <a:rPr lang="de-DE" smtClean="0"/>
-              <a:t>10.12.2024</a:t>
+              <a:t>11.12.2024</a:t>
             </a:fld>
             <a:endParaRPr lang="de-DE"/>
           </a:p>
